--- a/docs/CodeGraph_Hackathon_Slides.pptx
+++ b/docs/CodeGraph_Hackathon_Slides.pptx
@@ -4,21 +4,24 @@
   <p:sldMasterIdLst>
     <p:sldMasterId id="2147483648" r:id="rId1"/>
   </p:sldMasterIdLst>
+  <p:notesMasterIdLst>
+    <p:notesMasterId r:id="rId14"/>
+  </p:notesMasterIdLst>
   <p:sldIdLst>
-    <p:sldId id="256" r:id="rId7"/>
-    <p:sldId id="257" r:id="rId9"/>
-    <p:sldId id="258" r:id="rId10"/>
-    <p:sldId id="259" r:id="rId11"/>
-    <p:sldId id="260" r:id="rId12"/>
-    <p:sldId id="261" r:id="rId13"/>
-    <p:sldId id="262" r:id="rId14"/>
-    <p:sldId id="263" r:id="rId15"/>
-    <p:sldId id="264" r:id="rId16"/>
-    <p:sldId id="265" r:id="rId17"/>
-    <p:sldId id="266" r:id="rId18"/>
-    <p:sldId id="267" r:id="rId19"/>
+    <p:sldId id="256" r:id="rId2"/>
+    <p:sldId id="257" r:id="rId3"/>
+    <p:sldId id="258" r:id="rId4"/>
+    <p:sldId id="259" r:id="rId5"/>
+    <p:sldId id="260" r:id="rId6"/>
+    <p:sldId id="261" r:id="rId7"/>
+    <p:sldId id="262" r:id="rId8"/>
+    <p:sldId id="263" r:id="rId9"/>
+    <p:sldId id="264" r:id="rId10"/>
+    <p:sldId id="265" r:id="rId11"/>
+    <p:sldId id="266" r:id="rId12"/>
+    <p:sldId id="267" r:id="rId13"/>
   </p:sldIdLst>
-  <p:sldSz cx="12191695" cy="6858000" type="screen4x3"/>
+  <p:sldSz cx="12192000" cy="6858000"/>
   <p:notesSz cx="6858000" cy="9144000"/>
   <p:defaultTextStyle>
     <a:defPPr>
@@ -115,11 +118,27 @@
       </a:defRPr>
     </a:lvl9pPr>
   </p:defaultTextStyle>
+  <p:extLst>
+    <p:ext uri="{EFAFB233-063F-42B5-8137-9DF3F51BA10A}">
+      <p15:sldGuideLst xmlns:p15="http://schemas.microsoft.com/office/powerpoint/2012/main">
+        <p15:guide id="1" orient="horz" pos="2160">
+          <p15:clr>
+            <a:srgbClr val="A4A3A4"/>
+          </p15:clr>
+        </p15:guide>
+        <p15:guide id="2" pos="2880">
+          <p15:clr>
+            <a:srgbClr val="A4A3A4"/>
+          </p15:clr>
+        </p15:guide>
+      </p15:sldGuideLst>
+    </p:ext>
+  </p:extLst>
 </p:presentation>
 </file>
 
 <file path=ppt/notesMasters/notesMaster1.xml><?xml version="1.0" encoding="utf-8"?>
-<p:notesMaster xmlns:a="http://schemas.openxmlformats.org/drawingml/2006/main" xmlns:p="http://schemas.openxmlformats.org/presentationml/2006/main" xmlns:r="http://schemas.openxmlformats.org/officeDocument/2006/relationships">
+<p:notesMaster xmlns:a="http://schemas.openxmlformats.org/drawingml/2006/main" xmlns:r="http://schemas.openxmlformats.org/officeDocument/2006/relationships" xmlns:p="http://schemas.openxmlformats.org/presentationml/2006/main">
   <p:cSld>
     <p:bg>
       <p:bgRef idx="1001">
@@ -140,241 +159,16 @@
           <a:chExt cx="0" cy="0"/>
         </a:xfrm>
       </p:grpSpPr>
-      <p:sp>
-        <p:nvSpPr>
-          <p:cNvPr id="2" name="Header Placeholder 1"/>
-          <p:cNvSpPr>
-            <a:spLocks noGrp="1"/>
-          </p:cNvSpPr>
-          <p:nvPr>
-            <p:ph type="hdr" sz="quarter"/>
-          </p:nvPr>
-        </p:nvSpPr>
-        <p:spPr>
-          <a:xfrm>
-            <a:off x="0" y="0"/>
-            <a:ext cx="2971800" cy="457200"/>
-          </a:xfrm>
-          <a:prstGeom prst="rect">
-            <a:avLst/>
-          </a:prstGeom>
-        </p:spPr>
-        <p:txBody>
-          <a:bodyPr vert="horz" lIns="91440" tIns="45720" rIns="91440" bIns="45720" rtlCol="0"/>
-          <a:lstStyle>
-            <a:lvl1pPr algn="l">
-              <a:defRPr sz="1200"/>
-            </a:lvl1pPr>
-          </a:lstStyle>
-          <a:p>
-            <a:endParaRPr lang="en-US"/>
-          </a:p>
-        </p:txBody>
-      </p:sp>
-      <p:sp>
-        <p:nvSpPr>
-          <p:cNvPr id="3" name="Date Placeholder 2"/>
-          <p:cNvSpPr>
-            <a:spLocks noGrp="1"/>
-          </p:cNvSpPr>
-          <p:nvPr>
-            <p:ph type="dt" idx="1"/>
-          </p:nvPr>
-        </p:nvSpPr>
-        <p:spPr>
-          <a:xfrm>
-            <a:off x="3884613" y="0"/>
-            <a:ext cx="2971800" cy="457200"/>
-          </a:xfrm>
-          <a:prstGeom prst="rect">
-            <a:avLst/>
-          </a:prstGeom>
-        </p:spPr>
-        <p:txBody>
-          <a:bodyPr vert="horz" lIns="91440" tIns="45720" rIns="91440" bIns="45720" rtlCol="0"/>
-          <a:lstStyle>
-            <a:lvl1pPr algn="r">
-              <a:defRPr sz="1200"/>
-            </a:lvl1pPr>
-          </a:lstStyle>
-          <a:p>
-            <a:fld id="{0F89C1C7-3DCD-1040-A9CF-14679D8B5DDD}" type="datetimeFigureOut">
-              <a:rPr lang="en-US" smtClean="0"/>
-              <a:t>10/17/16</a:t>
-            </a:fld>
-            <a:endParaRPr lang="en-US"/>
-          </a:p>
-        </p:txBody>
-      </p:sp>
-      <p:sp>
-        <p:nvSpPr>
-          <p:cNvPr id="4" name="Slide Image Placeholder 3"/>
-          <p:cNvSpPr>
-            <a:spLocks noGrp="1" noRot="1" noChangeAspect="1"/>
-          </p:cNvSpPr>
-          <p:nvPr>
-            <p:ph type="sldImg" idx="2"/>
-          </p:nvPr>
-        </p:nvSpPr>
-        <p:spPr>
-          <a:xfrm>
-            <a:off x="1143000" y="685800"/>
-            <a:ext cx="4572000" cy="3429000"/>
-          </a:xfrm>
-          <a:prstGeom prst="rect">
-            <a:avLst/>
-          </a:prstGeom>
-          <a:noFill/>
-          <a:ln w="12700">
-            <a:solidFill>
-              <a:prstClr val="black"/>
-            </a:solidFill>
-          </a:ln>
-        </p:spPr>
-        <p:txBody>
-          <a:bodyPr vert="horz" lIns="91440" tIns="45720" rIns="91440" bIns="45720" rtlCol="0" anchor="ctr"/>
-          <a:lstStyle/>
-          <a:p>
-            <a:endParaRPr lang="en-US"/>
-          </a:p>
-        </p:txBody>
-      </p:sp>
-      <p:sp>
-        <p:nvSpPr>
-          <p:cNvPr id="5" name="Notes Placeholder 4"/>
-          <p:cNvSpPr>
-            <a:spLocks noGrp="1"/>
-          </p:cNvSpPr>
-          <p:nvPr>
-            <p:ph type="body" sz="quarter" idx="3"/>
-          </p:nvPr>
-        </p:nvSpPr>
-        <p:spPr>
-          <a:xfrm>
-            <a:off x="685800" y="4343400"/>
-            <a:ext cx="5486400" cy="4114800"/>
-          </a:xfrm>
-          <a:prstGeom prst="rect">
-            <a:avLst/>
-          </a:prstGeom>
-        </p:spPr>
-        <p:txBody>
-          <a:bodyPr vert="horz" lIns="91440" tIns="45720" rIns="91440" bIns="45720" rtlCol="0"/>
-          <a:lstStyle/>
-          <a:p>
-            <a:pPr lvl="0"/>
-            <a:r>
-              <a:rPr lang="en-US" smtClean="0"/>
-              <a:t>Click to edit Master text styles</a:t>
-            </a:r>
-          </a:p>
-          <a:p>
-            <a:pPr lvl="1"/>
-            <a:r>
-              <a:rPr lang="en-US" smtClean="0"/>
-              <a:t>Second level</a:t>
-            </a:r>
-          </a:p>
-          <a:p>
-            <a:pPr lvl="2"/>
-            <a:r>
-              <a:rPr lang="en-US" smtClean="0"/>
-              <a:t>Third level</a:t>
-            </a:r>
-          </a:p>
-          <a:p>
-            <a:pPr lvl="3"/>
-            <a:r>
-              <a:rPr lang="en-US" smtClean="0"/>
-              <a:t>Fourth level</a:t>
-            </a:r>
-          </a:p>
-          <a:p>
-            <a:pPr lvl="4"/>
-            <a:r>
-              <a:rPr lang="en-US" smtClean="0"/>
-              <a:t>Fifth level</a:t>
-            </a:r>
-            <a:endParaRPr lang="en-US"/>
-          </a:p>
-        </p:txBody>
-      </p:sp>
-      <p:sp>
-        <p:nvSpPr>
-          <p:cNvPr id="6" name="Footer Placeholder 5"/>
-          <p:cNvSpPr>
-            <a:spLocks noGrp="1"/>
-          </p:cNvSpPr>
-          <p:nvPr>
-            <p:ph type="ftr" sz="quarter" idx="4"/>
-          </p:nvPr>
-        </p:nvSpPr>
-        <p:spPr>
-          <a:xfrm>
-            <a:off x="0" y="8685213"/>
-            <a:ext cx="2971800" cy="457200"/>
-          </a:xfrm>
-          <a:prstGeom prst="rect">
-            <a:avLst/>
-          </a:prstGeom>
-        </p:spPr>
-        <p:txBody>
-          <a:bodyPr vert="horz" lIns="91440" tIns="45720" rIns="91440" bIns="45720" rtlCol="0" anchor="b"/>
-          <a:lstStyle>
-            <a:lvl1pPr algn="l">
-              <a:defRPr sz="1200"/>
-            </a:lvl1pPr>
-          </a:lstStyle>
-          <a:p>
-            <a:endParaRPr lang="en-US"/>
-          </a:p>
-        </p:txBody>
-      </p:sp>
-      <p:sp>
-        <p:nvSpPr>
-          <p:cNvPr id="7" name="Slide Number Placeholder 6"/>
-          <p:cNvSpPr>
-            <a:spLocks noGrp="1"/>
-          </p:cNvSpPr>
-          <p:nvPr>
-            <p:ph type="sldNum" sz="quarter" idx="5"/>
-          </p:nvPr>
-        </p:nvSpPr>
-        <p:spPr>
-          <a:xfrm>
-            <a:off x="3884613" y="8685213"/>
-            <a:ext cx="2971800" cy="457200"/>
-          </a:xfrm>
-          <a:prstGeom prst="rect">
-            <a:avLst/>
-          </a:prstGeom>
-        </p:spPr>
-        <p:txBody>
-          <a:bodyPr vert="horz" lIns="91440" tIns="45720" rIns="91440" bIns="45720" rtlCol="0" anchor="b"/>
-          <a:lstStyle>
-            <a:lvl1pPr algn="r">
-              <a:defRPr sz="1200"/>
-            </a:lvl1pPr>
-          </a:lstStyle>
-          <a:p>
-            <a:fld id="{BB5E49A5-4136-284D-997B-48E1D791AD67}" type="slidenum">
-              <a:rPr lang="en-US" smtClean="0"/>
-              <a:t>‹#›</a:t>
-            </a:fld>
-            <a:endParaRPr lang="en-US"/>
-          </a:p>
-        </p:txBody>
-      </p:sp>
     </p:spTree>
     <p:extLst>
       <p:ext uri="{BB962C8B-B14F-4D97-AF65-F5344CB8AC3E}">
-        <p14:creationId xmlns:p14="http://schemas.microsoft.com/office/powerpoint/2010/main" val="2623252185"/>
+        <p14:creationId xmlns:p14="http://schemas.microsoft.com/office/powerpoint/2010/main" val="1247139090"/>
       </p:ext>
     </p:extLst>
   </p:cSld>
   <p:clrMap bg1="lt1" tx1="dk1" bg2="lt2" tx2="dk2" accent1="accent1" accent2="accent2" accent3="accent3" accent4="accent4" accent5="accent5" accent6="accent6" hlink="hlink" folHlink="folHlink"/>
   <p:notesStyle>
-    <a:lvl1pPr marL="0" algn="l" defTabSz="457200" rtl="0" eaLnBrk="1" latinLnBrk="0" hangingPunct="1">
+    <a:lvl1pPr marL="0" algn="l" defTabSz="914400" rtl="0" eaLnBrk="1" latinLnBrk="0" hangingPunct="1">
       <a:defRPr sz="1200" kern="1200">
         <a:solidFill>
           <a:schemeClr val="tx1"/>
@@ -384,7 +178,7 @@
         <a:cs typeface="+mn-cs"/>
       </a:defRPr>
     </a:lvl1pPr>
-    <a:lvl2pPr marL="457200" algn="l" defTabSz="457200" rtl="0" eaLnBrk="1" latinLnBrk="0" hangingPunct="1">
+    <a:lvl2pPr marL="457200" algn="l" defTabSz="914400" rtl="0" eaLnBrk="1" latinLnBrk="0" hangingPunct="1">
       <a:defRPr sz="1200" kern="1200">
         <a:solidFill>
           <a:schemeClr val="tx1"/>
@@ -394,7 +188,7 @@
         <a:cs typeface="+mn-cs"/>
       </a:defRPr>
     </a:lvl2pPr>
-    <a:lvl3pPr marL="914400" algn="l" defTabSz="457200" rtl="0" eaLnBrk="1" latinLnBrk="0" hangingPunct="1">
+    <a:lvl3pPr marL="914400" algn="l" defTabSz="914400" rtl="0" eaLnBrk="1" latinLnBrk="0" hangingPunct="1">
       <a:defRPr sz="1200" kern="1200">
         <a:solidFill>
           <a:schemeClr val="tx1"/>
@@ -404,7 +198,7 @@
         <a:cs typeface="+mn-cs"/>
       </a:defRPr>
     </a:lvl3pPr>
-    <a:lvl4pPr marL="1371600" algn="l" defTabSz="457200" rtl="0" eaLnBrk="1" latinLnBrk="0" hangingPunct="1">
+    <a:lvl4pPr marL="1371600" algn="l" defTabSz="914400" rtl="0" eaLnBrk="1" latinLnBrk="0" hangingPunct="1">
       <a:defRPr sz="1200" kern="1200">
         <a:solidFill>
           <a:schemeClr val="tx1"/>
@@ -414,7 +208,7 @@
         <a:cs typeface="+mn-cs"/>
       </a:defRPr>
     </a:lvl4pPr>
-    <a:lvl5pPr marL="1828800" algn="l" defTabSz="457200" rtl="0" eaLnBrk="1" latinLnBrk="0" hangingPunct="1">
+    <a:lvl5pPr marL="1828800" algn="l" defTabSz="914400" rtl="0" eaLnBrk="1" latinLnBrk="0" hangingPunct="1">
       <a:defRPr sz="1200" kern="1200">
         <a:solidFill>
           <a:schemeClr val="tx1"/>
@@ -424,7 +218,7 @@
         <a:cs typeface="+mn-cs"/>
       </a:defRPr>
     </a:lvl5pPr>
-    <a:lvl6pPr marL="2286000" algn="l" defTabSz="457200" rtl="0" eaLnBrk="1" latinLnBrk="0" hangingPunct="1">
+    <a:lvl6pPr marL="2286000" algn="l" defTabSz="914400" rtl="0" eaLnBrk="1" latinLnBrk="0" hangingPunct="1">
       <a:defRPr sz="1200" kern="1200">
         <a:solidFill>
           <a:schemeClr val="tx1"/>
@@ -434,7 +228,7 @@
         <a:cs typeface="+mn-cs"/>
       </a:defRPr>
     </a:lvl6pPr>
-    <a:lvl7pPr marL="2743200" algn="l" defTabSz="457200" rtl="0" eaLnBrk="1" latinLnBrk="0" hangingPunct="1">
+    <a:lvl7pPr marL="2743200" algn="l" defTabSz="914400" rtl="0" eaLnBrk="1" latinLnBrk="0" hangingPunct="1">
       <a:defRPr sz="1200" kern="1200">
         <a:solidFill>
           <a:schemeClr val="tx1"/>
@@ -444,7 +238,7 @@
         <a:cs typeface="+mn-cs"/>
       </a:defRPr>
     </a:lvl7pPr>
-    <a:lvl8pPr marL="3200400" algn="l" defTabSz="457200" rtl="0" eaLnBrk="1" latinLnBrk="0" hangingPunct="1">
+    <a:lvl8pPr marL="3200400" algn="l" defTabSz="914400" rtl="0" eaLnBrk="1" latinLnBrk="0" hangingPunct="1">
       <a:defRPr sz="1200" kern="1200">
         <a:solidFill>
           <a:schemeClr val="tx1"/>
@@ -454,7 +248,7 @@
         <a:cs typeface="+mn-cs"/>
       </a:defRPr>
     </a:lvl8pPr>
-    <a:lvl9pPr marL="3657600" algn="l" defTabSz="457200" rtl="0" eaLnBrk="1" latinLnBrk="0" hangingPunct="1">
+    <a:lvl9pPr marL="3657600" algn="l" defTabSz="914400" rtl="0" eaLnBrk="1" latinLnBrk="0" hangingPunct="1">
       <a:defRPr sz="1200" kern="1200">
         <a:solidFill>
           <a:schemeClr val="tx1"/>
@@ -469,7 +263,7 @@
 </file>
 
 <file path=ppt/notesSlides/notesSlide1.xml><?xml version="1.0" encoding="utf-8"?>
-<p:notes xmlns:a="http://schemas.openxmlformats.org/drawingml/2006/main" xmlns:p="http://schemas.openxmlformats.org/presentationml/2006/main" xmlns:r="http://schemas.openxmlformats.org/officeDocument/2006/relationships">
+<p:notes xmlns:a="http://schemas.openxmlformats.org/drawingml/2006/main" xmlns:r="http://schemas.openxmlformats.org/officeDocument/2006/relationships" xmlns:p="http://schemas.openxmlformats.org/presentationml/2006/main">
   <p:cSld>
     <p:spTree>
       <p:nvGrpSpPr>
@@ -489,7 +283,7 @@
         <p:nvSpPr>
           <p:cNvPr id="2" name="Slide Image Placeholder 1"/>
           <p:cNvSpPr>
-            <a:spLocks noGrp="1"/>
+            <a:spLocks noGrp="1" noRot="1" noChangeAspect="1"/>
           </p:cNvSpPr>
           <p:nvPr>
             <p:ph type="sldImg" idx="2"/>
@@ -504,7 +298,7 @@
             <a:spLocks noGrp="1"/>
           </p:cNvSpPr>
           <p:nvPr>
-            <p:ph type="body" idx="3" sz="quarter"/>
+            <p:ph type="body" sz="quarter" idx="3"/>
           </p:nvPr>
         </p:nvSpPr>
         <p:spPr/>
@@ -525,7 +319,7 @@
             <a:spLocks noGrp="1"/>
           </p:cNvSpPr>
           <p:nvPr>
-            <p:ph type="sldNum" idx="5" sz="quarter"/>
+            <p:ph type="sldNum" sz="quarter" idx="5"/>
           </p:nvPr>
         </p:nvSpPr>
         <p:spPr/>
@@ -539,7 +333,7 @@
 </file>
 
 <file path=ppt/notesSlides/notesSlide10.xml><?xml version="1.0" encoding="utf-8"?>
-<p:notes xmlns:a="http://schemas.openxmlformats.org/drawingml/2006/main" xmlns:p="http://schemas.openxmlformats.org/presentationml/2006/main" xmlns:r="http://schemas.openxmlformats.org/officeDocument/2006/relationships">
+<p:notes xmlns:a="http://schemas.openxmlformats.org/drawingml/2006/main" xmlns:r="http://schemas.openxmlformats.org/officeDocument/2006/relationships" xmlns:p="http://schemas.openxmlformats.org/presentationml/2006/main">
   <p:cSld>
     <p:spTree>
       <p:nvGrpSpPr>
@@ -559,7 +353,7 @@
         <p:nvSpPr>
           <p:cNvPr id="2" name="Slide Image Placeholder 1"/>
           <p:cNvSpPr>
-            <a:spLocks noGrp="1"/>
+            <a:spLocks noGrp="1" noRot="1" noChangeAspect="1"/>
           </p:cNvSpPr>
           <p:nvPr>
             <p:ph type="sldImg" idx="2"/>
@@ -574,7 +368,7 @@
             <a:spLocks noGrp="1"/>
           </p:cNvSpPr>
           <p:nvPr>
-            <p:ph type="body" idx="3" sz="quarter"/>
+            <p:ph type="body" sz="quarter" idx="3"/>
           </p:nvPr>
         </p:nvSpPr>
         <p:spPr/>
@@ -583,7 +377,7 @@
           <a:lstStyle/>
           <a:p>
             <a:r>
-              <a:t>Why not just ask an agent to fix it? The hypothesis is a claim and stage 3 exists to falsify it. Preservation tests come from the graph's blast radius, including consumers in other repos. Headless approvals: the agent writes a pending_gate marker in state.json and stops; the dashboard shows it; approve or revise resumes the same agent.</a:t>
+              <a:t>Why not just ask an agent to fix it? The hypothesis is a claim and stage 3 exists to falsify it. Preservation tests come from the graph's blast radius, including consumers in other repos. Headless approvals: the agent writes a pending_gate marker in state.json and stops; the dashboard shows it; approve or revise resumes the same agent. Run controls in the dashboard: Pause cancels the in-flight step (the agent re-checks its work on Resume), Restart starts the same run over with all gates cleared (repos are not cleaned up), Delete removes only the run record.</a:t>
             </a:r>
           </a:p>
         </p:txBody>
@@ -595,7 +389,7 @@
             <a:spLocks noGrp="1"/>
           </p:cNvSpPr>
           <p:nvPr>
-            <p:ph type="sldNum" idx="5" sz="quarter"/>
+            <p:ph type="sldNum" sz="quarter" idx="5"/>
           </p:nvPr>
         </p:nvSpPr>
         <p:spPr/>
@@ -609,7 +403,7 @@
 </file>
 
 <file path=ppt/notesSlides/notesSlide11.xml><?xml version="1.0" encoding="utf-8"?>
-<p:notes xmlns:a="http://schemas.openxmlformats.org/drawingml/2006/main" xmlns:p="http://schemas.openxmlformats.org/presentationml/2006/main" xmlns:r="http://schemas.openxmlformats.org/officeDocument/2006/relationships">
+<p:notes xmlns:a="http://schemas.openxmlformats.org/drawingml/2006/main" xmlns:r="http://schemas.openxmlformats.org/officeDocument/2006/relationships" xmlns:p="http://schemas.openxmlformats.org/presentationml/2006/main">
   <p:cSld>
     <p:spTree>
       <p:nvGrpSpPr>
@@ -629,7 +423,7 @@
         <p:nvSpPr>
           <p:cNvPr id="2" name="Slide Image Placeholder 1"/>
           <p:cNvSpPr>
-            <a:spLocks noGrp="1"/>
+            <a:spLocks noGrp="1" noRot="1" noChangeAspect="1"/>
           </p:cNvSpPr>
           <p:nvPr>
             <p:ph type="sldImg" idx="2"/>
@@ -644,7 +438,7 @@
             <a:spLocks noGrp="1"/>
           </p:cNvSpPr>
           <p:nvPr>
-            <p:ph type="body" idx="3" sz="quarter"/>
+            <p:ph type="body" sz="quarter" idx="3"/>
           </p:nvPr>
         </p:nvSpPr>
         <p:spPr/>
@@ -665,7 +459,7 @@
             <a:spLocks noGrp="1"/>
           </p:cNvSpPr>
           <p:nvPr>
-            <p:ph type="sldNum" idx="5" sz="quarter"/>
+            <p:ph type="sldNum" sz="quarter" idx="5"/>
           </p:nvPr>
         </p:nvSpPr>
         <p:spPr/>
@@ -679,7 +473,7 @@
 </file>
 
 <file path=ppt/notesSlides/notesSlide12.xml><?xml version="1.0" encoding="utf-8"?>
-<p:notes xmlns:a="http://schemas.openxmlformats.org/drawingml/2006/main" xmlns:p="http://schemas.openxmlformats.org/presentationml/2006/main" xmlns:r="http://schemas.openxmlformats.org/officeDocument/2006/relationships">
+<p:notes xmlns:a="http://schemas.openxmlformats.org/drawingml/2006/main" xmlns:r="http://schemas.openxmlformats.org/officeDocument/2006/relationships" xmlns:p="http://schemas.openxmlformats.org/presentationml/2006/main">
   <p:cSld>
     <p:spTree>
       <p:nvGrpSpPr>
@@ -699,7 +493,7 @@
         <p:nvSpPr>
           <p:cNvPr id="2" name="Slide Image Placeholder 1"/>
           <p:cNvSpPr>
-            <a:spLocks noGrp="1"/>
+            <a:spLocks noGrp="1" noRot="1" noChangeAspect="1"/>
           </p:cNvSpPr>
           <p:nvPr>
             <p:ph type="sldImg" idx="2"/>
@@ -714,7 +508,7 @@
             <a:spLocks noGrp="1"/>
           </p:cNvSpPr>
           <p:nvPr>
-            <p:ph type="body" idx="3" sz="quarter"/>
+            <p:ph type="body" sz="quarter" idx="3"/>
           </p:nvPr>
         </p:nvSpPr>
         <p:spPr/>
@@ -735,7 +529,7 @@
             <a:spLocks noGrp="1"/>
           </p:cNvSpPr>
           <p:nvPr>
-            <p:ph type="sldNum" idx="5" sz="quarter"/>
+            <p:ph type="sldNum" sz="quarter" idx="5"/>
           </p:nvPr>
         </p:nvSpPr>
         <p:spPr/>
@@ -749,7 +543,7 @@
 </file>
 
 <file path=ppt/notesSlides/notesSlide2.xml><?xml version="1.0" encoding="utf-8"?>
-<p:notes xmlns:a="http://schemas.openxmlformats.org/drawingml/2006/main" xmlns:p="http://schemas.openxmlformats.org/presentationml/2006/main" xmlns:r="http://schemas.openxmlformats.org/officeDocument/2006/relationships">
+<p:notes xmlns:a="http://schemas.openxmlformats.org/drawingml/2006/main" xmlns:r="http://schemas.openxmlformats.org/officeDocument/2006/relationships" xmlns:p="http://schemas.openxmlformats.org/presentationml/2006/main">
   <p:cSld>
     <p:spTree>
       <p:nvGrpSpPr>
@@ -769,7 +563,7 @@
         <p:nvSpPr>
           <p:cNvPr id="2" name="Slide Image Placeholder 1"/>
           <p:cNvSpPr>
-            <a:spLocks noGrp="1"/>
+            <a:spLocks noGrp="1" noRot="1" noChangeAspect="1"/>
           </p:cNvSpPr>
           <p:nvPr>
             <p:ph type="sldImg" idx="2"/>
@@ -784,7 +578,7 @@
             <a:spLocks noGrp="1"/>
           </p:cNvSpPr>
           <p:nvPr>
-            <p:ph type="body" idx="3" sz="quarter"/>
+            <p:ph type="body" sz="quarter" idx="3"/>
           </p:nvPr>
         </p:nvSpPr>
         <p:spPr/>
@@ -805,7 +599,7 @@
             <a:spLocks noGrp="1"/>
           </p:cNvSpPr>
           <p:nvPr>
-            <p:ph type="sldNum" idx="5" sz="quarter"/>
+            <p:ph type="sldNum" sz="quarter" idx="5"/>
           </p:nvPr>
         </p:nvSpPr>
         <p:spPr/>
@@ -819,7 +613,7 @@
 </file>
 
 <file path=ppt/notesSlides/notesSlide3.xml><?xml version="1.0" encoding="utf-8"?>
-<p:notes xmlns:a="http://schemas.openxmlformats.org/drawingml/2006/main" xmlns:p="http://schemas.openxmlformats.org/presentationml/2006/main" xmlns:r="http://schemas.openxmlformats.org/officeDocument/2006/relationships">
+<p:notes xmlns:a="http://schemas.openxmlformats.org/drawingml/2006/main" xmlns:r="http://schemas.openxmlformats.org/officeDocument/2006/relationships" xmlns:p="http://schemas.openxmlformats.org/presentationml/2006/main">
   <p:cSld>
     <p:spTree>
       <p:nvGrpSpPr>
@@ -839,7 +633,7 @@
         <p:nvSpPr>
           <p:cNvPr id="2" name="Slide Image Placeholder 1"/>
           <p:cNvSpPr>
-            <a:spLocks noGrp="1"/>
+            <a:spLocks noGrp="1" noRot="1" noChangeAspect="1"/>
           </p:cNvSpPr>
           <p:nvPr>
             <p:ph type="sldImg" idx="2"/>
@@ -854,7 +648,7 @@
             <a:spLocks noGrp="1"/>
           </p:cNvSpPr>
           <p:nvPr>
-            <p:ph type="body" idx="3" sz="quarter"/>
+            <p:ph type="body" sz="quarter" idx="3"/>
           </p:nvPr>
         </p:nvSpPr>
         <p:spPr/>
@@ -875,7 +669,7 @@
             <a:spLocks noGrp="1"/>
           </p:cNvSpPr>
           <p:nvPr>
-            <p:ph type="sldNum" idx="5" sz="quarter"/>
+            <p:ph type="sldNum" sz="quarter" idx="5"/>
           </p:nvPr>
         </p:nvSpPr>
         <p:spPr/>
@@ -889,7 +683,7 @@
 </file>
 
 <file path=ppt/notesSlides/notesSlide4.xml><?xml version="1.0" encoding="utf-8"?>
-<p:notes xmlns:a="http://schemas.openxmlformats.org/drawingml/2006/main" xmlns:p="http://schemas.openxmlformats.org/presentationml/2006/main" xmlns:r="http://schemas.openxmlformats.org/officeDocument/2006/relationships">
+<p:notes xmlns:a="http://schemas.openxmlformats.org/drawingml/2006/main" xmlns:r="http://schemas.openxmlformats.org/officeDocument/2006/relationships" xmlns:p="http://schemas.openxmlformats.org/presentationml/2006/main">
   <p:cSld>
     <p:spTree>
       <p:nvGrpSpPr>
@@ -909,7 +703,7 @@
         <p:nvSpPr>
           <p:cNvPr id="2" name="Slide Image Placeholder 1"/>
           <p:cNvSpPr>
-            <a:spLocks noGrp="1"/>
+            <a:spLocks noGrp="1" noRot="1" noChangeAspect="1"/>
           </p:cNvSpPr>
           <p:nvPr>
             <p:ph type="sldImg" idx="2"/>
@@ -924,7 +718,7 @@
             <a:spLocks noGrp="1"/>
           </p:cNvSpPr>
           <p:nvPr>
-            <p:ph type="body" idx="3" sz="quarter"/>
+            <p:ph type="body" sz="quarter" idx="3"/>
           </p:nvPr>
         </p:nvSpPr>
         <p:spPr/>
@@ -945,7 +739,7 @@
             <a:spLocks noGrp="1"/>
           </p:cNvSpPr>
           <p:nvPr>
-            <p:ph type="sldNum" idx="5" sz="quarter"/>
+            <p:ph type="sldNum" sz="quarter" idx="5"/>
           </p:nvPr>
         </p:nvSpPr>
         <p:spPr/>
@@ -959,7 +753,7 @@
 </file>
 
 <file path=ppt/notesSlides/notesSlide5.xml><?xml version="1.0" encoding="utf-8"?>
-<p:notes xmlns:a="http://schemas.openxmlformats.org/drawingml/2006/main" xmlns:p="http://schemas.openxmlformats.org/presentationml/2006/main" xmlns:r="http://schemas.openxmlformats.org/officeDocument/2006/relationships">
+<p:notes xmlns:a="http://schemas.openxmlformats.org/drawingml/2006/main" xmlns:r="http://schemas.openxmlformats.org/officeDocument/2006/relationships" xmlns:p="http://schemas.openxmlformats.org/presentationml/2006/main">
   <p:cSld>
     <p:spTree>
       <p:nvGrpSpPr>
@@ -979,7 +773,7 @@
         <p:nvSpPr>
           <p:cNvPr id="2" name="Slide Image Placeholder 1"/>
           <p:cNvSpPr>
-            <a:spLocks noGrp="1"/>
+            <a:spLocks noGrp="1" noRot="1" noChangeAspect="1"/>
           </p:cNvSpPr>
           <p:nvPr>
             <p:ph type="sldImg" idx="2"/>
@@ -994,7 +788,7 @@
             <a:spLocks noGrp="1"/>
           </p:cNvSpPr>
           <p:nvPr>
-            <p:ph type="body" idx="3" sz="quarter"/>
+            <p:ph type="body" sz="quarter" idx="3"/>
           </p:nvPr>
         </p:nvSpPr>
         <p:spPr/>
@@ -1015,7 +809,7 @@
             <a:spLocks noGrp="1"/>
           </p:cNvSpPr>
           <p:nvPr>
-            <p:ph type="sldNum" idx="5" sz="quarter"/>
+            <p:ph type="sldNum" sz="quarter" idx="5"/>
           </p:nvPr>
         </p:nvSpPr>
         <p:spPr/>
@@ -1029,7 +823,7 @@
 </file>
 
 <file path=ppt/notesSlides/notesSlide6.xml><?xml version="1.0" encoding="utf-8"?>
-<p:notes xmlns:a="http://schemas.openxmlformats.org/drawingml/2006/main" xmlns:p="http://schemas.openxmlformats.org/presentationml/2006/main" xmlns:r="http://schemas.openxmlformats.org/officeDocument/2006/relationships">
+<p:notes xmlns:a="http://schemas.openxmlformats.org/drawingml/2006/main" xmlns:r="http://schemas.openxmlformats.org/officeDocument/2006/relationships" xmlns:p="http://schemas.openxmlformats.org/presentationml/2006/main">
   <p:cSld>
     <p:spTree>
       <p:nvGrpSpPr>
@@ -1049,7 +843,7 @@
         <p:nvSpPr>
           <p:cNvPr id="2" name="Slide Image Placeholder 1"/>
           <p:cNvSpPr>
-            <a:spLocks noGrp="1"/>
+            <a:spLocks noGrp="1" noRot="1" noChangeAspect="1"/>
           </p:cNvSpPr>
           <p:nvPr>
             <p:ph type="sldImg" idx="2"/>
@@ -1064,7 +858,7 @@
             <a:spLocks noGrp="1"/>
           </p:cNvSpPr>
           <p:nvPr>
-            <p:ph type="body" idx="3" sz="quarter"/>
+            <p:ph type="body" sz="quarter" idx="3"/>
           </p:nvPr>
         </p:nvSpPr>
         <p:spPr/>
@@ -1085,7 +879,7 @@
             <a:spLocks noGrp="1"/>
           </p:cNvSpPr>
           <p:nvPr>
-            <p:ph type="sldNum" idx="5" sz="quarter"/>
+            <p:ph type="sldNum" sz="quarter" idx="5"/>
           </p:nvPr>
         </p:nvSpPr>
         <p:spPr/>
@@ -1099,7 +893,7 @@
 </file>
 
 <file path=ppt/notesSlides/notesSlide7.xml><?xml version="1.0" encoding="utf-8"?>
-<p:notes xmlns:a="http://schemas.openxmlformats.org/drawingml/2006/main" xmlns:p="http://schemas.openxmlformats.org/presentationml/2006/main" xmlns:r="http://schemas.openxmlformats.org/officeDocument/2006/relationships">
+<p:notes xmlns:a="http://schemas.openxmlformats.org/drawingml/2006/main" xmlns:r="http://schemas.openxmlformats.org/officeDocument/2006/relationships" xmlns:p="http://schemas.openxmlformats.org/presentationml/2006/main">
   <p:cSld>
     <p:spTree>
       <p:nvGrpSpPr>
@@ -1119,7 +913,7 @@
         <p:nvSpPr>
           <p:cNvPr id="2" name="Slide Image Placeholder 1"/>
           <p:cNvSpPr>
-            <a:spLocks noGrp="1"/>
+            <a:spLocks noGrp="1" noRot="1" noChangeAspect="1"/>
           </p:cNvSpPr>
           <p:nvPr>
             <p:ph type="sldImg" idx="2"/>
@@ -1134,7 +928,7 @@
             <a:spLocks noGrp="1"/>
           </p:cNvSpPr>
           <p:nvPr>
-            <p:ph type="body" idx="3" sz="quarter"/>
+            <p:ph type="body" sz="quarter" idx="3"/>
           </p:nvPr>
         </p:nvSpPr>
         <p:spPr/>
@@ -1155,7 +949,7 @@
             <a:spLocks noGrp="1"/>
           </p:cNvSpPr>
           <p:nvPr>
-            <p:ph type="sldNum" idx="5" sz="quarter"/>
+            <p:ph type="sldNum" sz="quarter" idx="5"/>
           </p:nvPr>
         </p:nvSpPr>
         <p:spPr/>
@@ -1169,7 +963,7 @@
 </file>
 
 <file path=ppt/notesSlides/notesSlide8.xml><?xml version="1.0" encoding="utf-8"?>
-<p:notes xmlns:a="http://schemas.openxmlformats.org/drawingml/2006/main" xmlns:p="http://schemas.openxmlformats.org/presentationml/2006/main" xmlns:r="http://schemas.openxmlformats.org/officeDocument/2006/relationships">
+<p:notes xmlns:a="http://schemas.openxmlformats.org/drawingml/2006/main" xmlns:r="http://schemas.openxmlformats.org/officeDocument/2006/relationships" xmlns:p="http://schemas.openxmlformats.org/presentationml/2006/main">
   <p:cSld>
     <p:spTree>
       <p:nvGrpSpPr>
@@ -1189,7 +983,7 @@
         <p:nvSpPr>
           <p:cNvPr id="2" name="Slide Image Placeholder 1"/>
           <p:cNvSpPr>
-            <a:spLocks noGrp="1"/>
+            <a:spLocks noGrp="1" noRot="1" noChangeAspect="1"/>
           </p:cNvSpPr>
           <p:nvPr>
             <p:ph type="sldImg" idx="2"/>
@@ -1204,7 +998,7 @@
             <a:spLocks noGrp="1"/>
           </p:cNvSpPr>
           <p:nvPr>
-            <p:ph type="body" idx="3" sz="quarter"/>
+            <p:ph type="body" sz="quarter" idx="3"/>
           </p:nvPr>
         </p:nvSpPr>
         <p:spPr/>
@@ -1225,7 +1019,7 @@
             <a:spLocks noGrp="1"/>
           </p:cNvSpPr>
           <p:nvPr>
-            <p:ph type="sldNum" idx="5" sz="quarter"/>
+            <p:ph type="sldNum" sz="quarter" idx="5"/>
           </p:nvPr>
         </p:nvSpPr>
         <p:spPr/>
@@ -1239,7 +1033,7 @@
 </file>
 
 <file path=ppt/notesSlides/notesSlide9.xml><?xml version="1.0" encoding="utf-8"?>
-<p:notes xmlns:a="http://schemas.openxmlformats.org/drawingml/2006/main" xmlns:p="http://schemas.openxmlformats.org/presentationml/2006/main" xmlns:r="http://schemas.openxmlformats.org/officeDocument/2006/relationships">
+<p:notes xmlns:a="http://schemas.openxmlformats.org/drawingml/2006/main" xmlns:r="http://schemas.openxmlformats.org/officeDocument/2006/relationships" xmlns:p="http://schemas.openxmlformats.org/presentationml/2006/main">
   <p:cSld>
     <p:spTree>
       <p:nvGrpSpPr>
@@ -1259,7 +1053,7 @@
         <p:nvSpPr>
           <p:cNvPr id="2" name="Slide Image Placeholder 1"/>
           <p:cNvSpPr>
-            <a:spLocks noGrp="1"/>
+            <a:spLocks noGrp="1" noRot="1" noChangeAspect="1"/>
           </p:cNvSpPr>
           <p:nvPr>
             <p:ph type="sldImg" idx="2"/>
@@ -1274,7 +1068,7 @@
             <a:spLocks noGrp="1"/>
           </p:cNvSpPr>
           <p:nvPr>
-            <p:ph type="body" idx="3" sz="quarter"/>
+            <p:ph type="body" sz="quarter" idx="3"/>
           </p:nvPr>
         </p:nvSpPr>
         <p:spPr/>
@@ -1295,7 +1089,7 @@
             <a:spLocks noGrp="1"/>
           </p:cNvSpPr>
           <p:nvPr>
-            <p:ph type="sldNum" idx="5" sz="quarter"/>
+            <p:ph type="sldNum" sz="quarter" idx="5"/>
           </p:nvPr>
         </p:nvSpPr>
         <p:spPr/>
@@ -1346,10 +1140,9 @@
           <a:lstStyle/>
           <a:p>
             <a:r>
-              <a:rPr lang="en-US" smtClean="0"/>
+              <a:rPr lang="en-US"/>
               <a:t>Click to edit Master title style</a:t>
             </a:r>
-            <a:endParaRPr lang="en-US"/>
           </a:p>
         </p:txBody>
       </p:sp>
@@ -1465,10 +1258,9 @@
           </a:lstStyle>
           <a:p>
             <a:r>
-              <a:rPr lang="en-US" smtClean="0"/>
+              <a:rPr lang="en-US"/>
               <a:t>Click to edit Master subtitle style</a:t>
             </a:r>
-            <a:endParaRPr lang="en-US"/>
           </a:p>
         </p:txBody>
       </p:sp>
@@ -1489,7 +1281,7 @@
           <a:p>
             <a:fld id="{5BCAD085-E8A6-8845-BD4E-CB4CCA059FC4}" type="datetimeFigureOut">
               <a:rPr lang="en-US" smtClean="0"/>
-              <a:t>1/27/13</a:t>
+              <a:t>9/28/26</a:t>
             </a:fld>
             <a:endParaRPr lang="en-US"/>
           </a:p>
@@ -1583,10 +1375,9 @@
           <a:lstStyle/>
           <a:p>
             <a:r>
-              <a:rPr lang="en-US" smtClean="0"/>
+              <a:rPr lang="en-US"/>
               <a:t>Click to edit Master title style</a:t>
             </a:r>
-            <a:endParaRPr lang="en-US"/>
           </a:p>
         </p:txBody>
       </p:sp>
@@ -1607,38 +1398,37 @@
           <a:p>
             <a:pPr lvl="0"/>
             <a:r>
-              <a:rPr lang="en-US" smtClean="0"/>
+              <a:rPr lang="en-US"/>
               <a:t>Click to edit Master text styles</a:t>
             </a:r>
           </a:p>
           <a:p>
             <a:pPr lvl="1"/>
             <a:r>
-              <a:rPr lang="en-US" smtClean="0"/>
+              <a:rPr lang="en-US"/>
               <a:t>Second level</a:t>
             </a:r>
           </a:p>
           <a:p>
             <a:pPr lvl="2"/>
             <a:r>
-              <a:rPr lang="en-US" smtClean="0"/>
+              <a:rPr lang="en-US"/>
               <a:t>Third level</a:t>
             </a:r>
           </a:p>
           <a:p>
             <a:pPr lvl="3"/>
             <a:r>
-              <a:rPr lang="en-US" smtClean="0"/>
+              <a:rPr lang="en-US"/>
               <a:t>Fourth level</a:t>
             </a:r>
           </a:p>
           <a:p>
             <a:pPr lvl="4"/>
             <a:r>
-              <a:rPr lang="en-US" smtClean="0"/>
+              <a:rPr lang="en-US"/>
               <a:t>Fifth level</a:t>
             </a:r>
-            <a:endParaRPr lang="en-US"/>
           </a:p>
         </p:txBody>
       </p:sp>
@@ -1659,7 +1449,7 @@
           <a:p>
             <a:fld id="{5BCAD085-E8A6-8845-BD4E-CB4CCA059FC4}" type="datetimeFigureOut">
               <a:rPr lang="en-US" smtClean="0"/>
-              <a:t>1/27/13</a:t>
+              <a:t>9/28/26</a:t>
             </a:fld>
             <a:endParaRPr lang="en-US"/>
           </a:p>
@@ -1758,10 +1548,9 @@
           <a:lstStyle/>
           <a:p>
             <a:r>
-              <a:rPr lang="en-US" smtClean="0"/>
+              <a:rPr lang="en-US"/>
               <a:t>Click to edit Master title style</a:t>
             </a:r>
-            <a:endParaRPr lang="en-US"/>
           </a:p>
         </p:txBody>
       </p:sp>
@@ -1787,38 +1576,37 @@
           <a:p>
             <a:pPr lvl="0"/>
             <a:r>
-              <a:rPr lang="en-US" smtClean="0"/>
+              <a:rPr lang="en-US"/>
               <a:t>Click to edit Master text styles</a:t>
             </a:r>
           </a:p>
           <a:p>
             <a:pPr lvl="1"/>
             <a:r>
-              <a:rPr lang="en-US" smtClean="0"/>
+              <a:rPr lang="en-US"/>
               <a:t>Second level</a:t>
             </a:r>
           </a:p>
           <a:p>
             <a:pPr lvl="2"/>
             <a:r>
-              <a:rPr lang="en-US" smtClean="0"/>
+              <a:rPr lang="en-US"/>
               <a:t>Third level</a:t>
             </a:r>
           </a:p>
           <a:p>
             <a:pPr lvl="3"/>
             <a:r>
-              <a:rPr lang="en-US" smtClean="0"/>
+              <a:rPr lang="en-US"/>
               <a:t>Fourth level</a:t>
             </a:r>
           </a:p>
           <a:p>
             <a:pPr lvl="4"/>
             <a:r>
-              <a:rPr lang="en-US" smtClean="0"/>
+              <a:rPr lang="en-US"/>
               <a:t>Fifth level</a:t>
             </a:r>
-            <a:endParaRPr lang="en-US"/>
           </a:p>
         </p:txBody>
       </p:sp>
@@ -1839,7 +1627,7 @@
           <a:p>
             <a:fld id="{5BCAD085-E8A6-8845-BD4E-CB4CCA059FC4}" type="datetimeFigureOut">
               <a:rPr lang="en-US" smtClean="0"/>
-              <a:t>1/27/13</a:t>
+              <a:t>9/28/26</a:t>
             </a:fld>
             <a:endParaRPr lang="en-US"/>
           </a:p>
@@ -1933,10 +1721,9 @@
           <a:lstStyle/>
           <a:p>
             <a:r>
-              <a:rPr lang="en-US" smtClean="0"/>
+              <a:rPr lang="en-US"/>
               <a:t>Click to edit Master title style</a:t>
             </a:r>
-            <a:endParaRPr lang="en-US"/>
           </a:p>
         </p:txBody>
       </p:sp>
@@ -1957,38 +1744,37 @@
           <a:p>
             <a:pPr lvl="0"/>
             <a:r>
-              <a:rPr lang="en-US" smtClean="0"/>
+              <a:rPr lang="en-US"/>
               <a:t>Click to edit Master text styles</a:t>
             </a:r>
           </a:p>
           <a:p>
             <a:pPr lvl="1"/>
             <a:r>
-              <a:rPr lang="en-US" smtClean="0"/>
+              <a:rPr lang="en-US"/>
               <a:t>Second level</a:t>
             </a:r>
           </a:p>
           <a:p>
             <a:pPr lvl="2"/>
             <a:r>
-              <a:rPr lang="en-US" smtClean="0"/>
+              <a:rPr lang="en-US"/>
               <a:t>Third level</a:t>
             </a:r>
           </a:p>
           <a:p>
             <a:pPr lvl="3"/>
             <a:r>
-              <a:rPr lang="en-US" smtClean="0"/>
+              <a:rPr lang="en-US"/>
               <a:t>Fourth level</a:t>
             </a:r>
           </a:p>
           <a:p>
             <a:pPr lvl="4"/>
             <a:r>
-              <a:rPr lang="en-US" smtClean="0"/>
+              <a:rPr lang="en-US"/>
               <a:t>Fifth level</a:t>
             </a:r>
-            <a:endParaRPr lang="en-US"/>
           </a:p>
         </p:txBody>
       </p:sp>
@@ -2009,7 +1795,7 @@
           <a:p>
             <a:fld id="{5BCAD085-E8A6-8845-BD4E-CB4CCA059FC4}" type="datetimeFigureOut">
               <a:rPr lang="en-US" smtClean="0"/>
-              <a:t>1/27/13</a:t>
+              <a:t>9/28/26</a:t>
             </a:fld>
             <a:endParaRPr lang="en-US"/>
           </a:p>
@@ -2112,10 +1898,9 @@
           </a:lstStyle>
           <a:p>
             <a:r>
-              <a:rPr lang="en-US" smtClean="0"/>
+              <a:rPr lang="en-US"/>
               <a:t>Click to edit Master title style</a:t>
             </a:r>
-            <a:endParaRPr lang="en-US"/>
           </a:p>
         </p:txBody>
       </p:sp>
@@ -2232,7 +2017,7 @@
           <a:p>
             <a:pPr lvl="0"/>
             <a:r>
-              <a:rPr lang="en-US" smtClean="0"/>
+              <a:rPr lang="en-US"/>
               <a:t>Click to edit Master text styles</a:t>
             </a:r>
           </a:p>
@@ -2255,7 +2040,7 @@
           <a:p>
             <a:fld id="{5BCAD085-E8A6-8845-BD4E-CB4CCA059FC4}" type="datetimeFigureOut">
               <a:rPr lang="en-US" smtClean="0"/>
-              <a:t>1/27/13</a:t>
+              <a:t>9/28/26</a:t>
             </a:fld>
             <a:endParaRPr lang="en-US"/>
           </a:p>
@@ -2349,10 +2134,9 @@
           <a:lstStyle/>
           <a:p>
             <a:r>
-              <a:rPr lang="en-US" smtClean="0"/>
+              <a:rPr lang="en-US"/>
               <a:t>Click to edit Master title style</a:t>
             </a:r>
-            <a:endParaRPr lang="en-US"/>
           </a:p>
         </p:txBody>
       </p:sp>
@@ -2406,38 +2190,37 @@
           <a:p>
             <a:pPr lvl="0"/>
             <a:r>
-              <a:rPr lang="en-US" smtClean="0"/>
+              <a:rPr lang="en-US"/>
               <a:t>Click to edit Master text styles</a:t>
             </a:r>
           </a:p>
           <a:p>
             <a:pPr lvl="1"/>
             <a:r>
-              <a:rPr lang="en-US" smtClean="0"/>
+              <a:rPr lang="en-US"/>
               <a:t>Second level</a:t>
             </a:r>
           </a:p>
           <a:p>
             <a:pPr lvl="2"/>
             <a:r>
-              <a:rPr lang="en-US" smtClean="0"/>
+              <a:rPr lang="en-US"/>
               <a:t>Third level</a:t>
             </a:r>
           </a:p>
           <a:p>
             <a:pPr lvl="3"/>
             <a:r>
-              <a:rPr lang="en-US" smtClean="0"/>
+              <a:rPr lang="en-US"/>
               <a:t>Fourth level</a:t>
             </a:r>
           </a:p>
           <a:p>
             <a:pPr lvl="4"/>
             <a:r>
-              <a:rPr lang="en-US" smtClean="0"/>
+              <a:rPr lang="en-US"/>
               <a:t>Fifth level</a:t>
             </a:r>
-            <a:endParaRPr lang="en-US"/>
           </a:p>
         </p:txBody>
       </p:sp>
@@ -2491,38 +2274,37 @@
           <a:p>
             <a:pPr lvl="0"/>
             <a:r>
-              <a:rPr lang="en-US" smtClean="0"/>
+              <a:rPr lang="en-US"/>
               <a:t>Click to edit Master text styles</a:t>
             </a:r>
           </a:p>
           <a:p>
             <a:pPr lvl="1"/>
             <a:r>
-              <a:rPr lang="en-US" smtClean="0"/>
+              <a:rPr lang="en-US"/>
               <a:t>Second level</a:t>
             </a:r>
           </a:p>
           <a:p>
             <a:pPr lvl="2"/>
             <a:r>
-              <a:rPr lang="en-US" smtClean="0"/>
+              <a:rPr lang="en-US"/>
               <a:t>Third level</a:t>
             </a:r>
           </a:p>
           <a:p>
             <a:pPr lvl="3"/>
             <a:r>
-              <a:rPr lang="en-US" smtClean="0"/>
+              <a:rPr lang="en-US"/>
               <a:t>Fourth level</a:t>
             </a:r>
           </a:p>
           <a:p>
             <a:pPr lvl="4"/>
             <a:r>
-              <a:rPr lang="en-US" smtClean="0"/>
+              <a:rPr lang="en-US"/>
               <a:t>Fifth level</a:t>
             </a:r>
-            <a:endParaRPr lang="en-US"/>
           </a:p>
         </p:txBody>
       </p:sp>
@@ -2543,7 +2325,7 @@
           <a:p>
             <a:fld id="{5BCAD085-E8A6-8845-BD4E-CB4CCA059FC4}" type="datetimeFigureOut">
               <a:rPr lang="en-US" smtClean="0"/>
-              <a:t>1/27/13</a:t>
+              <a:t>9/28/26</a:t>
             </a:fld>
             <a:endParaRPr lang="en-US"/>
           </a:p>
@@ -2641,10 +2423,9 @@
           </a:lstStyle>
           <a:p>
             <a:r>
-              <a:rPr lang="en-US" smtClean="0"/>
+              <a:rPr lang="en-US"/>
               <a:t>Click to edit Master title style</a:t>
             </a:r>
-            <a:endParaRPr lang="en-US"/>
           </a:p>
         </p:txBody>
       </p:sp>
@@ -2707,7 +2488,7 @@
           <a:p>
             <a:pPr lvl="0"/>
             <a:r>
-              <a:rPr lang="en-US" smtClean="0"/>
+              <a:rPr lang="en-US"/>
               <a:t>Click to edit Master text styles</a:t>
             </a:r>
           </a:p>
@@ -2763,38 +2544,37 @@
           <a:p>
             <a:pPr lvl="0"/>
             <a:r>
-              <a:rPr lang="en-US" smtClean="0"/>
+              <a:rPr lang="en-US"/>
               <a:t>Click to edit Master text styles</a:t>
             </a:r>
           </a:p>
           <a:p>
             <a:pPr lvl="1"/>
             <a:r>
-              <a:rPr lang="en-US" smtClean="0"/>
+              <a:rPr lang="en-US"/>
               <a:t>Second level</a:t>
             </a:r>
           </a:p>
           <a:p>
             <a:pPr lvl="2"/>
             <a:r>
-              <a:rPr lang="en-US" smtClean="0"/>
+              <a:rPr lang="en-US"/>
               <a:t>Third level</a:t>
             </a:r>
           </a:p>
           <a:p>
             <a:pPr lvl="3"/>
             <a:r>
-              <a:rPr lang="en-US" smtClean="0"/>
+              <a:rPr lang="en-US"/>
               <a:t>Fourth level</a:t>
             </a:r>
           </a:p>
           <a:p>
             <a:pPr lvl="4"/>
             <a:r>
-              <a:rPr lang="en-US" smtClean="0"/>
+              <a:rPr lang="en-US"/>
               <a:t>Fifth level</a:t>
             </a:r>
-            <a:endParaRPr lang="en-US"/>
           </a:p>
         </p:txBody>
       </p:sp>
@@ -2857,7 +2637,7 @@
           <a:p>
             <a:pPr lvl="0"/>
             <a:r>
-              <a:rPr lang="en-US" smtClean="0"/>
+              <a:rPr lang="en-US"/>
               <a:t>Click to edit Master text styles</a:t>
             </a:r>
           </a:p>
@@ -2913,38 +2693,37 @@
           <a:p>
             <a:pPr lvl="0"/>
             <a:r>
-              <a:rPr lang="en-US" smtClean="0"/>
+              <a:rPr lang="en-US"/>
               <a:t>Click to edit Master text styles</a:t>
             </a:r>
           </a:p>
           <a:p>
             <a:pPr lvl="1"/>
             <a:r>
-              <a:rPr lang="en-US" smtClean="0"/>
+              <a:rPr lang="en-US"/>
               <a:t>Second level</a:t>
             </a:r>
           </a:p>
           <a:p>
             <a:pPr lvl="2"/>
             <a:r>
-              <a:rPr lang="en-US" smtClean="0"/>
+              <a:rPr lang="en-US"/>
               <a:t>Third level</a:t>
             </a:r>
           </a:p>
           <a:p>
             <a:pPr lvl="3"/>
             <a:r>
-              <a:rPr lang="en-US" smtClean="0"/>
+              <a:rPr lang="en-US"/>
               <a:t>Fourth level</a:t>
             </a:r>
           </a:p>
           <a:p>
             <a:pPr lvl="4"/>
             <a:r>
-              <a:rPr lang="en-US" smtClean="0"/>
+              <a:rPr lang="en-US"/>
               <a:t>Fifth level</a:t>
             </a:r>
-            <a:endParaRPr lang="en-US"/>
           </a:p>
         </p:txBody>
       </p:sp>
@@ -2965,7 +2744,7 @@
           <a:p>
             <a:fld id="{5BCAD085-E8A6-8845-BD4E-CB4CCA059FC4}" type="datetimeFigureOut">
               <a:rPr lang="en-US" smtClean="0"/>
-              <a:t>1/27/13</a:t>
+              <a:t>9/28/26</a:t>
             </a:fld>
             <a:endParaRPr lang="en-US"/>
           </a:p>
@@ -3059,10 +2838,9 @@
           <a:lstStyle/>
           <a:p>
             <a:r>
-              <a:rPr lang="en-US" smtClean="0"/>
+              <a:rPr lang="en-US"/>
               <a:t>Click to edit Master title style</a:t>
             </a:r>
-            <a:endParaRPr lang="en-US"/>
           </a:p>
         </p:txBody>
       </p:sp>
@@ -3083,7 +2861,7 @@
           <a:p>
             <a:fld id="{5BCAD085-E8A6-8845-BD4E-CB4CCA059FC4}" type="datetimeFigureOut">
               <a:rPr lang="en-US" smtClean="0"/>
-              <a:t>1/27/13</a:t>
+              <a:t>9/28/26</a:t>
             </a:fld>
             <a:endParaRPr lang="en-US"/>
           </a:p>
@@ -3178,7 +2956,7 @@
           <a:p>
             <a:fld id="{5BCAD085-E8A6-8845-BD4E-CB4CCA059FC4}" type="datetimeFigureOut">
               <a:rPr lang="en-US" smtClean="0"/>
-              <a:t>1/27/13</a:t>
+              <a:t>9/28/26</a:t>
             </a:fld>
             <a:endParaRPr lang="en-US"/>
           </a:p>
@@ -3281,10 +3059,9 @@
           </a:lstStyle>
           <a:p>
             <a:r>
-              <a:rPr lang="en-US" smtClean="0"/>
+              <a:rPr lang="en-US"/>
               <a:t>Click to edit Master title style</a:t>
             </a:r>
-            <a:endParaRPr lang="en-US"/>
           </a:p>
         </p:txBody>
       </p:sp>
@@ -3338,38 +3115,37 @@
           <a:p>
             <a:pPr lvl="0"/>
             <a:r>
-              <a:rPr lang="en-US" smtClean="0"/>
+              <a:rPr lang="en-US"/>
               <a:t>Click to edit Master text styles</a:t>
             </a:r>
           </a:p>
           <a:p>
             <a:pPr lvl="1"/>
             <a:r>
-              <a:rPr lang="en-US" smtClean="0"/>
+              <a:rPr lang="en-US"/>
               <a:t>Second level</a:t>
             </a:r>
           </a:p>
           <a:p>
             <a:pPr lvl="2"/>
             <a:r>
-              <a:rPr lang="en-US" smtClean="0"/>
+              <a:rPr lang="en-US"/>
               <a:t>Third level</a:t>
             </a:r>
           </a:p>
           <a:p>
             <a:pPr lvl="3"/>
             <a:r>
-              <a:rPr lang="en-US" smtClean="0"/>
+              <a:rPr lang="en-US"/>
               <a:t>Fourth level</a:t>
             </a:r>
           </a:p>
           <a:p>
             <a:pPr lvl="4"/>
             <a:r>
-              <a:rPr lang="en-US" smtClean="0"/>
+              <a:rPr lang="en-US"/>
               <a:t>Fifth level</a:t>
             </a:r>
-            <a:endParaRPr lang="en-US"/>
           </a:p>
         </p:txBody>
       </p:sp>
@@ -3432,7 +3208,7 @@
           <a:p>
             <a:pPr lvl="0"/>
             <a:r>
-              <a:rPr lang="en-US" smtClean="0"/>
+              <a:rPr lang="en-US"/>
               <a:t>Click to edit Master text styles</a:t>
             </a:r>
           </a:p>
@@ -3455,7 +3231,7 @@
           <a:p>
             <a:fld id="{5BCAD085-E8A6-8845-BD4E-CB4CCA059FC4}" type="datetimeFigureOut">
               <a:rPr lang="en-US" smtClean="0"/>
-              <a:t>1/27/13</a:t>
+              <a:t>9/28/26</a:t>
             </a:fld>
             <a:endParaRPr lang="en-US"/>
           </a:p>
@@ -3558,10 +3334,9 @@
           </a:lstStyle>
           <a:p>
             <a:r>
-              <a:rPr lang="en-US" smtClean="0"/>
+              <a:rPr lang="en-US"/>
               <a:t>Click to edit Master title style</a:t>
             </a:r>
-            <a:endParaRPr lang="en-US"/>
           </a:p>
         </p:txBody>
       </p:sp>
@@ -3685,7 +3460,7 @@
           <a:p>
             <a:pPr lvl="0"/>
             <a:r>
-              <a:rPr lang="en-US" smtClean="0"/>
+              <a:rPr lang="en-US"/>
               <a:t>Click to edit Master text styles</a:t>
             </a:r>
           </a:p>
@@ -3708,7 +3483,7 @@
           <a:p>
             <a:fld id="{5BCAD085-E8A6-8845-BD4E-CB4CCA059FC4}" type="datetimeFigureOut">
               <a:rPr lang="en-US" smtClean="0"/>
-              <a:t>1/27/13</a:t>
+              <a:t>9/28/26</a:t>
             </a:fld>
             <a:endParaRPr lang="en-US"/>
           </a:p>
@@ -3817,10 +3592,9 @@
           <a:lstStyle/>
           <a:p>
             <a:r>
-              <a:rPr lang="en-US" smtClean="0"/>
+              <a:rPr lang="en-US"/>
               <a:t>Click to edit Master title style</a:t>
             </a:r>
-            <a:endParaRPr lang="en-US"/>
           </a:p>
         </p:txBody>
       </p:sp>
@@ -3851,38 +3625,37 @@
           <a:p>
             <a:pPr lvl="0"/>
             <a:r>
-              <a:rPr lang="en-US" smtClean="0"/>
+              <a:rPr lang="en-US"/>
               <a:t>Click to edit Master text styles</a:t>
             </a:r>
           </a:p>
           <a:p>
             <a:pPr lvl="1"/>
             <a:r>
-              <a:rPr lang="en-US" smtClean="0"/>
+              <a:rPr lang="en-US"/>
               <a:t>Second level</a:t>
             </a:r>
           </a:p>
           <a:p>
             <a:pPr lvl="2"/>
             <a:r>
-              <a:rPr lang="en-US" smtClean="0"/>
+              <a:rPr lang="en-US"/>
               <a:t>Third level</a:t>
             </a:r>
           </a:p>
           <a:p>
             <a:pPr lvl="3"/>
             <a:r>
-              <a:rPr lang="en-US" smtClean="0"/>
+              <a:rPr lang="en-US"/>
               <a:t>Fourth level</a:t>
             </a:r>
           </a:p>
           <a:p>
             <a:pPr lvl="4"/>
             <a:r>
-              <a:rPr lang="en-US" smtClean="0"/>
+              <a:rPr lang="en-US"/>
               <a:t>Fifth level</a:t>
             </a:r>
-            <a:endParaRPr lang="en-US"/>
           </a:p>
         </p:txBody>
       </p:sp>
@@ -3921,7 +3694,7 @@
           <a:p>
             <a:fld id="{5BCAD085-E8A6-8845-BD4E-CB4CCA059FC4}" type="datetimeFigureOut">
               <a:rPr lang="en-US" smtClean="0"/>
-              <a:t>1/27/13</a:t>
+              <a:t>9/28/26</a:t>
             </a:fld>
             <a:endParaRPr lang="en-US"/>
           </a:p>
@@ -4280,7 +4053,7 @@
 </file>
 
 <file path=ppt/slides/slide1.xml><?xml version="1.0" encoding="utf-8"?>
-<p:sld xmlns:a="http://schemas.openxmlformats.org/drawingml/2006/main" xmlns:p="http://schemas.openxmlformats.org/presentationml/2006/main" xmlns:r="http://schemas.openxmlformats.org/officeDocument/2006/relationships">
+<p:sld xmlns:a="http://schemas.openxmlformats.org/drawingml/2006/main" xmlns:r="http://schemas.openxmlformats.org/officeDocument/2006/relationships" xmlns:p="http://schemas.openxmlformats.org/presentationml/2006/main">
   <p:cSld>
     <p:bg>
       <p:bgPr>
@@ -4296,31 +4069,14 @@
         <p:cNvGrpSpPr/>
         <p:nvPr/>
       </p:nvGrpSpPr>
-      <p:grpSpPr/>
-      <p:pic>
-        <p:nvPicPr>
-          <p:cNvPr id="2" name="Picture 1" descr="codegraph-logo-transparent.png"/>
-          <p:cNvPicPr>
-            <a:picLocks noChangeAspect="1"/>
-          </p:cNvPicPr>
-          <p:nvPr/>
-        </p:nvPicPr>
-        <p:blipFill>
-          <a:blip r:embed="rId3"/>
-          <a:stretch>
-            <a:fillRect/>
-          </a:stretch>
-        </p:blipFill>
-        <p:spPr>
-          <a:xfrm>
-            <a:off x="822960" y="1554480"/>
-            <a:ext cx="1920240" cy="1920240"/>
-          </a:xfrm>
-          <a:prstGeom prst="rect">
-            <a:avLst/>
-          </a:prstGeom>
-        </p:spPr>
-      </p:pic>
+      <p:grpSpPr>
+        <a:xfrm>
+          <a:off x="0" y="0"/>
+          <a:ext cx="0" cy="0"/>
+          <a:chOff x="0" y="0"/>
+          <a:chExt cx="0" cy="0"/>
+        </a:xfrm>
+      </p:grpSpPr>
       <p:sp>
         <p:nvSpPr>
           <p:cNvPr id="3" name="TextBox 2"/>
@@ -4329,23 +4085,23 @@
         </p:nvSpPr>
         <p:spPr>
           <a:xfrm>
-            <a:off x="822960" y="3611880"/>
-            <a:ext cx="10058400" cy="1005840"/>
-          </a:xfrm>
-          <a:prstGeom prst="rect">
-            <a:avLst/>
-          </a:prstGeom>
-          <a:noFill/>
-        </p:spPr>
-        <p:txBody>
-          <a:bodyPr wrap="square" lIns="36576" rIns="36576" tIns="18288" bIns="18288" anchor="t">
+            <a:off x="1817636" y="3712059"/>
+            <a:ext cx="10058400" cy="714042"/>
+          </a:xfrm>
+          <a:prstGeom prst="rect">
+            <a:avLst/>
+          </a:prstGeom>
+          <a:noFill/>
+        </p:spPr>
+        <p:txBody>
+          <a:bodyPr wrap="square" lIns="36576" tIns="18288" rIns="36576" bIns="18288" anchor="t">
             <a:spAutoFit/>
           </a:bodyPr>
           <a:lstStyle/>
           <a:p>
             <a:pPr algn="l"/>
             <a:r>
-              <a:rPr sz="6000" b="1">
+              <a:rPr sz="4400" b="1" dirty="0" err="1">
                 <a:solidFill>
                   <a:srgbClr val="F1F5F9"/>
                 </a:solidFill>
@@ -4353,6 +4109,12 @@
               </a:rPr>
               <a:t>CodeGraph</a:t>
             </a:r>
+            <a:endParaRPr sz="4400" b="1" dirty="0">
+              <a:solidFill>
+                <a:srgbClr val="F1F5F9"/>
+              </a:solidFill>
+              <a:latin typeface="Arial"/>
+            </a:endParaRPr>
           </a:p>
         </p:txBody>
       </p:sp>
@@ -4373,7 +4135,7 @@
           <a:noFill/>
         </p:spPr>
         <p:txBody>
-          <a:bodyPr wrap="square" lIns="36576" rIns="36576" tIns="18288" bIns="18288" anchor="t">
+          <a:bodyPr wrap="square" lIns="36576" tIns="18288" rIns="36576" bIns="18288" anchor="t">
             <a:spAutoFit/>
           </a:bodyPr>
           <a:lstStyle/>
@@ -4432,7 +4194,9 @@
         <p:txBody>
           <a:bodyPr rtlCol="0" anchor="ctr"/>
           <a:lstStyle/>
-          <a:p/>
+          <a:p>
+            <a:endParaRPr/>
+          </a:p>
         </p:txBody>
       </p:sp>
       <p:sp>
@@ -4452,7 +4216,7 @@
           <a:noFill/>
         </p:spPr>
         <p:txBody>
-          <a:bodyPr wrap="square" lIns="36576" rIns="36576" tIns="18288" bIns="18288" anchor="ctr">
+          <a:bodyPr wrap="square" lIns="36576" tIns="18288" rIns="36576" bIns="18288" anchor="ctr">
             <a:spAutoFit/>
           </a:bodyPr>
           <a:lstStyle/>
@@ -4511,7 +4275,9 @@
         <p:txBody>
           <a:bodyPr rtlCol="0" anchor="ctr"/>
           <a:lstStyle/>
-          <a:p/>
+          <a:p>
+            <a:endParaRPr/>
+          </a:p>
         </p:txBody>
       </p:sp>
       <p:sp>
@@ -4531,7 +4297,7 @@
           <a:noFill/>
         </p:spPr>
         <p:txBody>
-          <a:bodyPr wrap="square" lIns="36576" rIns="36576" tIns="18288" bIns="18288" anchor="ctr">
+          <a:bodyPr wrap="square" lIns="36576" tIns="18288" rIns="36576" bIns="18288" anchor="ctr">
             <a:spAutoFit/>
           </a:bodyPr>
           <a:lstStyle/>
@@ -4590,7 +4356,9 @@
         <p:txBody>
           <a:bodyPr rtlCol="0" anchor="ctr"/>
           <a:lstStyle/>
-          <a:p/>
+          <a:p>
+            <a:endParaRPr/>
+          </a:p>
         </p:txBody>
       </p:sp>
       <p:sp>
@@ -4610,7 +4378,7 @@
           <a:noFill/>
         </p:spPr>
         <p:txBody>
-          <a:bodyPr wrap="square" lIns="36576" rIns="36576" tIns="18288" bIns="18288" anchor="ctr">
+          <a:bodyPr wrap="square" lIns="36576" tIns="18288" rIns="36576" bIns="18288" anchor="ctr">
             <a:spAutoFit/>
           </a:bodyPr>
           <a:lstStyle/>
@@ -4645,7 +4413,7 @@
           <a:noFill/>
         </p:spPr>
         <p:txBody>
-          <a:bodyPr wrap="square" lIns="36576" rIns="36576" tIns="18288" bIns="18288" anchor="t">
+          <a:bodyPr wrap="square" lIns="36576" tIns="18288" rIns="36576" bIns="18288" anchor="t">
             <a:spAutoFit/>
           </a:bodyPr>
           <a:lstStyle/>
@@ -4663,6 +4431,42 @@
           </a:p>
         </p:txBody>
       </p:sp>
+      <p:pic>
+        <p:nvPicPr>
+          <p:cNvPr id="13" name="Graphic 12">
+            <a:extLst>
+              <a:ext uri="{FF2B5EF4-FFF2-40B4-BE49-F238E27FC236}">
+                <a16:creationId xmlns:a16="http://schemas.microsoft.com/office/drawing/2014/main" id="{0C627C86-F7B0-A9B6-E0BF-794A766A87C4}"/>
+              </a:ext>
+            </a:extLst>
+          </p:cNvPr>
+          <p:cNvPicPr>
+            <a:picLocks noChangeAspect="1"/>
+          </p:cNvPicPr>
+          <p:nvPr/>
+        </p:nvPicPr>
+        <p:blipFill>
+          <a:blip>
+            <a:extLst>
+              <a:ext uri="{96DAC541-7B7A-43D3-8B79-37D633B846F1}">
+                <asvg:svgBlip xmlns:asvg="http://schemas.microsoft.com/office/drawing/2016/SVG/main" r:embed="rId3"/>
+              </a:ext>
+            </a:extLst>
+          </a:blip>
+          <a:stretch>
+            <a:fillRect/>
+          </a:stretch>
+        </p:blipFill>
+        <p:spPr>
+          <a:xfrm>
+            <a:off x="1131836" y="3726180"/>
+            <a:ext cx="685800" cy="685800"/>
+          </a:xfrm>
+          <a:prstGeom prst="rect">
+            <a:avLst/>
+          </a:prstGeom>
+        </p:spPr>
+      </p:pic>
     </p:spTree>
   </p:cSld>
   <p:clrMapOvr>
@@ -4672,7 +4476,7 @@
 </file>
 
 <file path=ppt/slides/slide10.xml><?xml version="1.0" encoding="utf-8"?>
-<p:sld xmlns:a="http://schemas.openxmlformats.org/drawingml/2006/main" xmlns:p="http://schemas.openxmlformats.org/presentationml/2006/main" xmlns:r="http://schemas.openxmlformats.org/officeDocument/2006/relationships">
+<p:sld xmlns:a="http://schemas.openxmlformats.org/drawingml/2006/main" xmlns:r="http://schemas.openxmlformats.org/officeDocument/2006/relationships" xmlns:p="http://schemas.openxmlformats.org/presentationml/2006/main">
   <p:cSld>
     <p:bg>
       <p:bgPr>
@@ -4688,7 +4492,14 @@
         <p:cNvGrpSpPr/>
         <p:nvPr/>
       </p:nvGrpSpPr>
-      <p:grpSpPr/>
+      <p:grpSpPr>
+        <a:xfrm>
+          <a:off x="0" y="0"/>
+          <a:ext cx="0" cy="0"/>
+          <a:chOff x="0" y="0"/>
+          <a:chExt cx="0" cy="0"/>
+        </a:xfrm>
+      </p:grpSpPr>
       <p:sp>
         <p:nvSpPr>
           <p:cNvPr id="2" name="TextBox 1"/>
@@ -4706,7 +4517,7 @@
           <a:noFill/>
         </p:spPr>
         <p:txBody>
-          <a:bodyPr wrap="square" lIns="36576" rIns="36576" tIns="18288" bIns="18288" anchor="t">
+          <a:bodyPr wrap="square" lIns="36576" tIns="18288" rIns="36576" bIns="18288" anchor="t">
             <a:spAutoFit/>
           </a:bodyPr>
           <a:lstStyle/>
@@ -4741,7 +4552,7 @@
           <a:noFill/>
         </p:spPr>
         <p:txBody>
-          <a:bodyPr wrap="square" lIns="36576" rIns="36576" tIns="18288" bIns="18288" anchor="t">
+          <a:bodyPr wrap="square" lIns="36576" tIns="18288" rIns="36576" bIns="18288" anchor="t">
             <a:spAutoFit/>
           </a:bodyPr>
           <a:lstStyle/>
@@ -4798,7 +4609,9 @@
         <p:txBody>
           <a:bodyPr rtlCol="0" anchor="ctr"/>
           <a:lstStyle/>
-          <a:p/>
+          <a:p>
+            <a:endParaRPr/>
+          </a:p>
         </p:txBody>
       </p:sp>
       <p:sp>
@@ -4844,7 +4657,9 @@
         <p:txBody>
           <a:bodyPr rtlCol="0" anchor="ctr"/>
           <a:lstStyle/>
-          <a:p/>
+          <a:p>
+            <a:endParaRPr/>
+          </a:p>
         </p:txBody>
       </p:sp>
       <p:sp>
@@ -4886,7 +4701,9 @@
         <p:txBody>
           <a:bodyPr rtlCol="0" anchor="ctr"/>
           <a:lstStyle/>
-          <a:p/>
+          <a:p>
+            <a:endParaRPr/>
+          </a:p>
         </p:txBody>
       </p:sp>
       <p:sp>
@@ -4906,7 +4723,7 @@
           <a:noFill/>
         </p:spPr>
         <p:txBody>
-          <a:bodyPr wrap="square" lIns="36576" rIns="36576" tIns="18288" bIns="18288" anchor="t">
+          <a:bodyPr wrap="square" lIns="36576" tIns="18288" rIns="36576" bIns="18288" anchor="t">
             <a:spAutoFit/>
           </a:bodyPr>
           <a:lstStyle/>
@@ -4941,7 +4758,7 @@
           <a:noFill/>
         </p:spPr>
         <p:txBody>
-          <a:bodyPr wrap="square" lIns="36576" rIns="36576" tIns="18288" bIns="18288" anchor="t">
+          <a:bodyPr wrap="square" lIns="36576" tIns="18288" rIns="36576" bIns="18288" anchor="t">
             <a:spAutoFit/>
           </a:bodyPr>
           <a:lstStyle/>
@@ -5002,7 +4819,9 @@
         <p:txBody>
           <a:bodyPr rtlCol="0" anchor="ctr"/>
           <a:lstStyle/>
-          <a:p/>
+          <a:p>
+            <a:endParaRPr/>
+          </a:p>
         </p:txBody>
       </p:sp>
       <p:sp>
@@ -5044,7 +4863,9 @@
         <p:txBody>
           <a:bodyPr rtlCol="0" anchor="ctr"/>
           <a:lstStyle/>
-          <a:p/>
+          <a:p>
+            <a:endParaRPr/>
+          </a:p>
         </p:txBody>
       </p:sp>
       <p:sp>
@@ -5064,7 +4885,7 @@
           <a:noFill/>
         </p:spPr>
         <p:txBody>
-          <a:bodyPr wrap="square" lIns="36576" rIns="36576" tIns="18288" bIns="18288" anchor="t">
+          <a:bodyPr wrap="square" lIns="36576" tIns="18288" rIns="36576" bIns="18288" anchor="t">
             <a:spAutoFit/>
           </a:bodyPr>
           <a:lstStyle/>
@@ -5099,7 +4920,7 @@
           <a:noFill/>
         </p:spPr>
         <p:txBody>
-          <a:bodyPr wrap="square" lIns="36576" rIns="36576" tIns="18288" bIns="18288" anchor="t">
+          <a:bodyPr wrap="square" lIns="36576" tIns="18288" rIns="36576" bIns="18288" anchor="t">
             <a:spAutoFit/>
           </a:bodyPr>
           <a:lstStyle/>
@@ -5160,7 +4981,9 @@
         <p:txBody>
           <a:bodyPr rtlCol="0" anchor="ctr"/>
           <a:lstStyle/>
-          <a:p/>
+          <a:p>
+            <a:endParaRPr/>
+          </a:p>
         </p:txBody>
       </p:sp>
       <p:sp>
@@ -5202,7 +5025,9 @@
         <p:txBody>
           <a:bodyPr rtlCol="0" anchor="ctr"/>
           <a:lstStyle/>
-          <a:p/>
+          <a:p>
+            <a:endParaRPr/>
+          </a:p>
         </p:txBody>
       </p:sp>
       <p:sp>
@@ -5222,7 +5047,7 @@
           <a:noFill/>
         </p:spPr>
         <p:txBody>
-          <a:bodyPr wrap="square" lIns="36576" rIns="36576" tIns="18288" bIns="18288" anchor="t">
+          <a:bodyPr wrap="square" lIns="36576" tIns="18288" rIns="36576" bIns="18288" anchor="t">
             <a:spAutoFit/>
           </a:bodyPr>
           <a:lstStyle/>
@@ -5257,7 +5082,7 @@
           <a:noFill/>
         </p:spPr>
         <p:txBody>
-          <a:bodyPr wrap="square" lIns="36576" rIns="36576" tIns="18288" bIns="18288" anchor="t">
+          <a:bodyPr wrap="square" lIns="36576" tIns="18288" rIns="36576" bIns="18288" anchor="t">
             <a:spAutoFit/>
           </a:bodyPr>
           <a:lstStyle/>
@@ -5318,7 +5143,9 @@
         <p:txBody>
           <a:bodyPr rtlCol="0" anchor="ctr"/>
           <a:lstStyle/>
-          <a:p/>
+          <a:p>
+            <a:endParaRPr/>
+          </a:p>
         </p:txBody>
       </p:sp>
       <p:sp>
@@ -5360,7 +5187,9 @@
         <p:txBody>
           <a:bodyPr rtlCol="0" anchor="ctr"/>
           <a:lstStyle/>
-          <a:p/>
+          <a:p>
+            <a:endParaRPr/>
+          </a:p>
         </p:txBody>
       </p:sp>
       <p:sp>
@@ -5380,7 +5209,7 @@
           <a:noFill/>
         </p:spPr>
         <p:txBody>
-          <a:bodyPr wrap="square" lIns="36576" rIns="36576" tIns="18288" bIns="18288" anchor="t">
+          <a:bodyPr wrap="square" lIns="36576" tIns="18288" rIns="36576" bIns="18288" anchor="t">
             <a:spAutoFit/>
           </a:bodyPr>
           <a:lstStyle/>
@@ -5415,7 +5244,7 @@
           <a:noFill/>
         </p:spPr>
         <p:txBody>
-          <a:bodyPr wrap="square" lIns="36576" rIns="36576" tIns="18288" bIns="18288" anchor="t">
+          <a:bodyPr wrap="square" lIns="36576" tIns="18288" rIns="36576" bIns="18288" anchor="t">
             <a:spAutoFit/>
           </a:bodyPr>
           <a:lstStyle/>
@@ -5476,7 +5305,9 @@
         <p:txBody>
           <a:bodyPr rtlCol="0" anchor="ctr"/>
           <a:lstStyle/>
-          <a:p/>
+          <a:p>
+            <a:endParaRPr/>
+          </a:p>
         </p:txBody>
       </p:sp>
       <p:sp>
@@ -5518,7 +5349,9 @@
         <p:txBody>
           <a:bodyPr rtlCol="0" anchor="ctr"/>
           <a:lstStyle/>
-          <a:p/>
+          <a:p>
+            <a:endParaRPr/>
+          </a:p>
         </p:txBody>
       </p:sp>
       <p:sp>
@@ -5538,7 +5371,7 @@
           <a:noFill/>
         </p:spPr>
         <p:txBody>
-          <a:bodyPr wrap="square" lIns="36576" rIns="36576" tIns="18288" bIns="18288" anchor="t">
+          <a:bodyPr wrap="square" lIns="36576" tIns="18288" rIns="36576" bIns="18288" anchor="t">
             <a:spAutoFit/>
           </a:bodyPr>
           <a:lstStyle/>
@@ -5573,7 +5406,7 @@
           <a:noFill/>
         </p:spPr>
         <p:txBody>
-          <a:bodyPr wrap="square" lIns="36576" rIns="36576" tIns="18288" bIns="18288" anchor="t">
+          <a:bodyPr wrap="square" lIns="36576" tIns="18288" rIns="36576" bIns="18288" anchor="t">
             <a:spAutoFit/>
           </a:bodyPr>
           <a:lstStyle/>
@@ -5634,7 +5467,9 @@
         <p:txBody>
           <a:bodyPr rtlCol="0" anchor="ctr"/>
           <a:lstStyle/>
-          <a:p/>
+          <a:p>
+            <a:endParaRPr/>
+          </a:p>
         </p:txBody>
       </p:sp>
       <p:sp>
@@ -5676,7 +5511,9 @@
         <p:txBody>
           <a:bodyPr rtlCol="0" anchor="ctr"/>
           <a:lstStyle/>
-          <a:p/>
+          <a:p>
+            <a:endParaRPr/>
+          </a:p>
         </p:txBody>
       </p:sp>
       <p:sp>
@@ -5696,7 +5533,7 @@
           <a:noFill/>
         </p:spPr>
         <p:txBody>
-          <a:bodyPr wrap="square" lIns="36576" rIns="36576" tIns="18288" bIns="18288" anchor="t">
+          <a:bodyPr wrap="square" lIns="36576" tIns="18288" rIns="36576" bIns="18288" anchor="t">
             <a:spAutoFit/>
           </a:bodyPr>
           <a:lstStyle/>
@@ -5709,7 +5546,7 @@
                 </a:solidFill>
                 <a:latin typeface="Arial"/>
               </a:rPr>
-              <a:t>Runs survive restarts</a:t>
+              <a:t>You stay in control of a run</a:t>
             </a:r>
           </a:p>
         </p:txBody>
@@ -5731,7 +5568,7 @@
           <a:noFill/>
         </p:spPr>
         <p:txBody>
-          <a:bodyPr wrap="square" lIns="36576" rIns="36576" tIns="18288" bIns="18288" anchor="t">
+          <a:bodyPr wrap="square" lIns="36576" tIns="18288" rIns="36576" bIns="18288" anchor="t">
             <a:spAutoFit/>
           </a:bodyPr>
           <a:lstStyle/>
@@ -5744,7 +5581,7 @@
                 </a:solidFill>
                 <a:latin typeface="Arial"/>
               </a:rPr>
-              <a:t>state.json is the single source of truth. The same agent resumes by id.</a:t>
+              <a:t>Pause and resume, restart from scratch, or delete it. state.json survives API restarts.</a:t>
             </a:r>
           </a:p>
         </p:txBody>
@@ -5766,7 +5603,7 @@
           <a:noFill/>
         </p:spPr>
         <p:txBody>
-          <a:bodyPr wrap="square" lIns="36576" rIns="36576" tIns="18288" bIns="18288" anchor="t">
+          <a:bodyPr wrap="square" lIns="36576" tIns="18288" rIns="36576" bIns="18288" anchor="t">
             <a:spAutoFit/>
           </a:bodyPr>
           <a:lstStyle/>
@@ -5801,7 +5638,7 @@
           <a:noFill/>
         </p:spPr>
         <p:txBody>
-          <a:bodyPr wrap="square" lIns="36576" rIns="36576" tIns="18288" bIns="18288" anchor="t">
+          <a:bodyPr wrap="square" lIns="36576" tIns="18288" rIns="36576" bIns="18288" anchor="t">
             <a:spAutoFit/>
           </a:bodyPr>
           <a:lstStyle/>
@@ -5828,7 +5665,7 @@
 </file>
 
 <file path=ppt/slides/slide11.xml><?xml version="1.0" encoding="utf-8"?>
-<p:sld xmlns:a="http://schemas.openxmlformats.org/drawingml/2006/main" xmlns:p="http://schemas.openxmlformats.org/presentationml/2006/main" xmlns:r="http://schemas.openxmlformats.org/officeDocument/2006/relationships">
+<p:sld xmlns:a="http://schemas.openxmlformats.org/drawingml/2006/main" xmlns:r="http://schemas.openxmlformats.org/officeDocument/2006/relationships" xmlns:p="http://schemas.openxmlformats.org/presentationml/2006/main">
   <p:cSld>
     <p:bg>
       <p:bgPr>
@@ -5844,7 +5681,14 @@
         <p:cNvGrpSpPr/>
         <p:nvPr/>
       </p:nvGrpSpPr>
-      <p:grpSpPr/>
+      <p:grpSpPr>
+        <a:xfrm>
+          <a:off x="0" y="0"/>
+          <a:ext cx="0" cy="0"/>
+          <a:chOff x="0" y="0"/>
+          <a:chExt cx="0" cy="0"/>
+        </a:xfrm>
+      </p:grpSpPr>
       <p:sp>
         <p:nvSpPr>
           <p:cNvPr id="2" name="TextBox 1"/>
@@ -5862,7 +5706,7 @@
           <a:noFill/>
         </p:spPr>
         <p:txBody>
-          <a:bodyPr wrap="square" lIns="36576" rIns="36576" tIns="18288" bIns="18288" anchor="t">
+          <a:bodyPr wrap="square" lIns="36576" tIns="18288" rIns="36576" bIns="18288" anchor="t">
             <a:spAutoFit/>
           </a:bodyPr>
           <a:lstStyle/>
@@ -5897,7 +5741,7 @@
           <a:noFill/>
         </p:spPr>
         <p:txBody>
-          <a:bodyPr wrap="square" lIns="36576" rIns="36576" tIns="18288" bIns="18288" anchor="t">
+          <a:bodyPr wrap="square" lIns="36576" tIns="18288" rIns="36576" bIns="18288" anchor="t">
             <a:spAutoFit/>
           </a:bodyPr>
           <a:lstStyle/>
@@ -5954,7 +5798,9 @@
         <p:txBody>
           <a:bodyPr rtlCol="0" anchor="ctr"/>
           <a:lstStyle/>
-          <a:p/>
+          <a:p>
+            <a:endParaRPr/>
+          </a:p>
         </p:txBody>
       </p:sp>
       <p:sp>
@@ -5974,7 +5820,7 @@
           <a:noFill/>
         </p:spPr>
         <p:txBody>
-          <a:bodyPr wrap="square" lIns="36576" rIns="36576" tIns="18288" bIns="18288" anchor="t">
+          <a:bodyPr wrap="square" lIns="36576" tIns="18288" rIns="36576" bIns="18288" anchor="t">
             <a:spAutoFit/>
           </a:bodyPr>
           <a:lstStyle/>
@@ -6009,7 +5855,7 @@
           <a:noFill/>
         </p:spPr>
         <p:txBody>
-          <a:bodyPr wrap="square" lIns="36576" rIns="36576" tIns="18288" bIns="18288" anchor="t">
+          <a:bodyPr wrap="square" lIns="36576" tIns="18288" rIns="36576" bIns="18288" anchor="t">
             <a:spAutoFit/>
           </a:bodyPr>
           <a:lstStyle/>
@@ -6044,7 +5890,7 @@
           <a:noFill/>
         </p:spPr>
         <p:txBody>
-          <a:bodyPr wrap="square" lIns="36576" rIns="36576" tIns="18288" bIns="18288" anchor="t">
+          <a:bodyPr wrap="square" lIns="36576" tIns="18288" rIns="36576" bIns="18288" anchor="t">
             <a:spAutoFit/>
           </a:bodyPr>
           <a:lstStyle/>
@@ -6105,7 +5951,9 @@
         <p:txBody>
           <a:bodyPr rtlCol="0" anchor="ctr"/>
           <a:lstStyle/>
-          <a:p/>
+          <a:p>
+            <a:endParaRPr/>
+          </a:p>
         </p:txBody>
       </p:sp>
       <p:sp>
@@ -6125,7 +5973,7 @@
           <a:noFill/>
         </p:spPr>
         <p:txBody>
-          <a:bodyPr wrap="square" lIns="36576" rIns="36576" tIns="18288" bIns="18288" anchor="ctr">
+          <a:bodyPr wrap="square" lIns="36576" tIns="18288" rIns="36576" bIns="18288" anchor="ctr">
             <a:spAutoFit/>
           </a:bodyPr>
           <a:lstStyle/>
@@ -6160,7 +6008,7 @@
           <a:noFill/>
         </p:spPr>
         <p:txBody>
-          <a:bodyPr wrap="square" lIns="36576" rIns="36576" tIns="18288" bIns="18288" anchor="ctr">
+          <a:bodyPr wrap="square" lIns="36576" tIns="18288" rIns="36576" bIns="18288" anchor="ctr">
             <a:spAutoFit/>
           </a:bodyPr>
           <a:lstStyle/>
@@ -6195,7 +6043,7 @@
           <a:noFill/>
         </p:spPr>
         <p:txBody>
-          <a:bodyPr wrap="square" lIns="36576" rIns="36576" tIns="18288" bIns="18288" anchor="ctr">
+          <a:bodyPr wrap="square" lIns="36576" tIns="18288" rIns="36576" bIns="18288" anchor="ctr">
             <a:spAutoFit/>
           </a:bodyPr>
           <a:lstStyle/>
@@ -6256,7 +6104,9 @@
         <p:txBody>
           <a:bodyPr rtlCol="0" anchor="ctr"/>
           <a:lstStyle/>
-          <a:p/>
+          <a:p>
+            <a:endParaRPr/>
+          </a:p>
         </p:txBody>
       </p:sp>
       <p:sp>
@@ -6276,7 +6126,7 @@
           <a:noFill/>
         </p:spPr>
         <p:txBody>
-          <a:bodyPr wrap="square" lIns="36576" rIns="36576" tIns="18288" bIns="18288" anchor="ctr">
+          <a:bodyPr wrap="square" lIns="36576" tIns="18288" rIns="36576" bIns="18288" anchor="ctr">
             <a:spAutoFit/>
           </a:bodyPr>
           <a:lstStyle/>
@@ -6311,7 +6161,7 @@
           <a:noFill/>
         </p:spPr>
         <p:txBody>
-          <a:bodyPr wrap="square" lIns="36576" rIns="36576" tIns="18288" bIns="18288" anchor="ctr">
+          <a:bodyPr wrap="square" lIns="36576" tIns="18288" rIns="36576" bIns="18288" anchor="ctr">
             <a:spAutoFit/>
           </a:bodyPr>
           <a:lstStyle/>
@@ -6346,7 +6196,7 @@
           <a:noFill/>
         </p:spPr>
         <p:txBody>
-          <a:bodyPr wrap="square" lIns="36576" rIns="36576" tIns="18288" bIns="18288" anchor="ctr">
+          <a:bodyPr wrap="square" lIns="36576" tIns="18288" rIns="36576" bIns="18288" anchor="ctr">
             <a:spAutoFit/>
           </a:bodyPr>
           <a:lstStyle/>
@@ -6407,7 +6257,9 @@
         <p:txBody>
           <a:bodyPr rtlCol="0" anchor="ctr"/>
           <a:lstStyle/>
-          <a:p/>
+          <a:p>
+            <a:endParaRPr/>
+          </a:p>
         </p:txBody>
       </p:sp>
       <p:sp>
@@ -6427,7 +6279,7 @@
           <a:noFill/>
         </p:spPr>
         <p:txBody>
-          <a:bodyPr wrap="square" lIns="36576" rIns="36576" tIns="18288" bIns="18288" anchor="ctr">
+          <a:bodyPr wrap="square" lIns="36576" tIns="18288" rIns="36576" bIns="18288" anchor="ctr">
             <a:spAutoFit/>
           </a:bodyPr>
           <a:lstStyle/>
@@ -6462,7 +6314,7 @@
           <a:noFill/>
         </p:spPr>
         <p:txBody>
-          <a:bodyPr wrap="square" lIns="36576" rIns="36576" tIns="18288" bIns="18288" anchor="ctr">
+          <a:bodyPr wrap="square" lIns="36576" tIns="18288" rIns="36576" bIns="18288" anchor="ctr">
             <a:spAutoFit/>
           </a:bodyPr>
           <a:lstStyle/>
@@ -6497,7 +6349,7 @@
           <a:noFill/>
         </p:spPr>
         <p:txBody>
-          <a:bodyPr wrap="square" lIns="36576" rIns="36576" tIns="18288" bIns="18288" anchor="ctr">
+          <a:bodyPr wrap="square" lIns="36576" tIns="18288" rIns="36576" bIns="18288" anchor="ctr">
             <a:spAutoFit/>
           </a:bodyPr>
           <a:lstStyle/>
@@ -6532,7 +6384,7 @@
           <a:noFill/>
         </p:spPr>
         <p:txBody>
-          <a:bodyPr wrap="square" lIns="36576" rIns="36576" tIns="18288" bIns="18288" anchor="t">
+          <a:bodyPr wrap="square" lIns="36576" tIns="18288" rIns="36576" bIns="18288" anchor="t">
             <a:spAutoFit/>
           </a:bodyPr>
           <a:lstStyle/>
@@ -6591,7 +6443,9 @@
         <p:txBody>
           <a:bodyPr rtlCol="0" anchor="ctr"/>
           <a:lstStyle/>
-          <a:p/>
+          <a:p>
+            <a:endParaRPr/>
+          </a:p>
         </p:txBody>
       </p:sp>
       <p:sp>
@@ -6611,7 +6465,7 @@
           <a:noFill/>
         </p:spPr>
         <p:txBody>
-          <a:bodyPr wrap="square" lIns="36576" rIns="36576" tIns="18288" bIns="18288" anchor="ctr">
+          <a:bodyPr wrap="square" lIns="36576" tIns="18288" rIns="36576" bIns="18288" anchor="ctr">
             <a:spAutoFit/>
           </a:bodyPr>
           <a:lstStyle/>
@@ -6670,7 +6524,9 @@
         <p:txBody>
           <a:bodyPr rtlCol="0" anchor="ctr"/>
           <a:lstStyle/>
-          <a:p/>
+          <a:p>
+            <a:endParaRPr/>
+          </a:p>
         </p:txBody>
       </p:sp>
       <p:sp>
@@ -6690,7 +6546,7 @@
           <a:noFill/>
         </p:spPr>
         <p:txBody>
-          <a:bodyPr wrap="square" lIns="36576" rIns="36576" tIns="18288" bIns="18288" anchor="ctr">
+          <a:bodyPr wrap="square" lIns="36576" tIns="18288" rIns="36576" bIns="18288" anchor="ctr">
             <a:spAutoFit/>
           </a:bodyPr>
           <a:lstStyle/>
@@ -6749,7 +6605,9 @@
         <p:txBody>
           <a:bodyPr rtlCol="0" anchor="ctr"/>
           <a:lstStyle/>
-          <a:p/>
+          <a:p>
+            <a:endParaRPr/>
+          </a:p>
         </p:txBody>
       </p:sp>
       <p:sp>
@@ -6769,7 +6627,7 @@
           <a:noFill/>
         </p:spPr>
         <p:txBody>
-          <a:bodyPr wrap="square" lIns="36576" rIns="36576" tIns="18288" bIns="18288" anchor="ctr">
+          <a:bodyPr wrap="square" lIns="36576" tIns="18288" rIns="36576" bIns="18288" anchor="ctr">
             <a:spAutoFit/>
           </a:bodyPr>
           <a:lstStyle/>
@@ -6828,7 +6686,9 @@
         <p:txBody>
           <a:bodyPr rtlCol="0" anchor="ctr"/>
           <a:lstStyle/>
-          <a:p/>
+          <a:p>
+            <a:endParaRPr/>
+          </a:p>
         </p:txBody>
       </p:sp>
       <p:sp>
@@ -6848,7 +6708,7 @@
           <a:noFill/>
         </p:spPr>
         <p:txBody>
-          <a:bodyPr wrap="square" lIns="36576" rIns="36576" tIns="18288" bIns="18288" anchor="ctr">
+          <a:bodyPr wrap="square" lIns="36576" tIns="18288" rIns="36576" bIns="18288" anchor="ctr">
             <a:spAutoFit/>
           </a:bodyPr>
           <a:lstStyle/>
@@ -6883,7 +6743,7 @@
           <a:noFill/>
         </p:spPr>
         <p:txBody>
-          <a:bodyPr wrap="square" lIns="36576" rIns="36576" tIns="18288" bIns="18288" anchor="t">
+          <a:bodyPr wrap="square" lIns="36576" tIns="18288" rIns="36576" bIns="18288" anchor="t">
             <a:spAutoFit/>
           </a:bodyPr>
           <a:lstStyle/>
@@ -6918,7 +6778,7 @@
           <a:noFill/>
         </p:spPr>
         <p:txBody>
-          <a:bodyPr wrap="square" lIns="36576" rIns="36576" tIns="18288" bIns="18288" anchor="t">
+          <a:bodyPr wrap="square" lIns="36576" tIns="18288" rIns="36576" bIns="18288" anchor="t">
             <a:spAutoFit/>
           </a:bodyPr>
           <a:lstStyle/>
@@ -6945,7 +6805,7 @@
 </file>
 
 <file path=ppt/slides/slide12.xml><?xml version="1.0" encoding="utf-8"?>
-<p:sld xmlns:a="http://schemas.openxmlformats.org/drawingml/2006/main" xmlns:p="http://schemas.openxmlformats.org/presentationml/2006/main" xmlns:r="http://schemas.openxmlformats.org/officeDocument/2006/relationships">
+<p:sld xmlns:a="http://schemas.openxmlformats.org/drawingml/2006/main" xmlns:r="http://schemas.openxmlformats.org/officeDocument/2006/relationships" xmlns:p="http://schemas.openxmlformats.org/presentationml/2006/main">
   <p:cSld>
     <p:bg>
       <p:bgPr>
@@ -6961,7 +6821,14 @@
         <p:cNvGrpSpPr/>
         <p:nvPr/>
       </p:nvGrpSpPr>
-      <p:grpSpPr/>
+      <p:grpSpPr>
+        <a:xfrm>
+          <a:off x="0" y="0"/>
+          <a:ext cx="0" cy="0"/>
+          <a:chOff x="0" y="0"/>
+          <a:chExt cx="0" cy="0"/>
+        </a:xfrm>
+      </p:grpSpPr>
       <p:sp>
         <p:nvSpPr>
           <p:cNvPr id="2" name="TextBox 1"/>
@@ -6979,7 +6846,7 @@
           <a:noFill/>
         </p:spPr>
         <p:txBody>
-          <a:bodyPr wrap="square" lIns="36576" rIns="36576" tIns="18288" bIns="18288" anchor="t">
+          <a:bodyPr wrap="square" lIns="36576" tIns="18288" rIns="36576" bIns="18288" anchor="t">
             <a:spAutoFit/>
           </a:bodyPr>
           <a:lstStyle/>
@@ -7014,7 +6881,7 @@
           <a:noFill/>
         </p:spPr>
         <p:txBody>
-          <a:bodyPr wrap="square" lIns="36576" rIns="36576" tIns="18288" bIns="18288" anchor="t">
+          <a:bodyPr wrap="square" lIns="36576" tIns="18288" rIns="36576" bIns="18288" anchor="t">
             <a:spAutoFit/>
           </a:bodyPr>
           <a:lstStyle/>
@@ -7071,7 +6938,9 @@
         <p:txBody>
           <a:bodyPr rtlCol="0" anchor="ctr"/>
           <a:lstStyle/>
-          <a:p/>
+          <a:p>
+            <a:endParaRPr/>
+          </a:p>
         </p:txBody>
       </p:sp>
       <p:sp>
@@ -7117,7 +6986,9 @@
         <p:txBody>
           <a:bodyPr rtlCol="0" anchor="ctr"/>
           <a:lstStyle/>
-          <a:p/>
+          <a:p>
+            <a:endParaRPr/>
+          </a:p>
         </p:txBody>
       </p:sp>
       <p:sp>
@@ -7137,7 +7008,7 @@
           <a:noFill/>
         </p:spPr>
         <p:txBody>
-          <a:bodyPr wrap="square" lIns="36576" rIns="36576" tIns="18288" bIns="18288" anchor="t">
+          <a:bodyPr wrap="square" lIns="36576" tIns="18288" rIns="36576" bIns="18288" anchor="t">
             <a:spAutoFit/>
           </a:bodyPr>
           <a:lstStyle/>
@@ -7172,7 +7043,7 @@
           <a:noFill/>
         </p:spPr>
         <p:txBody>
-          <a:bodyPr wrap="square" lIns="36576" rIns="36576" tIns="18288" bIns="18288" anchor="t">
+          <a:bodyPr wrap="square" lIns="36576" tIns="18288" rIns="36576" bIns="18288" anchor="t">
             <a:spAutoFit/>
           </a:bodyPr>
           <a:lstStyle/>
@@ -7233,7 +7104,9 @@
         <p:txBody>
           <a:bodyPr rtlCol="0" anchor="ctr"/>
           <a:lstStyle/>
-          <a:p/>
+          <a:p>
+            <a:endParaRPr/>
+          </a:p>
         </p:txBody>
       </p:sp>
       <p:sp>
@@ -7253,7 +7126,7 @@
           <a:noFill/>
         </p:spPr>
         <p:txBody>
-          <a:bodyPr wrap="square" lIns="36576" rIns="36576" tIns="18288" bIns="18288" anchor="t">
+          <a:bodyPr wrap="square" lIns="36576" tIns="18288" rIns="36576" bIns="18288" anchor="t">
             <a:spAutoFit/>
           </a:bodyPr>
           <a:lstStyle/>
@@ -7288,7 +7161,7 @@
           <a:noFill/>
         </p:spPr>
         <p:txBody>
-          <a:bodyPr wrap="square" lIns="36576" rIns="36576" tIns="18288" bIns="18288" anchor="t">
+          <a:bodyPr wrap="square" lIns="36576" tIns="18288" rIns="36576" bIns="18288" anchor="t">
             <a:spAutoFit/>
           </a:bodyPr>
           <a:lstStyle/>
@@ -7349,7 +7222,9 @@
         <p:txBody>
           <a:bodyPr rtlCol="0" anchor="ctr"/>
           <a:lstStyle/>
-          <a:p/>
+          <a:p>
+            <a:endParaRPr/>
+          </a:p>
         </p:txBody>
       </p:sp>
       <p:sp>
@@ -7369,7 +7244,7 @@
           <a:noFill/>
         </p:spPr>
         <p:txBody>
-          <a:bodyPr wrap="square" lIns="36576" rIns="36576" tIns="18288" bIns="18288" anchor="t">
+          <a:bodyPr wrap="square" lIns="36576" tIns="18288" rIns="36576" bIns="18288" anchor="t">
             <a:spAutoFit/>
           </a:bodyPr>
           <a:lstStyle/>
@@ -7404,7 +7279,7 @@
           <a:noFill/>
         </p:spPr>
         <p:txBody>
-          <a:bodyPr wrap="square" lIns="36576" rIns="36576" tIns="18288" bIns="18288" anchor="t">
+          <a:bodyPr wrap="square" lIns="36576" tIns="18288" rIns="36576" bIns="18288" anchor="t">
             <a:spAutoFit/>
           </a:bodyPr>
           <a:lstStyle/>
@@ -7465,7 +7340,9 @@
         <p:txBody>
           <a:bodyPr rtlCol="0" anchor="ctr"/>
           <a:lstStyle/>
-          <a:p/>
+          <a:p>
+            <a:endParaRPr/>
+          </a:p>
         </p:txBody>
       </p:sp>
       <p:sp>
@@ -7485,7 +7362,7 @@
           <a:noFill/>
         </p:spPr>
         <p:txBody>
-          <a:bodyPr wrap="square" lIns="36576" rIns="36576" tIns="18288" bIns="18288" anchor="t">
+          <a:bodyPr wrap="square" lIns="36576" tIns="18288" rIns="36576" bIns="18288" anchor="t">
             <a:spAutoFit/>
           </a:bodyPr>
           <a:lstStyle/>
@@ -7520,7 +7397,7 @@
           <a:noFill/>
         </p:spPr>
         <p:txBody>
-          <a:bodyPr wrap="square" lIns="36576" rIns="36576" tIns="18288" bIns="18288" anchor="t">
+          <a:bodyPr wrap="square" lIns="36576" tIns="18288" rIns="36576" bIns="18288" anchor="t">
             <a:spAutoFit/>
           </a:bodyPr>
           <a:lstStyle/>
@@ -7581,7 +7458,9 @@
         <p:txBody>
           <a:bodyPr rtlCol="0" anchor="ctr"/>
           <a:lstStyle/>
-          <a:p/>
+          <a:p>
+            <a:endParaRPr/>
+          </a:p>
         </p:txBody>
       </p:sp>
       <p:sp>
@@ -7601,7 +7480,7 @@
           <a:noFill/>
         </p:spPr>
         <p:txBody>
-          <a:bodyPr wrap="square" lIns="36576" rIns="36576" tIns="18288" bIns="18288" anchor="t">
+          <a:bodyPr wrap="square" lIns="36576" tIns="18288" rIns="36576" bIns="18288" anchor="t">
             <a:spAutoFit/>
           </a:bodyPr>
           <a:lstStyle/>
@@ -7636,7 +7515,7 @@
           <a:noFill/>
         </p:spPr>
         <p:txBody>
-          <a:bodyPr wrap="square" lIns="36576" rIns="36576" tIns="18288" bIns="18288" anchor="t">
+          <a:bodyPr wrap="square" lIns="36576" tIns="18288" rIns="36576" bIns="18288" anchor="t">
             <a:spAutoFit/>
           </a:bodyPr>
           <a:lstStyle/>
@@ -7650,122 +7529,6 @@
                 <a:latin typeface="Arial"/>
               </a:rPr>
               <a:t>Identity and per-repo owners</a:t>
-            </a:r>
-          </a:p>
-        </p:txBody>
-      </p:sp>
-      <p:sp>
-        <p:nvSpPr>
-          <p:cNvPr id="20" name="Rounded Rectangle 19"/>
-          <p:cNvSpPr/>
-          <p:nvPr/>
-        </p:nvSpPr>
-        <p:spPr>
-          <a:xfrm>
-            <a:off x="8138159" y="3200400"/>
-            <a:ext cx="3474720" cy="1188720"/>
-          </a:xfrm>
-          <a:prstGeom prst="roundRect">
-            <a:avLst>
-              <a:gd name="adj" fmla="val 8000"/>
-            </a:avLst>
-          </a:prstGeom>
-          <a:solidFill>
-            <a:srgbClr val="141824"/>
-          </a:solidFill>
-          <a:ln w="12700">
-            <a:solidFill>
-              <a:srgbClr val="34D399"/>
-            </a:solidFill>
-          </a:ln>
-          <a:effectLst/>
-        </p:spPr>
-        <p:style>
-          <a:lnRef idx="1">
-            <a:schemeClr val="accent1"/>
-          </a:lnRef>
-          <a:fillRef idx="3">
-            <a:schemeClr val="accent1"/>
-          </a:fillRef>
-          <a:effectRef idx="2">
-            <a:schemeClr val="accent1"/>
-          </a:effectRef>
-          <a:fontRef idx="minor">
-            <a:schemeClr val="lt1"/>
-          </a:fontRef>
-        </p:style>
-        <p:txBody>
-          <a:bodyPr rtlCol="0" anchor="ctr"/>
-          <a:lstStyle/>
-          <a:p/>
-        </p:txBody>
-      </p:sp>
-      <p:sp>
-        <p:nvSpPr>
-          <p:cNvPr id="21" name="TextBox 20"/>
-          <p:cNvSpPr txBox="1"/>
-          <p:nvPr/>
-        </p:nvSpPr>
-        <p:spPr>
-          <a:xfrm>
-            <a:off x="8366759" y="3310128"/>
-            <a:ext cx="3017520" cy="365760"/>
-          </a:xfrm>
-          <a:prstGeom prst="rect">
-            <a:avLst/>
-          </a:prstGeom>
-          <a:noFill/>
-        </p:spPr>
-        <p:txBody>
-          <a:bodyPr wrap="square" lIns="36576" rIns="36576" tIns="18288" bIns="18288" anchor="t">
-            <a:spAutoFit/>
-          </a:bodyPr>
-          <a:lstStyle/>
-          <a:p>
-            <a:pPr algn="l"/>
-            <a:r>
-              <a:rPr sz="1600" b="1">
-                <a:solidFill>
-                  <a:srgbClr val="34D399"/>
-                </a:solidFill>
-                <a:latin typeface="Arial"/>
-              </a:rPr>
-              <a:t>Isolated worktrees + metrics</a:t>
-            </a:r>
-          </a:p>
-        </p:txBody>
-      </p:sp>
-      <p:sp>
-        <p:nvSpPr>
-          <p:cNvPr id="22" name="TextBox 21"/>
-          <p:cNvSpPr txBox="1"/>
-          <p:nvPr/>
-        </p:nvSpPr>
-        <p:spPr>
-          <a:xfrm>
-            <a:off x="8366759" y="3703320"/>
-            <a:ext cx="3017520" cy="640080"/>
-          </a:xfrm>
-          <a:prstGeom prst="rect">
-            <a:avLst/>
-          </a:prstGeom>
-          <a:noFill/>
-        </p:spPr>
-        <p:txBody>
-          <a:bodyPr wrap="square" lIns="36576" rIns="36576" tIns="18288" bIns="18288" anchor="t">
-            <a:spAutoFit/>
-          </a:bodyPr>
-          <a:lstStyle/>
-          <a:p>
-            <a:pPr algn="l"/>
-            <a:r>
-              <a:rPr sz="1200" b="0">
-                <a:solidFill>
-                  <a:srgbClr val="94A3B8"/>
-                </a:solidFill>
-                <a:latin typeface="Arial"/>
-              </a:rPr>
-              <a:t>Safer runs, and time per gate, revise rate, falsified hypotheses</a:t>
             </a:r>
           </a:p>
         </p:txBody>
@@ -7813,173 +7576,187 @@
         <p:txBody>
           <a:bodyPr rtlCol="0" anchor="ctr"/>
           <a:lstStyle/>
-          <a:p/>
+          <a:p>
+            <a:endParaRPr/>
+          </a:p>
+        </p:txBody>
+      </p:sp>
+      <p:sp>
+        <p:nvSpPr>
+          <p:cNvPr id="25" name="TextBox 24"/>
+          <p:cNvSpPr txBox="1"/>
+          <p:nvPr/>
+        </p:nvSpPr>
+        <p:spPr>
+          <a:xfrm>
+            <a:off x="2352099" y="4892040"/>
+            <a:ext cx="8412480" cy="548640"/>
+          </a:xfrm>
+          <a:prstGeom prst="rect">
+            <a:avLst/>
+          </a:prstGeom>
+          <a:noFill/>
+        </p:spPr>
+        <p:txBody>
+          <a:bodyPr wrap="square" lIns="36576" tIns="18288" rIns="36576" bIns="18288" anchor="t">
+            <a:spAutoFit/>
+          </a:bodyPr>
+          <a:lstStyle/>
+          <a:p>
+            <a:pPr algn="l"/>
+            <a:r>
+              <a:rPr sz="2800" b="1" dirty="0">
+                <a:solidFill>
+                  <a:srgbClr val="F1F5F9"/>
+                </a:solidFill>
+                <a:latin typeface="Arial"/>
+              </a:rPr>
+              <a:t>See it. Question it. Repair it.</a:t>
+            </a:r>
+          </a:p>
+        </p:txBody>
+      </p:sp>
+      <p:sp>
+        <p:nvSpPr>
+          <p:cNvPr id="26" name="TextBox 25"/>
+          <p:cNvSpPr txBox="1"/>
+          <p:nvPr/>
+        </p:nvSpPr>
+        <p:spPr>
+          <a:xfrm>
+            <a:off x="2352099" y="5486400"/>
+            <a:ext cx="8412480" cy="640080"/>
+          </a:xfrm>
+          <a:prstGeom prst="rect">
+            <a:avLst/>
+          </a:prstGeom>
+          <a:noFill/>
+        </p:spPr>
+        <p:txBody>
+          <a:bodyPr wrap="square" lIns="36576" tIns="18288" rIns="36576" bIns="18288" anchor="t">
+            <a:spAutoFit/>
+          </a:bodyPr>
+          <a:lstStyle/>
+          <a:p>
+            <a:pPr algn="l"/>
+            <a:r>
+              <a:rPr sz="1500" b="0">
+                <a:solidFill>
+                  <a:srgbClr val="94A3B8"/>
+                </a:solidFill>
+                <a:latin typeface="Arial"/>
+              </a:rPr>
+              <a:t>A live graph of the system, answers with evidence, and fixes a human approves at every gate.</a:t>
+            </a:r>
+          </a:p>
+        </p:txBody>
+      </p:sp>
+      <p:sp>
+        <p:nvSpPr>
+          <p:cNvPr id="27" name="TextBox 26"/>
+          <p:cNvSpPr txBox="1"/>
+          <p:nvPr/>
+        </p:nvSpPr>
+        <p:spPr>
+          <a:xfrm>
+            <a:off x="640080" y="6446520"/>
+            <a:ext cx="5486400" cy="274320"/>
+          </a:xfrm>
+          <a:prstGeom prst="rect">
+            <a:avLst/>
+          </a:prstGeom>
+          <a:noFill/>
+        </p:spPr>
+        <p:txBody>
+          <a:bodyPr wrap="square" lIns="36576" tIns="18288" rIns="36576" bIns="18288" anchor="t">
+            <a:spAutoFit/>
+          </a:bodyPr>
+          <a:lstStyle/>
+          <a:p>
+            <a:pPr algn="l"/>
+            <a:r>
+              <a:rPr sz="1000" b="0">
+                <a:solidFill>
+                  <a:srgbClr val="94A3B8"/>
+                </a:solidFill>
+                <a:latin typeface="Arial"/>
+              </a:rPr>
+              <a:t>CodeGraph  |  Hackathon</a:t>
+            </a:r>
+          </a:p>
+        </p:txBody>
+      </p:sp>
+      <p:sp>
+        <p:nvSpPr>
+          <p:cNvPr id="28" name="TextBox 27"/>
+          <p:cNvSpPr txBox="1"/>
+          <p:nvPr/>
+        </p:nvSpPr>
+        <p:spPr>
+          <a:xfrm>
+            <a:off x="10820095" y="6446520"/>
+            <a:ext cx="731520" cy="274320"/>
+          </a:xfrm>
+          <a:prstGeom prst="rect">
+            <a:avLst/>
+          </a:prstGeom>
+          <a:noFill/>
+        </p:spPr>
+        <p:txBody>
+          <a:bodyPr wrap="square" lIns="36576" tIns="18288" rIns="36576" bIns="18288" anchor="t">
+            <a:spAutoFit/>
+          </a:bodyPr>
+          <a:lstStyle/>
+          <a:p>
+            <a:pPr algn="r"/>
+            <a:r>
+              <a:rPr sz="1000" b="0">
+                <a:solidFill>
+                  <a:srgbClr val="94A3B8"/>
+                </a:solidFill>
+                <a:latin typeface="Arial"/>
+              </a:rPr>
+              <a:t>12</a:t>
+            </a:r>
+          </a:p>
         </p:txBody>
       </p:sp>
       <p:pic>
         <p:nvPicPr>
-          <p:cNvPr id="24" name="Picture 23" descr="codegraph-logo-transparent.png"/>
+          <p:cNvPr id="29" name="Graphic 28">
+            <a:extLst>
+              <a:ext uri="{FF2B5EF4-FFF2-40B4-BE49-F238E27FC236}">
+                <a16:creationId xmlns:a16="http://schemas.microsoft.com/office/drawing/2014/main" id="{4FFFCBAF-4055-4C83-2AAB-F332B6EF43A1}"/>
+              </a:ext>
+            </a:extLst>
+          </p:cNvPr>
           <p:cNvPicPr>
             <a:picLocks noChangeAspect="1"/>
           </p:cNvPicPr>
           <p:nvPr/>
         </p:nvPicPr>
         <p:blipFill>
-          <a:blip r:embed="rId3"/>
+          <a:blip>
+            <a:extLst>
+              <a:ext uri="{96DAC541-7B7A-43D3-8B79-37D633B846F1}">
+                <asvg:svgBlip xmlns:asvg="http://schemas.microsoft.com/office/drawing/2016/SVG/main" r:embed="rId3"/>
+              </a:ext>
+            </a:extLst>
+          </a:blip>
           <a:stretch>
             <a:fillRect/>
           </a:stretch>
         </p:blipFill>
         <p:spPr>
           <a:xfrm>
-            <a:off x="868680" y="4846320"/>
-            <a:ext cx="1188720" cy="1188720"/>
+            <a:off x="1156716" y="5033772"/>
+            <a:ext cx="685800" cy="685800"/>
           </a:xfrm>
           <a:prstGeom prst="rect">
             <a:avLst/>
           </a:prstGeom>
         </p:spPr>
       </p:pic>
-      <p:sp>
-        <p:nvSpPr>
-          <p:cNvPr id="25" name="TextBox 24"/>
-          <p:cNvSpPr txBox="1"/>
-          <p:nvPr/>
-        </p:nvSpPr>
-        <p:spPr>
-          <a:xfrm>
-            <a:off x="2926080" y="4846320"/>
-            <a:ext cx="8412480" cy="548640"/>
-          </a:xfrm>
-          <a:prstGeom prst="rect">
-            <a:avLst/>
-          </a:prstGeom>
-          <a:noFill/>
-        </p:spPr>
-        <p:txBody>
-          <a:bodyPr wrap="square" lIns="36576" rIns="36576" tIns="18288" bIns="18288" anchor="t">
-            <a:spAutoFit/>
-          </a:bodyPr>
-          <a:lstStyle/>
-          <a:p>
-            <a:pPr algn="l"/>
-            <a:r>
-              <a:rPr sz="2800" b="1">
-                <a:solidFill>
-                  <a:srgbClr val="F1F5F9"/>
-                </a:solidFill>
-                <a:latin typeface="Arial"/>
-              </a:rPr>
-              <a:t>See it. Question it. Repair it.</a:t>
-            </a:r>
-          </a:p>
-        </p:txBody>
-      </p:sp>
-      <p:sp>
-        <p:nvSpPr>
-          <p:cNvPr id="26" name="TextBox 25"/>
-          <p:cNvSpPr txBox="1"/>
-          <p:nvPr/>
-        </p:nvSpPr>
-        <p:spPr>
-          <a:xfrm>
-            <a:off x="2926080" y="5440680"/>
-            <a:ext cx="8412480" cy="640080"/>
-          </a:xfrm>
-          <a:prstGeom prst="rect">
-            <a:avLst/>
-          </a:prstGeom>
-          <a:noFill/>
-        </p:spPr>
-        <p:txBody>
-          <a:bodyPr wrap="square" lIns="36576" rIns="36576" tIns="18288" bIns="18288" anchor="t">
-            <a:spAutoFit/>
-          </a:bodyPr>
-          <a:lstStyle/>
-          <a:p>
-            <a:pPr algn="l"/>
-            <a:r>
-              <a:rPr sz="1500" b="0">
-                <a:solidFill>
-                  <a:srgbClr val="94A3B8"/>
-                </a:solidFill>
-                <a:latin typeface="Arial"/>
-              </a:rPr>
-              <a:t>A live graph of the system, answers with evidence, and fixes a human approves at every gate.</a:t>
-            </a:r>
-          </a:p>
-        </p:txBody>
-      </p:sp>
-      <p:sp>
-        <p:nvSpPr>
-          <p:cNvPr id="27" name="TextBox 26"/>
-          <p:cNvSpPr txBox="1"/>
-          <p:nvPr/>
-        </p:nvSpPr>
-        <p:spPr>
-          <a:xfrm>
-            <a:off x="640080" y="6446520"/>
-            <a:ext cx="5486400" cy="274320"/>
-          </a:xfrm>
-          <a:prstGeom prst="rect">
-            <a:avLst/>
-          </a:prstGeom>
-          <a:noFill/>
-        </p:spPr>
-        <p:txBody>
-          <a:bodyPr wrap="square" lIns="36576" rIns="36576" tIns="18288" bIns="18288" anchor="t">
-            <a:spAutoFit/>
-          </a:bodyPr>
-          <a:lstStyle/>
-          <a:p>
-            <a:pPr algn="l"/>
-            <a:r>
-              <a:rPr sz="1000" b="0">
-                <a:solidFill>
-                  <a:srgbClr val="94A3B8"/>
-                </a:solidFill>
-                <a:latin typeface="Arial"/>
-              </a:rPr>
-              <a:t>CodeGraph  |  Hackathon</a:t>
-            </a:r>
-          </a:p>
-        </p:txBody>
-      </p:sp>
-      <p:sp>
-        <p:nvSpPr>
-          <p:cNvPr id="28" name="TextBox 27"/>
-          <p:cNvSpPr txBox="1"/>
-          <p:nvPr/>
-        </p:nvSpPr>
-        <p:spPr>
-          <a:xfrm>
-            <a:off x="10820095" y="6446520"/>
-            <a:ext cx="731520" cy="274320"/>
-          </a:xfrm>
-          <a:prstGeom prst="rect">
-            <a:avLst/>
-          </a:prstGeom>
-          <a:noFill/>
-        </p:spPr>
-        <p:txBody>
-          <a:bodyPr wrap="square" lIns="36576" rIns="36576" tIns="18288" bIns="18288" anchor="t">
-            <a:spAutoFit/>
-          </a:bodyPr>
-          <a:lstStyle/>
-          <a:p>
-            <a:pPr algn="r"/>
-            <a:r>
-              <a:rPr sz="1000" b="0">
-                <a:solidFill>
-                  <a:srgbClr val="94A3B8"/>
-                </a:solidFill>
-                <a:latin typeface="Arial"/>
-              </a:rPr>
-              <a:t>12</a:t>
-            </a:r>
-          </a:p>
-        </p:txBody>
-      </p:sp>
     </p:spTree>
   </p:cSld>
   <p:clrMapOvr>
@@ -7989,7 +7766,7 @@
 </file>
 
 <file path=ppt/slides/slide2.xml><?xml version="1.0" encoding="utf-8"?>
-<p:sld xmlns:a="http://schemas.openxmlformats.org/drawingml/2006/main" xmlns:p="http://schemas.openxmlformats.org/presentationml/2006/main" xmlns:r="http://schemas.openxmlformats.org/officeDocument/2006/relationships">
+<p:sld xmlns:a="http://schemas.openxmlformats.org/drawingml/2006/main" xmlns:r="http://schemas.openxmlformats.org/officeDocument/2006/relationships" xmlns:p="http://schemas.openxmlformats.org/presentationml/2006/main">
   <p:cSld>
     <p:bg>
       <p:bgPr>
@@ -8005,7 +7782,14 @@
         <p:cNvGrpSpPr/>
         <p:nvPr/>
       </p:nvGrpSpPr>
-      <p:grpSpPr/>
+      <p:grpSpPr>
+        <a:xfrm>
+          <a:off x="0" y="0"/>
+          <a:ext cx="0" cy="0"/>
+          <a:chOff x="0" y="0"/>
+          <a:chExt cx="0" cy="0"/>
+        </a:xfrm>
+      </p:grpSpPr>
       <p:sp>
         <p:nvSpPr>
           <p:cNvPr id="2" name="TextBox 1"/>
@@ -8023,7 +7807,7 @@
           <a:noFill/>
         </p:spPr>
         <p:txBody>
-          <a:bodyPr wrap="square" lIns="36576" rIns="36576" tIns="18288" bIns="18288" anchor="t">
+          <a:bodyPr wrap="square" lIns="36576" tIns="18288" rIns="36576" bIns="18288" anchor="t">
             <a:spAutoFit/>
           </a:bodyPr>
           <a:lstStyle/>
@@ -8058,7 +7842,7 @@
           <a:noFill/>
         </p:spPr>
         <p:txBody>
-          <a:bodyPr wrap="square" lIns="36576" rIns="36576" tIns="18288" bIns="18288" anchor="t">
+          <a:bodyPr wrap="square" lIns="36576" tIns="18288" rIns="36576" bIns="18288" anchor="t">
             <a:spAutoFit/>
           </a:bodyPr>
           <a:lstStyle/>
@@ -8115,7 +7899,9 @@
         <p:txBody>
           <a:bodyPr rtlCol="0" anchor="ctr"/>
           <a:lstStyle/>
-          <a:p/>
+          <a:p>
+            <a:endParaRPr/>
+          </a:p>
         </p:txBody>
       </p:sp>
       <p:sp>
@@ -8161,7 +7947,9 @@
         <p:txBody>
           <a:bodyPr rtlCol="0" anchor="ctr"/>
           <a:lstStyle/>
-          <a:p/>
+          <a:p>
+            <a:endParaRPr/>
+          </a:p>
         </p:txBody>
       </p:sp>
       <p:sp>
@@ -8203,7 +7991,9 @@
         <p:txBody>
           <a:bodyPr rtlCol="0" anchor="ctr"/>
           <a:lstStyle/>
-          <a:p/>
+          <a:p>
+            <a:endParaRPr/>
+          </a:p>
         </p:txBody>
       </p:sp>
       <p:sp>
@@ -8223,7 +8013,7 @@
           <a:noFill/>
         </p:spPr>
         <p:txBody>
-          <a:bodyPr wrap="square" lIns="36576" rIns="36576" tIns="18288" bIns="18288" anchor="t">
+          <a:bodyPr wrap="square" lIns="36576" tIns="18288" rIns="36576" bIns="18288" anchor="t">
             <a:spAutoFit/>
           </a:bodyPr>
           <a:lstStyle/>
@@ -8258,7 +8048,7 @@
           <a:noFill/>
         </p:spPr>
         <p:txBody>
-          <a:bodyPr wrap="square" lIns="36576" rIns="36576" tIns="18288" bIns="18288" anchor="t">
+          <a:bodyPr wrap="square" lIns="36576" tIns="18288" rIns="36576" bIns="18288" anchor="t">
             <a:spAutoFit/>
           </a:bodyPr>
           <a:lstStyle/>
@@ -8319,7 +8109,9 @@
         <p:txBody>
           <a:bodyPr rtlCol="0" anchor="ctr"/>
           <a:lstStyle/>
-          <a:p/>
+          <a:p>
+            <a:endParaRPr/>
+          </a:p>
         </p:txBody>
       </p:sp>
       <p:sp>
@@ -8361,7 +8153,9 @@
         <p:txBody>
           <a:bodyPr rtlCol="0" anchor="ctr"/>
           <a:lstStyle/>
-          <a:p/>
+          <a:p>
+            <a:endParaRPr/>
+          </a:p>
         </p:txBody>
       </p:sp>
       <p:sp>
@@ -8381,7 +8175,7 @@
           <a:noFill/>
         </p:spPr>
         <p:txBody>
-          <a:bodyPr wrap="square" lIns="36576" rIns="36576" tIns="18288" bIns="18288" anchor="t">
+          <a:bodyPr wrap="square" lIns="36576" tIns="18288" rIns="36576" bIns="18288" anchor="t">
             <a:spAutoFit/>
           </a:bodyPr>
           <a:lstStyle/>
@@ -8416,7 +8210,7 @@
           <a:noFill/>
         </p:spPr>
         <p:txBody>
-          <a:bodyPr wrap="square" lIns="36576" rIns="36576" tIns="18288" bIns="18288" anchor="t">
+          <a:bodyPr wrap="square" lIns="36576" tIns="18288" rIns="36576" bIns="18288" anchor="t">
             <a:spAutoFit/>
           </a:bodyPr>
           <a:lstStyle/>
@@ -8477,7 +8271,9 @@
         <p:txBody>
           <a:bodyPr rtlCol="0" anchor="ctr"/>
           <a:lstStyle/>
-          <a:p/>
+          <a:p>
+            <a:endParaRPr/>
+          </a:p>
         </p:txBody>
       </p:sp>
       <p:sp>
@@ -8519,7 +8315,9 @@
         <p:txBody>
           <a:bodyPr rtlCol="0" anchor="ctr"/>
           <a:lstStyle/>
-          <a:p/>
+          <a:p>
+            <a:endParaRPr/>
+          </a:p>
         </p:txBody>
       </p:sp>
       <p:sp>
@@ -8539,7 +8337,7 @@
           <a:noFill/>
         </p:spPr>
         <p:txBody>
-          <a:bodyPr wrap="square" lIns="36576" rIns="36576" tIns="18288" bIns="18288" anchor="t">
+          <a:bodyPr wrap="square" lIns="36576" tIns="18288" rIns="36576" bIns="18288" anchor="t">
             <a:spAutoFit/>
           </a:bodyPr>
           <a:lstStyle/>
@@ -8574,7 +8372,7 @@
           <a:noFill/>
         </p:spPr>
         <p:txBody>
-          <a:bodyPr wrap="square" lIns="36576" rIns="36576" tIns="18288" bIns="18288" anchor="t">
+          <a:bodyPr wrap="square" lIns="36576" tIns="18288" rIns="36576" bIns="18288" anchor="t">
             <a:spAutoFit/>
           </a:bodyPr>
           <a:lstStyle/>
@@ -8609,7 +8407,7 @@
           <a:noFill/>
         </p:spPr>
         <p:txBody>
-          <a:bodyPr wrap="square" lIns="36576" rIns="36576" tIns="18288" bIns="18288" anchor="t">
+          <a:bodyPr wrap="square" lIns="36576" tIns="18288" rIns="36576" bIns="18288" anchor="t">
             <a:spAutoFit/>
           </a:bodyPr>
           <a:lstStyle/>
@@ -8668,7 +8466,9 @@
         <p:txBody>
           <a:bodyPr rtlCol="0" anchor="ctr"/>
           <a:lstStyle/>
-          <a:p/>
+          <a:p>
+            <a:endParaRPr/>
+          </a:p>
         </p:txBody>
       </p:sp>
       <p:sp>
@@ -8688,7 +8488,7 @@
           <a:noFill/>
         </p:spPr>
         <p:txBody>
-          <a:bodyPr wrap="square" lIns="36576" rIns="36576" tIns="18288" bIns="18288" anchor="ctr">
+          <a:bodyPr wrap="square" lIns="36576" tIns="18288" rIns="36576" bIns="18288" anchor="ctr">
             <a:spAutoFit/>
           </a:bodyPr>
           <a:lstStyle/>
@@ -8747,7 +8547,9 @@
         <p:txBody>
           <a:bodyPr rtlCol="0" anchor="ctr"/>
           <a:lstStyle/>
-          <a:p/>
+          <a:p>
+            <a:endParaRPr/>
+          </a:p>
         </p:txBody>
       </p:sp>
       <p:sp>
@@ -8767,7 +8569,7 @@
           <a:noFill/>
         </p:spPr>
         <p:txBody>
-          <a:bodyPr wrap="square" lIns="36576" rIns="36576" tIns="18288" bIns="18288" anchor="ctr">
+          <a:bodyPr wrap="square" lIns="36576" tIns="18288" rIns="36576" bIns="18288" anchor="ctr">
             <a:spAutoFit/>
           </a:bodyPr>
           <a:lstStyle/>
@@ -8826,7 +8628,9 @@
         <p:txBody>
           <a:bodyPr rtlCol="0" anchor="ctr"/>
           <a:lstStyle/>
-          <a:p/>
+          <a:p>
+            <a:endParaRPr/>
+          </a:p>
         </p:txBody>
       </p:sp>
       <p:sp>
@@ -8846,7 +8650,7 @@
           <a:noFill/>
         </p:spPr>
         <p:txBody>
-          <a:bodyPr wrap="square" lIns="36576" rIns="36576" tIns="18288" bIns="18288" anchor="ctr">
+          <a:bodyPr wrap="square" lIns="36576" tIns="18288" rIns="36576" bIns="18288" anchor="ctr">
             <a:spAutoFit/>
           </a:bodyPr>
           <a:lstStyle/>
@@ -8905,7 +8709,9 @@
         <p:txBody>
           <a:bodyPr rtlCol="0" anchor="ctr"/>
           <a:lstStyle/>
-          <a:p/>
+          <a:p>
+            <a:endParaRPr/>
+          </a:p>
         </p:txBody>
       </p:sp>
       <p:sp>
@@ -8925,7 +8731,7 @@
           <a:noFill/>
         </p:spPr>
         <p:txBody>
-          <a:bodyPr wrap="square" lIns="36576" rIns="36576" tIns="18288" bIns="18288" anchor="ctr">
+          <a:bodyPr wrap="square" lIns="36576" tIns="18288" rIns="36576" bIns="18288" anchor="ctr">
             <a:spAutoFit/>
           </a:bodyPr>
           <a:lstStyle/>
@@ -8984,7 +8790,9 @@
         <p:txBody>
           <a:bodyPr rtlCol="0" anchor="ctr"/>
           <a:lstStyle/>
-          <a:p/>
+          <a:p>
+            <a:endParaRPr/>
+          </a:p>
         </p:txBody>
       </p:sp>
       <p:sp>
@@ -9004,7 +8812,7 @@
           <a:noFill/>
         </p:spPr>
         <p:txBody>
-          <a:bodyPr wrap="square" lIns="36576" rIns="36576" tIns="18288" bIns="18288" anchor="ctr">
+          <a:bodyPr wrap="square" lIns="36576" tIns="18288" rIns="36576" bIns="18288" anchor="ctr">
             <a:spAutoFit/>
           </a:bodyPr>
           <a:lstStyle/>
@@ -9063,7 +8871,9 @@
         <p:txBody>
           <a:bodyPr rtlCol="0" anchor="ctr"/>
           <a:lstStyle/>
-          <a:p/>
+          <a:p>
+            <a:endParaRPr/>
+          </a:p>
         </p:txBody>
       </p:sp>
       <p:sp>
@@ -9083,7 +8893,7 @@
           <a:noFill/>
         </p:spPr>
         <p:txBody>
-          <a:bodyPr wrap="square" lIns="36576" rIns="36576" tIns="18288" bIns="18288" anchor="ctr">
+          <a:bodyPr wrap="square" lIns="36576" tIns="18288" rIns="36576" bIns="18288" anchor="ctr">
             <a:spAutoFit/>
           </a:bodyPr>
           <a:lstStyle/>
@@ -9118,7 +8928,7 @@
           <a:noFill/>
         </p:spPr>
         <p:txBody>
-          <a:bodyPr wrap="square" lIns="36576" rIns="36576" tIns="18288" bIns="18288" anchor="t">
+          <a:bodyPr wrap="square" lIns="36576" tIns="18288" rIns="36576" bIns="18288" anchor="t">
             <a:spAutoFit/>
           </a:bodyPr>
           <a:lstStyle/>
@@ -9153,7 +8963,7 @@
           <a:noFill/>
         </p:spPr>
         <p:txBody>
-          <a:bodyPr wrap="square" lIns="36576" rIns="36576" tIns="18288" bIns="18288" anchor="t">
+          <a:bodyPr wrap="square" lIns="36576" tIns="18288" rIns="36576" bIns="18288" anchor="t">
             <a:spAutoFit/>
           </a:bodyPr>
           <a:lstStyle/>
@@ -9188,7 +8998,7 @@
           <a:noFill/>
         </p:spPr>
         <p:txBody>
-          <a:bodyPr wrap="square" lIns="36576" rIns="36576" tIns="18288" bIns="18288" anchor="t">
+          <a:bodyPr wrap="square" lIns="36576" tIns="18288" rIns="36576" bIns="18288" anchor="t">
             <a:spAutoFit/>
           </a:bodyPr>
           <a:lstStyle/>
@@ -9215,7 +9025,7 @@
 </file>
 
 <file path=ppt/slides/slide3.xml><?xml version="1.0" encoding="utf-8"?>
-<p:sld xmlns:a="http://schemas.openxmlformats.org/drawingml/2006/main" xmlns:p="http://schemas.openxmlformats.org/presentationml/2006/main" xmlns:r="http://schemas.openxmlformats.org/officeDocument/2006/relationships">
+<p:sld xmlns:a="http://schemas.openxmlformats.org/drawingml/2006/main" xmlns:r="http://schemas.openxmlformats.org/officeDocument/2006/relationships" xmlns:p="http://schemas.openxmlformats.org/presentationml/2006/main">
   <p:cSld>
     <p:bg>
       <p:bgPr>
@@ -9231,7 +9041,14 @@
         <p:cNvGrpSpPr/>
         <p:nvPr/>
       </p:nvGrpSpPr>
-      <p:grpSpPr/>
+      <p:grpSpPr>
+        <a:xfrm>
+          <a:off x="0" y="0"/>
+          <a:ext cx="0" cy="0"/>
+          <a:chOff x="0" y="0"/>
+          <a:chExt cx="0" cy="0"/>
+        </a:xfrm>
+      </p:grpSpPr>
       <p:sp>
         <p:nvSpPr>
           <p:cNvPr id="2" name="TextBox 1"/>
@@ -9249,7 +9066,7 @@
           <a:noFill/>
         </p:spPr>
         <p:txBody>
-          <a:bodyPr wrap="square" lIns="36576" rIns="36576" tIns="18288" bIns="18288" anchor="t">
+          <a:bodyPr wrap="square" lIns="36576" tIns="18288" rIns="36576" bIns="18288" anchor="t">
             <a:spAutoFit/>
           </a:bodyPr>
           <a:lstStyle/>
@@ -9284,7 +9101,7 @@
           <a:noFill/>
         </p:spPr>
         <p:txBody>
-          <a:bodyPr wrap="square" lIns="36576" rIns="36576" tIns="18288" bIns="18288" anchor="t">
+          <a:bodyPr wrap="square" lIns="36576" tIns="18288" rIns="36576" bIns="18288" anchor="t">
             <a:spAutoFit/>
           </a:bodyPr>
           <a:lstStyle/>
@@ -9341,7 +9158,9 @@
         <p:txBody>
           <a:bodyPr rtlCol="0" anchor="ctr"/>
           <a:lstStyle/>
-          <a:p/>
+          <a:p>
+            <a:endParaRPr/>
+          </a:p>
         </p:txBody>
       </p:sp>
       <p:sp>
@@ -9387,7 +9206,9 @@
         <p:txBody>
           <a:bodyPr rtlCol="0" anchor="ctr"/>
           <a:lstStyle/>
-          <a:p/>
+          <a:p>
+            <a:endParaRPr/>
+          </a:p>
         </p:txBody>
       </p:sp>
       <p:sp>
@@ -9407,7 +9228,7 @@
           <a:noFill/>
         </p:spPr>
         <p:txBody>
-          <a:bodyPr wrap="square" lIns="36576" rIns="36576" tIns="18288" bIns="18288" anchor="t">
+          <a:bodyPr wrap="square" lIns="36576" tIns="18288" rIns="36576" bIns="18288" anchor="t">
             <a:spAutoFit/>
           </a:bodyPr>
           <a:lstStyle/>
@@ -9442,7 +9263,7 @@
           <a:noFill/>
         </p:spPr>
         <p:txBody>
-          <a:bodyPr wrap="square" lIns="36576" rIns="36576" tIns="18288" bIns="18288" anchor="t">
+          <a:bodyPr wrap="square" lIns="36576" tIns="18288" rIns="36576" bIns="18288" anchor="t">
             <a:spAutoFit/>
           </a:bodyPr>
           <a:lstStyle/>
@@ -9477,7 +9298,7 @@
           <a:noFill/>
         </p:spPr>
         <p:txBody>
-          <a:bodyPr wrap="square" lIns="36576" rIns="36576" tIns="18288" bIns="18288" anchor="t">
+          <a:bodyPr wrap="square" lIns="36576" tIns="18288" rIns="36576" bIns="18288" anchor="t">
             <a:spAutoFit/>
           </a:bodyPr>
           <a:lstStyle/>
@@ -9536,7 +9357,9 @@
         <p:txBody>
           <a:bodyPr rtlCol="0" anchor="ctr"/>
           <a:lstStyle/>
-          <a:p/>
+          <a:p>
+            <a:endParaRPr/>
+          </a:p>
         </p:txBody>
       </p:sp>
       <p:sp>
@@ -9556,7 +9379,7 @@
           <a:noFill/>
         </p:spPr>
         <p:txBody>
-          <a:bodyPr wrap="square" lIns="36576" rIns="36576" tIns="18288" bIns="18288" anchor="ctr">
+          <a:bodyPr wrap="square" lIns="36576" tIns="18288" rIns="36576" bIns="18288" anchor="ctr">
             <a:spAutoFit/>
           </a:bodyPr>
           <a:lstStyle/>
@@ -9617,7 +9440,9 @@
         <p:txBody>
           <a:bodyPr rtlCol="0" anchor="ctr"/>
           <a:lstStyle/>
-          <a:p/>
+          <a:p>
+            <a:endParaRPr/>
+          </a:p>
         </p:txBody>
       </p:sp>
       <p:sp>
@@ -9637,7 +9462,7 @@
           <a:noFill/>
         </p:spPr>
         <p:txBody>
-          <a:bodyPr wrap="square" lIns="36576" rIns="36576" tIns="18288" bIns="18288" anchor="t">
+          <a:bodyPr wrap="square" lIns="36576" tIns="18288" rIns="36576" bIns="18288" anchor="t">
             <a:spAutoFit/>
           </a:bodyPr>
           <a:lstStyle/>
@@ -9672,7 +9497,7 @@
           <a:noFill/>
         </p:spPr>
         <p:txBody>
-          <a:bodyPr wrap="square" lIns="36576" rIns="36576" tIns="18288" bIns="18288" anchor="t">
+          <a:bodyPr wrap="square" lIns="36576" tIns="18288" rIns="36576" bIns="18288" anchor="t">
             <a:spAutoFit/>
           </a:bodyPr>
           <a:lstStyle/>
@@ -9707,7 +9532,7 @@
           <a:noFill/>
         </p:spPr>
         <p:txBody>
-          <a:bodyPr wrap="square" lIns="36576" rIns="36576" tIns="18288" bIns="18288" anchor="t">
+          <a:bodyPr wrap="square" lIns="36576" tIns="18288" rIns="36576" bIns="18288" anchor="t">
             <a:spAutoFit/>
           </a:bodyPr>
           <a:lstStyle/>
@@ -9766,7 +9591,9 @@
         <p:txBody>
           <a:bodyPr rtlCol="0" anchor="ctr"/>
           <a:lstStyle/>
-          <a:p/>
+          <a:p>
+            <a:endParaRPr/>
+          </a:p>
         </p:txBody>
       </p:sp>
       <p:sp>
@@ -9786,7 +9613,7 @@
           <a:noFill/>
         </p:spPr>
         <p:txBody>
-          <a:bodyPr wrap="square" lIns="36576" rIns="36576" tIns="18288" bIns="18288" anchor="ctr">
+          <a:bodyPr wrap="square" lIns="36576" tIns="18288" rIns="36576" bIns="18288" anchor="ctr">
             <a:spAutoFit/>
           </a:bodyPr>
           <a:lstStyle/>
@@ -9847,7 +9674,9 @@
         <p:txBody>
           <a:bodyPr rtlCol="0" anchor="ctr"/>
           <a:lstStyle/>
-          <a:p/>
+          <a:p>
+            <a:endParaRPr/>
+          </a:p>
         </p:txBody>
       </p:sp>
       <p:sp>
@@ -9867,7 +9696,7 @@
           <a:noFill/>
         </p:spPr>
         <p:txBody>
-          <a:bodyPr wrap="square" lIns="36576" rIns="36576" tIns="18288" bIns="18288" anchor="t">
+          <a:bodyPr wrap="square" lIns="36576" tIns="18288" rIns="36576" bIns="18288" anchor="t">
             <a:spAutoFit/>
           </a:bodyPr>
           <a:lstStyle/>
@@ -9902,7 +9731,7 @@
           <a:noFill/>
         </p:spPr>
         <p:txBody>
-          <a:bodyPr wrap="square" lIns="36576" rIns="36576" tIns="18288" bIns="18288" anchor="t">
+          <a:bodyPr wrap="square" lIns="36576" tIns="18288" rIns="36576" bIns="18288" anchor="t">
             <a:spAutoFit/>
           </a:bodyPr>
           <a:lstStyle/>
@@ -9937,7 +9766,7 @@
           <a:noFill/>
         </p:spPr>
         <p:txBody>
-          <a:bodyPr wrap="square" lIns="36576" rIns="36576" tIns="18288" bIns="18288" anchor="t">
+          <a:bodyPr wrap="square" lIns="36576" tIns="18288" rIns="36576" bIns="18288" anchor="t">
             <a:spAutoFit/>
           </a:bodyPr>
           <a:lstStyle/>
@@ -9996,7 +9825,9 @@
         <p:txBody>
           <a:bodyPr rtlCol="0" anchor="ctr"/>
           <a:lstStyle/>
-          <a:p/>
+          <a:p>
+            <a:endParaRPr/>
+          </a:p>
         </p:txBody>
       </p:sp>
       <p:sp>
@@ -10016,7 +9847,7 @@
           <a:noFill/>
         </p:spPr>
         <p:txBody>
-          <a:bodyPr wrap="square" lIns="36576" rIns="36576" tIns="18288" bIns="18288" anchor="ctr">
+          <a:bodyPr wrap="square" lIns="36576" tIns="18288" rIns="36576" bIns="18288" anchor="ctr">
             <a:spAutoFit/>
           </a:bodyPr>
           <a:lstStyle/>
@@ -10077,7 +9908,9 @@
         <p:txBody>
           <a:bodyPr rtlCol="0" anchor="ctr"/>
           <a:lstStyle/>
-          <a:p/>
+          <a:p>
+            <a:endParaRPr/>
+          </a:p>
         </p:txBody>
       </p:sp>
       <p:sp>
@@ -10097,7 +9930,7 @@
           <a:noFill/>
         </p:spPr>
         <p:txBody>
-          <a:bodyPr wrap="square" lIns="36576" rIns="36576" tIns="18288" bIns="18288" anchor="t">
+          <a:bodyPr wrap="square" lIns="36576" tIns="18288" rIns="36576" bIns="18288" anchor="t">
             <a:spAutoFit/>
           </a:bodyPr>
           <a:lstStyle/>
@@ -10154,7 +9987,9 @@
         <p:txBody>
           <a:bodyPr rtlCol="0" anchor="ctr"/>
           <a:lstStyle/>
-          <a:p/>
+          <a:p>
+            <a:endParaRPr/>
+          </a:p>
         </p:txBody>
       </p:sp>
       <p:sp>
@@ -10174,7 +10009,7 @@
           <a:noFill/>
         </p:spPr>
         <p:txBody>
-          <a:bodyPr wrap="square" lIns="36576" rIns="36576" tIns="18288" bIns="18288" anchor="t">
+          <a:bodyPr wrap="square" lIns="36576" tIns="18288" rIns="36576" bIns="18288" anchor="t">
             <a:spAutoFit/>
           </a:bodyPr>
           <a:lstStyle/>
@@ -10243,7 +10078,9 @@
         <p:txBody>
           <a:bodyPr rtlCol="0" anchor="ctr"/>
           <a:lstStyle/>
-          <a:p/>
+          <a:p>
+            <a:endParaRPr/>
+          </a:p>
         </p:txBody>
       </p:sp>
       <p:sp>
@@ -10263,7 +10100,7 @@
           <a:noFill/>
         </p:spPr>
         <p:txBody>
-          <a:bodyPr wrap="square" lIns="36576" rIns="36576" tIns="18288" bIns="18288" anchor="t">
+          <a:bodyPr wrap="square" lIns="36576" tIns="18288" rIns="36576" bIns="18288" anchor="t">
             <a:spAutoFit/>
           </a:bodyPr>
           <a:lstStyle/>
@@ -10332,7 +10169,9 @@
         <p:txBody>
           <a:bodyPr rtlCol="0" anchor="ctr"/>
           <a:lstStyle/>
-          <a:p/>
+          <a:p>
+            <a:endParaRPr/>
+          </a:p>
         </p:txBody>
       </p:sp>
       <p:sp>
@@ -10352,7 +10191,7 @@
           <a:noFill/>
         </p:spPr>
         <p:txBody>
-          <a:bodyPr wrap="square" lIns="36576" rIns="36576" tIns="18288" bIns="18288" anchor="t">
+          <a:bodyPr wrap="square" lIns="36576" tIns="18288" rIns="36576" bIns="18288" anchor="t">
             <a:spAutoFit/>
           </a:bodyPr>
           <a:lstStyle/>
@@ -10399,7 +10238,7 @@
           <a:noFill/>
         </p:spPr>
         <p:txBody>
-          <a:bodyPr wrap="square" lIns="36576" rIns="36576" tIns="18288" bIns="18288" anchor="t">
+          <a:bodyPr wrap="square" lIns="36576" tIns="18288" rIns="36576" bIns="18288" anchor="t">
             <a:spAutoFit/>
           </a:bodyPr>
           <a:lstStyle/>
@@ -10434,7 +10273,7 @@
           <a:noFill/>
         </p:spPr>
         <p:txBody>
-          <a:bodyPr wrap="square" lIns="36576" rIns="36576" tIns="18288" bIns="18288" anchor="t">
+          <a:bodyPr wrap="square" lIns="36576" tIns="18288" rIns="36576" bIns="18288" anchor="t">
             <a:spAutoFit/>
           </a:bodyPr>
           <a:lstStyle/>
@@ -10461,7 +10300,7 @@
 </file>
 
 <file path=ppt/slides/slide4.xml><?xml version="1.0" encoding="utf-8"?>
-<p:sld xmlns:a="http://schemas.openxmlformats.org/drawingml/2006/main" xmlns:p="http://schemas.openxmlformats.org/presentationml/2006/main" xmlns:r="http://schemas.openxmlformats.org/officeDocument/2006/relationships">
+<p:sld xmlns:a="http://schemas.openxmlformats.org/drawingml/2006/main" xmlns:r="http://schemas.openxmlformats.org/officeDocument/2006/relationships" xmlns:p="http://schemas.openxmlformats.org/presentationml/2006/main">
   <p:cSld>
     <p:bg>
       <p:bgPr>
@@ -10477,7 +10316,14 @@
         <p:cNvGrpSpPr/>
         <p:nvPr/>
       </p:nvGrpSpPr>
-      <p:grpSpPr/>
+      <p:grpSpPr>
+        <a:xfrm>
+          <a:off x="0" y="0"/>
+          <a:ext cx="0" cy="0"/>
+          <a:chOff x="0" y="0"/>
+          <a:chExt cx="0" cy="0"/>
+        </a:xfrm>
+      </p:grpSpPr>
       <p:sp>
         <p:nvSpPr>
           <p:cNvPr id="2" name="TextBox 1"/>
@@ -10495,7 +10341,7 @@
           <a:noFill/>
         </p:spPr>
         <p:txBody>
-          <a:bodyPr wrap="square" lIns="36576" rIns="36576" tIns="18288" bIns="18288" anchor="t">
+          <a:bodyPr wrap="square" lIns="36576" tIns="18288" rIns="36576" bIns="18288" anchor="t">
             <a:spAutoFit/>
           </a:bodyPr>
           <a:lstStyle/>
@@ -10530,7 +10376,7 @@
           <a:noFill/>
         </p:spPr>
         <p:txBody>
-          <a:bodyPr wrap="square" lIns="36576" rIns="36576" tIns="18288" bIns="18288" anchor="t">
+          <a:bodyPr wrap="square" lIns="36576" tIns="18288" rIns="36576" bIns="18288" anchor="t">
             <a:spAutoFit/>
           </a:bodyPr>
           <a:lstStyle/>
@@ -10587,7 +10433,9 @@
         <p:txBody>
           <a:bodyPr rtlCol="0" anchor="ctr"/>
           <a:lstStyle/>
-          <a:p/>
+          <a:p>
+            <a:endParaRPr/>
+          </a:p>
         </p:txBody>
       </p:sp>
       <p:sp>
@@ -10633,7 +10481,9 @@
         <p:txBody>
           <a:bodyPr rtlCol="0" anchor="ctr"/>
           <a:lstStyle/>
-          <a:p/>
+          <a:p>
+            <a:endParaRPr/>
+          </a:p>
         </p:txBody>
       </p:sp>
       <p:sp>
@@ -10653,7 +10503,7 @@
           <a:noFill/>
         </p:spPr>
         <p:txBody>
-          <a:bodyPr wrap="square" lIns="36576" rIns="36576" tIns="18288" bIns="18288" anchor="ctr">
+          <a:bodyPr wrap="square" lIns="36576" tIns="18288" rIns="36576" bIns="18288" anchor="ctr">
             <a:spAutoFit/>
           </a:bodyPr>
           <a:lstStyle/>
@@ -10726,7 +10576,9 @@
         <p:txBody>
           <a:bodyPr rtlCol="0" anchor="ctr"/>
           <a:lstStyle/>
-          <a:p/>
+          <a:p>
+            <a:endParaRPr/>
+          </a:p>
         </p:txBody>
       </p:sp>
       <p:sp>
@@ -10746,7 +10598,7 @@
           <a:noFill/>
         </p:spPr>
         <p:txBody>
-          <a:bodyPr wrap="square" lIns="36576" rIns="36576" tIns="18288" bIns="18288" anchor="ctr">
+          <a:bodyPr wrap="square" lIns="36576" tIns="18288" rIns="36576" bIns="18288" anchor="ctr">
             <a:spAutoFit/>
           </a:bodyPr>
           <a:lstStyle/>
@@ -10819,7 +10671,9 @@
         <p:txBody>
           <a:bodyPr rtlCol="0" anchor="ctr"/>
           <a:lstStyle/>
-          <a:p/>
+          <a:p>
+            <a:endParaRPr/>
+          </a:p>
         </p:txBody>
       </p:sp>
       <p:sp>
@@ -10839,7 +10693,7 @@
           <a:noFill/>
         </p:spPr>
         <p:txBody>
-          <a:bodyPr wrap="square" lIns="36576" rIns="36576" tIns="18288" bIns="18288" anchor="ctr">
+          <a:bodyPr wrap="square" lIns="36576" tIns="18288" rIns="36576" bIns="18288" anchor="ctr">
             <a:spAutoFit/>
           </a:bodyPr>
           <a:lstStyle/>
@@ -10912,7 +10766,9 @@
         <p:txBody>
           <a:bodyPr rtlCol="0" anchor="ctr"/>
           <a:lstStyle/>
-          <a:p/>
+          <a:p>
+            <a:endParaRPr/>
+          </a:p>
         </p:txBody>
       </p:sp>
       <p:sp>
@@ -10932,7 +10788,7 @@
           <a:noFill/>
         </p:spPr>
         <p:txBody>
-          <a:bodyPr wrap="square" lIns="36576" rIns="36576" tIns="18288" bIns="18288" anchor="ctr">
+          <a:bodyPr wrap="square" lIns="36576" tIns="18288" rIns="36576" bIns="18288" anchor="ctr">
             <a:spAutoFit/>
           </a:bodyPr>
           <a:lstStyle/>
@@ -11005,7 +10861,9 @@
         <p:txBody>
           <a:bodyPr rtlCol="0" anchor="ctr"/>
           <a:lstStyle/>
-          <a:p/>
+          <a:p>
+            <a:endParaRPr/>
+          </a:p>
         </p:txBody>
       </p:sp>
       <p:sp>
@@ -11025,7 +10883,7 @@
           <a:noFill/>
         </p:spPr>
         <p:txBody>
-          <a:bodyPr wrap="square" lIns="36576" rIns="36576" tIns="18288" bIns="18288" anchor="ctr">
+          <a:bodyPr wrap="square" lIns="36576" tIns="18288" rIns="36576" bIns="18288" anchor="ctr">
             <a:spAutoFit/>
           </a:bodyPr>
           <a:lstStyle/>
@@ -11278,7 +11136,9 @@
         <p:txBody>
           <a:bodyPr rtlCol="0" anchor="ctr"/>
           <a:lstStyle/>
-          <a:p/>
+          <a:p>
+            <a:endParaRPr/>
+          </a:p>
         </p:txBody>
       </p:sp>
       <p:sp>
@@ -11298,7 +11158,7 @@
           <a:noFill/>
         </p:spPr>
         <p:txBody>
-          <a:bodyPr wrap="square" lIns="36576" rIns="36576" tIns="18288" bIns="18288" anchor="ctr">
+          <a:bodyPr wrap="square" lIns="36576" tIns="18288" rIns="36576" bIns="18288" anchor="ctr">
             <a:spAutoFit/>
           </a:bodyPr>
           <a:lstStyle/>
@@ -11371,7 +11231,9 @@
         <p:txBody>
           <a:bodyPr rtlCol="0" anchor="ctr"/>
           <a:lstStyle/>
-          <a:p/>
+          <a:p>
+            <a:endParaRPr/>
+          </a:p>
         </p:txBody>
       </p:sp>
       <p:sp>
@@ -11391,7 +11253,7 @@
           <a:noFill/>
         </p:spPr>
         <p:txBody>
-          <a:bodyPr wrap="square" lIns="36576" rIns="36576" tIns="18288" bIns="18288" anchor="ctr">
+          <a:bodyPr wrap="square" lIns="36576" tIns="18288" rIns="36576" bIns="18288" anchor="ctr">
             <a:spAutoFit/>
           </a:bodyPr>
           <a:lstStyle/>
@@ -11536,7 +11398,9 @@
         <p:txBody>
           <a:bodyPr rtlCol="0" anchor="ctr"/>
           <a:lstStyle/>
-          <a:p/>
+          <a:p>
+            <a:endParaRPr/>
+          </a:p>
         </p:txBody>
       </p:sp>
       <p:sp>
@@ -11556,7 +11420,7 @@
           <a:noFill/>
         </p:spPr>
         <p:txBody>
-          <a:bodyPr wrap="square" lIns="36576" rIns="36576" tIns="18288" bIns="18288" anchor="ctr">
+          <a:bodyPr wrap="square" lIns="36576" tIns="18288" rIns="36576" bIns="18288" anchor="ctr">
             <a:spAutoFit/>
           </a:bodyPr>
           <a:lstStyle/>
@@ -11629,7 +11493,9 @@
         <p:txBody>
           <a:bodyPr rtlCol="0" anchor="ctr"/>
           <a:lstStyle/>
-          <a:p/>
+          <a:p>
+            <a:endParaRPr/>
+          </a:p>
         </p:txBody>
       </p:sp>
       <p:sp>
@@ -11649,7 +11515,7 @@
           <a:noFill/>
         </p:spPr>
         <p:txBody>
-          <a:bodyPr wrap="square" lIns="36576" rIns="36576" tIns="18288" bIns="18288" anchor="ctr">
+          <a:bodyPr wrap="square" lIns="36576" tIns="18288" rIns="36576" bIns="18288" anchor="ctr">
             <a:spAutoFit/>
           </a:bodyPr>
           <a:lstStyle/>
@@ -11722,7 +11588,9 @@
         <p:txBody>
           <a:bodyPr rtlCol="0" anchor="ctr"/>
           <a:lstStyle/>
-          <a:p/>
+          <a:p>
+            <a:endParaRPr/>
+          </a:p>
         </p:txBody>
       </p:sp>
       <p:sp>
@@ -11742,7 +11610,7 @@
           <a:noFill/>
         </p:spPr>
         <p:txBody>
-          <a:bodyPr wrap="square" lIns="36576" rIns="36576" tIns="18288" bIns="18288" anchor="ctr">
+          <a:bodyPr wrap="square" lIns="36576" tIns="18288" rIns="36576" bIns="18288" anchor="ctr">
             <a:spAutoFit/>
           </a:bodyPr>
           <a:lstStyle/>
@@ -11922,7 +11790,7 @@
           <a:noFill/>
         </p:spPr>
         <p:txBody>
-          <a:bodyPr wrap="square" lIns="36576" rIns="36576" tIns="18288" bIns="18288" anchor="t">
+          <a:bodyPr wrap="square" lIns="36576" tIns="18288" rIns="36576" bIns="18288" anchor="t">
             <a:spAutoFit/>
           </a:bodyPr>
           <a:lstStyle/>
@@ -11957,7 +11825,7 @@
           <a:noFill/>
         </p:spPr>
         <p:txBody>
-          <a:bodyPr wrap="square" lIns="36576" rIns="36576" tIns="18288" bIns="18288" anchor="t">
+          <a:bodyPr wrap="square" lIns="36576" tIns="18288" rIns="36576" bIns="18288" anchor="t">
             <a:spAutoFit/>
           </a:bodyPr>
           <a:lstStyle/>
@@ -11992,7 +11860,7 @@
           <a:noFill/>
         </p:spPr>
         <p:txBody>
-          <a:bodyPr wrap="square" lIns="36576" rIns="36576" tIns="18288" bIns="18288" anchor="t">
+          <a:bodyPr wrap="square" lIns="36576" tIns="18288" rIns="36576" bIns="18288" anchor="t">
             <a:spAutoFit/>
           </a:bodyPr>
           <a:lstStyle/>
@@ -12027,7 +11895,7 @@
           <a:noFill/>
         </p:spPr>
         <p:txBody>
-          <a:bodyPr wrap="square" lIns="36576" rIns="36576" tIns="18288" bIns="18288" anchor="t">
+          <a:bodyPr wrap="square" lIns="36576" tIns="18288" rIns="36576" bIns="18288" anchor="t">
             <a:spAutoFit/>
           </a:bodyPr>
           <a:lstStyle/>
@@ -12062,7 +11930,7 @@
           <a:noFill/>
         </p:spPr>
         <p:txBody>
-          <a:bodyPr wrap="square" lIns="36576" rIns="36576" tIns="18288" bIns="18288" anchor="t">
+          <a:bodyPr wrap="square" lIns="36576" tIns="18288" rIns="36576" bIns="18288" anchor="t">
             <a:spAutoFit/>
           </a:bodyPr>
           <a:lstStyle/>
@@ -12097,7 +11965,7 @@
           <a:noFill/>
         </p:spPr>
         <p:txBody>
-          <a:bodyPr wrap="square" lIns="36576" rIns="36576" tIns="18288" bIns="18288" anchor="t">
+          <a:bodyPr wrap="square" lIns="36576" tIns="18288" rIns="36576" bIns="18288" anchor="t">
             <a:spAutoFit/>
           </a:bodyPr>
           <a:lstStyle/>
@@ -12124,7 +11992,7 @@
 </file>
 
 <file path=ppt/slides/slide5.xml><?xml version="1.0" encoding="utf-8"?>
-<p:sld xmlns:a="http://schemas.openxmlformats.org/drawingml/2006/main" xmlns:p="http://schemas.openxmlformats.org/presentationml/2006/main" xmlns:r="http://schemas.openxmlformats.org/officeDocument/2006/relationships">
+<p:sld xmlns:a="http://schemas.openxmlformats.org/drawingml/2006/main" xmlns:r="http://schemas.openxmlformats.org/officeDocument/2006/relationships" xmlns:p="http://schemas.openxmlformats.org/presentationml/2006/main">
   <p:cSld>
     <p:bg>
       <p:bgPr>
@@ -12140,7 +12008,14 @@
         <p:cNvGrpSpPr/>
         <p:nvPr/>
       </p:nvGrpSpPr>
-      <p:grpSpPr/>
+      <p:grpSpPr>
+        <a:xfrm>
+          <a:off x="0" y="0"/>
+          <a:ext cx="0" cy="0"/>
+          <a:chOff x="0" y="0"/>
+          <a:chExt cx="0" cy="0"/>
+        </a:xfrm>
+      </p:grpSpPr>
       <p:sp>
         <p:nvSpPr>
           <p:cNvPr id="2" name="TextBox 1"/>
@@ -12158,7 +12033,7 @@
           <a:noFill/>
         </p:spPr>
         <p:txBody>
-          <a:bodyPr wrap="square" lIns="36576" rIns="36576" tIns="18288" bIns="18288" anchor="t">
+          <a:bodyPr wrap="square" lIns="36576" tIns="18288" rIns="36576" bIns="18288" anchor="t">
             <a:spAutoFit/>
           </a:bodyPr>
           <a:lstStyle/>
@@ -12193,7 +12068,7 @@
           <a:noFill/>
         </p:spPr>
         <p:txBody>
-          <a:bodyPr wrap="square" lIns="36576" rIns="36576" tIns="18288" bIns="18288" anchor="t">
+          <a:bodyPr wrap="square" lIns="36576" tIns="18288" rIns="36576" bIns="18288" anchor="t">
             <a:spAutoFit/>
           </a:bodyPr>
           <a:lstStyle/>
@@ -12250,7 +12125,9 @@
         <p:txBody>
           <a:bodyPr rtlCol="0" anchor="ctr"/>
           <a:lstStyle/>
-          <a:p/>
+          <a:p>
+            <a:endParaRPr/>
+          </a:p>
         </p:txBody>
       </p:sp>
       <p:sp>
@@ -12270,7 +12147,7 @@
           <a:noFill/>
         </p:spPr>
         <p:txBody>
-          <a:bodyPr wrap="square" lIns="36576" rIns="36576" tIns="18288" bIns="18288" anchor="t">
+          <a:bodyPr wrap="square" lIns="36576" tIns="18288" rIns="36576" bIns="18288" anchor="t">
             <a:spAutoFit/>
           </a:bodyPr>
           <a:lstStyle/>
@@ -12331,7 +12208,9 @@
         <p:txBody>
           <a:bodyPr rtlCol="0" anchor="ctr"/>
           <a:lstStyle/>
-          <a:p/>
+          <a:p>
+            <a:endParaRPr/>
+          </a:p>
         </p:txBody>
       </p:sp>
       <p:sp>
@@ -12351,7 +12230,7 @@
           <a:noFill/>
         </p:spPr>
         <p:txBody>
-          <a:bodyPr wrap="square" lIns="36576" rIns="36576" tIns="18288" bIns="18288" anchor="t">
+          <a:bodyPr wrap="square" lIns="36576" tIns="18288" rIns="36576" bIns="18288" anchor="t">
             <a:spAutoFit/>
           </a:bodyPr>
           <a:lstStyle/>
@@ -12386,7 +12265,7 @@
           <a:noFill/>
         </p:spPr>
         <p:txBody>
-          <a:bodyPr wrap="square" lIns="36576" rIns="36576" tIns="18288" bIns="18288" anchor="t">
+          <a:bodyPr wrap="square" lIns="36576" tIns="18288" rIns="36576" bIns="18288" anchor="t">
             <a:spAutoFit/>
           </a:bodyPr>
           <a:lstStyle/>
@@ -12421,7 +12300,7 @@
           <a:noFill/>
         </p:spPr>
         <p:txBody>
-          <a:bodyPr wrap="square" lIns="36576" rIns="36576" tIns="18288" bIns="18288" anchor="t">
+          <a:bodyPr wrap="square" lIns="36576" tIns="18288" rIns="36576" bIns="18288" anchor="t">
             <a:spAutoFit/>
           </a:bodyPr>
           <a:lstStyle/>
@@ -12518,7 +12397,9 @@
         <p:txBody>
           <a:bodyPr rtlCol="0" anchor="ctr"/>
           <a:lstStyle/>
-          <a:p/>
+          <a:p>
+            <a:endParaRPr/>
+          </a:p>
         </p:txBody>
       </p:sp>
       <p:sp>
@@ -12538,7 +12419,7 @@
           <a:noFill/>
         </p:spPr>
         <p:txBody>
-          <a:bodyPr wrap="square" lIns="36576" rIns="36576" tIns="18288" bIns="18288" anchor="t">
+          <a:bodyPr wrap="square" lIns="36576" tIns="18288" rIns="36576" bIns="18288" anchor="t">
             <a:spAutoFit/>
           </a:bodyPr>
           <a:lstStyle/>
@@ -12573,7 +12454,7 @@
           <a:noFill/>
         </p:spPr>
         <p:txBody>
-          <a:bodyPr wrap="square" lIns="36576" rIns="36576" tIns="18288" bIns="18288" anchor="t">
+          <a:bodyPr wrap="square" lIns="36576" tIns="18288" rIns="36576" bIns="18288" anchor="t">
             <a:spAutoFit/>
           </a:bodyPr>
           <a:lstStyle/>
@@ -12608,7 +12489,7 @@
           <a:noFill/>
         </p:spPr>
         <p:txBody>
-          <a:bodyPr wrap="square" lIns="36576" rIns="36576" tIns="18288" bIns="18288" anchor="t">
+          <a:bodyPr wrap="square" lIns="36576" tIns="18288" rIns="36576" bIns="18288" anchor="t">
             <a:spAutoFit/>
           </a:bodyPr>
           <a:lstStyle/>
@@ -12705,7 +12586,9 @@
         <p:txBody>
           <a:bodyPr rtlCol="0" anchor="ctr"/>
           <a:lstStyle/>
-          <a:p/>
+          <a:p>
+            <a:endParaRPr/>
+          </a:p>
         </p:txBody>
       </p:sp>
       <p:sp>
@@ -12725,7 +12608,7 @@
           <a:noFill/>
         </p:spPr>
         <p:txBody>
-          <a:bodyPr wrap="square" lIns="36576" rIns="36576" tIns="18288" bIns="18288" anchor="t">
+          <a:bodyPr wrap="square" lIns="36576" tIns="18288" rIns="36576" bIns="18288" anchor="t">
             <a:spAutoFit/>
           </a:bodyPr>
           <a:lstStyle/>
@@ -12760,7 +12643,7 @@
           <a:noFill/>
         </p:spPr>
         <p:txBody>
-          <a:bodyPr wrap="square" lIns="36576" rIns="36576" tIns="18288" bIns="18288" anchor="t">
+          <a:bodyPr wrap="square" lIns="36576" tIns="18288" rIns="36576" bIns="18288" anchor="t">
             <a:spAutoFit/>
           </a:bodyPr>
           <a:lstStyle/>
@@ -12795,7 +12678,7 @@
           <a:noFill/>
         </p:spPr>
         <p:txBody>
-          <a:bodyPr wrap="square" lIns="36576" rIns="36576" tIns="18288" bIns="18288" anchor="t">
+          <a:bodyPr wrap="square" lIns="36576" tIns="18288" rIns="36576" bIns="18288" anchor="t">
             <a:spAutoFit/>
           </a:bodyPr>
           <a:lstStyle/>
@@ -12892,7 +12775,9 @@
         <p:txBody>
           <a:bodyPr rtlCol="0" anchor="ctr"/>
           <a:lstStyle/>
-          <a:p/>
+          <a:p>
+            <a:endParaRPr/>
+          </a:p>
         </p:txBody>
       </p:sp>
       <p:sp>
@@ -12912,7 +12797,7 @@
           <a:noFill/>
         </p:spPr>
         <p:txBody>
-          <a:bodyPr wrap="square" lIns="36576" rIns="36576" tIns="18288" bIns="18288" anchor="t">
+          <a:bodyPr wrap="square" lIns="36576" tIns="18288" rIns="36576" bIns="18288" anchor="t">
             <a:spAutoFit/>
           </a:bodyPr>
           <a:lstStyle/>
@@ -12947,7 +12832,7 @@
           <a:noFill/>
         </p:spPr>
         <p:txBody>
-          <a:bodyPr wrap="square" lIns="36576" rIns="36576" tIns="18288" bIns="18288" anchor="t">
+          <a:bodyPr wrap="square" lIns="36576" tIns="18288" rIns="36576" bIns="18288" anchor="t">
             <a:spAutoFit/>
           </a:bodyPr>
           <a:lstStyle/>
@@ -12982,7 +12867,7 @@
           <a:noFill/>
         </p:spPr>
         <p:txBody>
-          <a:bodyPr wrap="square" lIns="36576" rIns="36576" tIns="18288" bIns="18288" anchor="t">
+          <a:bodyPr wrap="square" lIns="36576" tIns="18288" rIns="36576" bIns="18288" anchor="t">
             <a:spAutoFit/>
           </a:bodyPr>
           <a:lstStyle/>
@@ -13017,7 +12902,7 @@
           <a:noFill/>
         </p:spPr>
         <p:txBody>
-          <a:bodyPr wrap="square" lIns="36576" rIns="36576" tIns="18288" bIns="18288" anchor="t">
+          <a:bodyPr wrap="square" lIns="36576" tIns="18288" rIns="36576" bIns="18288" anchor="t">
             <a:spAutoFit/>
           </a:bodyPr>
           <a:lstStyle/>
@@ -13078,7 +12963,9 @@
         <p:txBody>
           <a:bodyPr rtlCol="0" anchor="ctr"/>
           <a:lstStyle/>
-          <a:p/>
+          <a:p>
+            <a:endParaRPr/>
+          </a:p>
         </p:txBody>
       </p:sp>
       <p:sp>
@@ -13098,7 +12985,7 @@
           <a:noFill/>
         </p:spPr>
         <p:txBody>
-          <a:bodyPr wrap="square" lIns="36576" rIns="36576" tIns="18288" bIns="18288" anchor="t">
+          <a:bodyPr wrap="square" lIns="36576" tIns="18288" rIns="36576" bIns="18288" anchor="t">
             <a:spAutoFit/>
           </a:bodyPr>
           <a:lstStyle/>
@@ -13133,7 +13020,7 @@
           <a:noFill/>
         </p:spPr>
         <p:txBody>
-          <a:bodyPr wrap="square" lIns="36576" rIns="36576" tIns="18288" bIns="18288" anchor="t">
+          <a:bodyPr wrap="square" lIns="36576" tIns="18288" rIns="36576" bIns="18288" anchor="t">
             <a:spAutoFit/>
           </a:bodyPr>
           <a:lstStyle/>
@@ -13168,7 +13055,7 @@
           <a:noFill/>
         </p:spPr>
         <p:txBody>
-          <a:bodyPr wrap="square" lIns="36576" rIns="36576" tIns="18288" bIns="18288" anchor="t">
+          <a:bodyPr wrap="square" lIns="36576" tIns="18288" rIns="36576" bIns="18288" anchor="t">
             <a:spAutoFit/>
           </a:bodyPr>
           <a:lstStyle/>
@@ -13265,7 +13152,9 @@
         <p:txBody>
           <a:bodyPr rtlCol="0" anchor="ctr"/>
           <a:lstStyle/>
-          <a:p/>
+          <a:p>
+            <a:endParaRPr/>
+          </a:p>
         </p:txBody>
       </p:sp>
       <p:sp>
@@ -13285,7 +13174,7 @@
           <a:noFill/>
         </p:spPr>
         <p:txBody>
-          <a:bodyPr wrap="square" lIns="36576" rIns="36576" tIns="18288" bIns="18288" anchor="t">
+          <a:bodyPr wrap="square" lIns="36576" tIns="18288" rIns="36576" bIns="18288" anchor="t">
             <a:spAutoFit/>
           </a:bodyPr>
           <a:lstStyle/>
@@ -13320,7 +13209,7 @@
           <a:noFill/>
         </p:spPr>
         <p:txBody>
-          <a:bodyPr wrap="square" lIns="36576" rIns="36576" tIns="18288" bIns="18288" anchor="t">
+          <a:bodyPr wrap="square" lIns="36576" tIns="18288" rIns="36576" bIns="18288" anchor="t">
             <a:spAutoFit/>
           </a:bodyPr>
           <a:lstStyle/>
@@ -13355,7 +13244,7 @@
           <a:noFill/>
         </p:spPr>
         <p:txBody>
-          <a:bodyPr wrap="square" lIns="36576" rIns="36576" tIns="18288" bIns="18288" anchor="t">
+          <a:bodyPr wrap="square" lIns="36576" tIns="18288" rIns="36576" bIns="18288" anchor="t">
             <a:spAutoFit/>
           </a:bodyPr>
           <a:lstStyle/>
@@ -13452,7 +13341,9 @@
         <p:txBody>
           <a:bodyPr rtlCol="0" anchor="ctr"/>
           <a:lstStyle/>
-          <a:p/>
+          <a:p>
+            <a:endParaRPr/>
+          </a:p>
         </p:txBody>
       </p:sp>
       <p:sp>
@@ -13472,7 +13363,7 @@
           <a:noFill/>
         </p:spPr>
         <p:txBody>
-          <a:bodyPr wrap="square" lIns="36576" rIns="36576" tIns="18288" bIns="18288" anchor="t">
+          <a:bodyPr wrap="square" lIns="36576" tIns="18288" rIns="36576" bIns="18288" anchor="t">
             <a:spAutoFit/>
           </a:bodyPr>
           <a:lstStyle/>
@@ -13507,7 +13398,7 @@
           <a:noFill/>
         </p:spPr>
         <p:txBody>
-          <a:bodyPr wrap="square" lIns="36576" rIns="36576" tIns="18288" bIns="18288" anchor="t">
+          <a:bodyPr wrap="square" lIns="36576" tIns="18288" rIns="36576" bIns="18288" anchor="t">
             <a:spAutoFit/>
           </a:bodyPr>
           <a:lstStyle/>
@@ -13542,7 +13433,7 @@
           <a:noFill/>
         </p:spPr>
         <p:txBody>
-          <a:bodyPr wrap="square" lIns="36576" rIns="36576" tIns="18288" bIns="18288" anchor="t">
+          <a:bodyPr wrap="square" lIns="36576" tIns="18288" rIns="36576" bIns="18288" anchor="t">
             <a:spAutoFit/>
           </a:bodyPr>
           <a:lstStyle/>
@@ -13603,7 +13494,9 @@
         <p:txBody>
           <a:bodyPr rtlCol="0" anchor="ctr"/>
           <a:lstStyle/>
-          <a:p/>
+          <a:p>
+            <a:endParaRPr/>
+          </a:p>
         </p:txBody>
       </p:sp>
       <p:sp>
@@ -13623,7 +13516,7 @@
           <a:noFill/>
         </p:spPr>
         <p:txBody>
-          <a:bodyPr wrap="square" lIns="36576" rIns="36576" tIns="18288" bIns="18288" anchor="t">
+          <a:bodyPr wrap="square" lIns="36576" tIns="18288" rIns="36576" bIns="18288" anchor="t">
             <a:spAutoFit/>
           </a:bodyPr>
           <a:lstStyle/>
@@ -13658,7 +13551,7 @@
           <a:noFill/>
         </p:spPr>
         <p:txBody>
-          <a:bodyPr wrap="square" lIns="36576" rIns="36576" tIns="18288" bIns="18288" anchor="t">
+          <a:bodyPr wrap="square" lIns="36576" tIns="18288" rIns="36576" bIns="18288" anchor="t">
             <a:spAutoFit/>
           </a:bodyPr>
           <a:lstStyle/>
@@ -13693,7 +13586,7 @@
           <a:noFill/>
         </p:spPr>
         <p:txBody>
-          <a:bodyPr wrap="square" lIns="36576" rIns="36576" tIns="18288" bIns="18288" anchor="t">
+          <a:bodyPr wrap="square" lIns="36576" tIns="18288" rIns="36576" bIns="18288" anchor="t">
             <a:spAutoFit/>
           </a:bodyPr>
           <a:lstStyle/>
@@ -13754,7 +13647,9 @@
         <p:txBody>
           <a:bodyPr rtlCol="0" anchor="ctr"/>
           <a:lstStyle/>
-          <a:p/>
+          <a:p>
+            <a:endParaRPr/>
+          </a:p>
         </p:txBody>
       </p:sp>
       <p:sp>
@@ -13774,7 +13669,7 @@
           <a:noFill/>
         </p:spPr>
         <p:txBody>
-          <a:bodyPr wrap="square" lIns="36576" rIns="36576" tIns="18288" bIns="18288" anchor="t">
+          <a:bodyPr wrap="square" lIns="36576" tIns="18288" rIns="36576" bIns="18288" anchor="t">
             <a:spAutoFit/>
           </a:bodyPr>
           <a:lstStyle/>
@@ -13809,7 +13704,7 @@
           <a:noFill/>
         </p:spPr>
         <p:txBody>
-          <a:bodyPr wrap="square" lIns="36576" rIns="36576" tIns="18288" bIns="18288" anchor="t">
+          <a:bodyPr wrap="square" lIns="36576" tIns="18288" rIns="36576" bIns="18288" anchor="t">
             <a:spAutoFit/>
           </a:bodyPr>
           <a:lstStyle/>
@@ -13844,7 +13739,7 @@
           <a:noFill/>
         </p:spPr>
         <p:txBody>
-          <a:bodyPr wrap="square" lIns="36576" rIns="36576" tIns="18288" bIns="18288" anchor="t">
+          <a:bodyPr wrap="square" lIns="36576" tIns="18288" rIns="36576" bIns="18288" anchor="t">
             <a:spAutoFit/>
           </a:bodyPr>
           <a:lstStyle/>
@@ -13879,7 +13774,7 @@
           <a:noFill/>
         </p:spPr>
         <p:txBody>
-          <a:bodyPr wrap="square" lIns="36576" rIns="36576" tIns="18288" bIns="18288" anchor="t">
+          <a:bodyPr wrap="square" lIns="36576" tIns="18288" rIns="36576" bIns="18288" anchor="t">
             <a:spAutoFit/>
           </a:bodyPr>
           <a:lstStyle/>
@@ -13906,7 +13801,7 @@
 </file>
 
 <file path=ppt/slides/slide6.xml><?xml version="1.0" encoding="utf-8"?>
-<p:sld xmlns:a="http://schemas.openxmlformats.org/drawingml/2006/main" xmlns:p="http://schemas.openxmlformats.org/presentationml/2006/main" xmlns:r="http://schemas.openxmlformats.org/officeDocument/2006/relationships">
+<p:sld xmlns:a="http://schemas.openxmlformats.org/drawingml/2006/main" xmlns:r="http://schemas.openxmlformats.org/officeDocument/2006/relationships" xmlns:p="http://schemas.openxmlformats.org/presentationml/2006/main">
   <p:cSld>
     <p:bg>
       <p:bgPr>
@@ -13922,7 +13817,14 @@
         <p:cNvGrpSpPr/>
         <p:nvPr/>
       </p:nvGrpSpPr>
-      <p:grpSpPr/>
+      <p:grpSpPr>
+        <a:xfrm>
+          <a:off x="0" y="0"/>
+          <a:ext cx="0" cy="0"/>
+          <a:chOff x="0" y="0"/>
+          <a:chExt cx="0" cy="0"/>
+        </a:xfrm>
+      </p:grpSpPr>
       <p:sp>
         <p:nvSpPr>
           <p:cNvPr id="2" name="TextBox 1"/>
@@ -13940,7 +13842,7 @@
           <a:noFill/>
         </p:spPr>
         <p:txBody>
-          <a:bodyPr wrap="square" lIns="36576" rIns="36576" tIns="18288" bIns="18288" anchor="t">
+          <a:bodyPr wrap="square" lIns="36576" tIns="18288" rIns="36576" bIns="18288" anchor="t">
             <a:spAutoFit/>
           </a:bodyPr>
           <a:lstStyle/>
@@ -13975,7 +13877,7 @@
           <a:noFill/>
         </p:spPr>
         <p:txBody>
-          <a:bodyPr wrap="square" lIns="36576" rIns="36576" tIns="18288" bIns="18288" anchor="t">
+          <a:bodyPr wrap="square" lIns="36576" tIns="18288" rIns="36576" bIns="18288" anchor="t">
             <a:spAutoFit/>
           </a:bodyPr>
           <a:lstStyle/>
@@ -14032,7 +13934,9 @@
         <p:txBody>
           <a:bodyPr rtlCol="0" anchor="ctr"/>
           <a:lstStyle/>
-          <a:p/>
+          <a:p>
+            <a:endParaRPr/>
+          </a:p>
         </p:txBody>
       </p:sp>
       <p:sp>
@@ -14078,7 +13982,9 @@
         <p:txBody>
           <a:bodyPr rtlCol="0" anchor="ctr"/>
           <a:lstStyle/>
-          <a:p/>
+          <a:p>
+            <a:endParaRPr/>
+          </a:p>
         </p:txBody>
       </p:sp>
       <p:sp>
@@ -14098,7 +14004,7 @@
           <a:noFill/>
         </p:spPr>
         <p:txBody>
-          <a:bodyPr wrap="square" lIns="36576" rIns="36576" tIns="18288" bIns="18288" anchor="t">
+          <a:bodyPr wrap="square" lIns="36576" tIns="18288" rIns="36576" bIns="18288" anchor="t">
             <a:spAutoFit/>
           </a:bodyPr>
           <a:lstStyle/>
@@ -14159,7 +14065,9 @@
         <p:txBody>
           <a:bodyPr rtlCol="0" anchor="ctr"/>
           <a:lstStyle/>
-          <a:p/>
+          <a:p>
+            <a:endParaRPr/>
+          </a:p>
         </p:txBody>
       </p:sp>
       <p:sp>
@@ -14179,7 +14087,7 @@
           <a:noFill/>
         </p:spPr>
         <p:txBody>
-          <a:bodyPr wrap="square" lIns="36576" rIns="36576" tIns="18288" bIns="18288" anchor="ctr">
+          <a:bodyPr wrap="square" lIns="36576" tIns="18288" rIns="36576" bIns="18288" anchor="ctr">
             <a:spAutoFit/>
           </a:bodyPr>
           <a:lstStyle/>
@@ -14252,7 +14160,9 @@
         <p:txBody>
           <a:bodyPr rtlCol="0" anchor="ctr"/>
           <a:lstStyle/>
-          <a:p/>
+          <a:p>
+            <a:endParaRPr/>
+          </a:p>
         </p:txBody>
       </p:sp>
       <p:sp>
@@ -14272,7 +14182,7 @@
           <a:noFill/>
         </p:spPr>
         <p:txBody>
-          <a:bodyPr wrap="square" lIns="36576" rIns="36576" tIns="18288" bIns="18288" anchor="t">
+          <a:bodyPr wrap="square" lIns="36576" tIns="18288" rIns="36576" bIns="18288" anchor="t">
             <a:spAutoFit/>
           </a:bodyPr>
           <a:lstStyle/>
@@ -14333,7 +14243,9 @@
         <p:txBody>
           <a:bodyPr rtlCol="0" anchor="ctr"/>
           <a:lstStyle/>
-          <a:p/>
+          <a:p>
+            <a:endParaRPr/>
+          </a:p>
         </p:txBody>
       </p:sp>
       <p:sp>
@@ -14353,7 +14265,7 @@
           <a:noFill/>
         </p:spPr>
         <p:txBody>
-          <a:bodyPr wrap="square" lIns="36576" rIns="36576" tIns="18288" bIns="18288" anchor="ctr">
+          <a:bodyPr wrap="square" lIns="36576" tIns="18288" rIns="36576" bIns="18288" anchor="ctr">
             <a:spAutoFit/>
           </a:bodyPr>
           <a:lstStyle/>
@@ -14461,7 +14373,9 @@
         <p:txBody>
           <a:bodyPr rtlCol="0" anchor="ctr"/>
           <a:lstStyle/>
-          <a:p/>
+          <a:p>
+            <a:endParaRPr/>
+          </a:p>
         </p:txBody>
       </p:sp>
       <p:sp>
@@ -14481,7 +14395,7 @@
           <a:noFill/>
         </p:spPr>
         <p:txBody>
-          <a:bodyPr wrap="square" lIns="36576" rIns="36576" tIns="18288" bIns="18288" anchor="ctr">
+          <a:bodyPr wrap="square" lIns="36576" tIns="18288" rIns="36576" bIns="18288" anchor="ctr">
             <a:spAutoFit/>
           </a:bodyPr>
           <a:lstStyle/>
@@ -14516,7 +14430,7 @@
           <a:noFill/>
         </p:spPr>
         <p:txBody>
-          <a:bodyPr wrap="square" lIns="36576" rIns="36576" tIns="18288" bIns="18288" anchor="t">
+          <a:bodyPr wrap="square" lIns="36576" tIns="18288" rIns="36576" bIns="18288" anchor="t">
             <a:spAutoFit/>
           </a:bodyPr>
           <a:lstStyle/>
@@ -14551,7 +14465,7 @@
           <a:noFill/>
         </p:spPr>
         <p:txBody>
-          <a:bodyPr wrap="square" lIns="36576" rIns="36576" tIns="18288" bIns="18288" anchor="t">
+          <a:bodyPr wrap="square" lIns="36576" tIns="18288" rIns="36576" bIns="18288" anchor="t">
             <a:spAutoFit/>
           </a:bodyPr>
           <a:lstStyle/>
@@ -14612,7 +14526,9 @@
         <p:txBody>
           <a:bodyPr rtlCol="0" anchor="ctr"/>
           <a:lstStyle/>
-          <a:p/>
+          <a:p>
+            <a:endParaRPr/>
+          </a:p>
         </p:txBody>
       </p:sp>
       <p:sp>
@@ -14632,7 +14548,7 @@
           <a:noFill/>
         </p:spPr>
         <p:txBody>
-          <a:bodyPr wrap="square" lIns="36576" rIns="36576" tIns="18288" bIns="18288" anchor="t">
+          <a:bodyPr wrap="square" lIns="36576" tIns="18288" rIns="36576" bIns="18288" anchor="t">
             <a:spAutoFit/>
           </a:bodyPr>
           <a:lstStyle/>
@@ -14667,7 +14583,7 @@
           <a:noFill/>
         </p:spPr>
         <p:txBody>
-          <a:bodyPr wrap="square" lIns="36576" rIns="36576" tIns="18288" bIns="18288" anchor="t">
+          <a:bodyPr wrap="square" lIns="36576" tIns="18288" rIns="36576" bIns="18288" anchor="t">
             <a:spAutoFit/>
           </a:bodyPr>
           <a:lstStyle/>
@@ -14728,7 +14644,9 @@
         <p:txBody>
           <a:bodyPr rtlCol="0" anchor="ctr"/>
           <a:lstStyle/>
-          <a:p/>
+          <a:p>
+            <a:endParaRPr/>
+          </a:p>
         </p:txBody>
       </p:sp>
       <p:sp>
@@ -14748,7 +14666,7 @@
           <a:noFill/>
         </p:spPr>
         <p:txBody>
-          <a:bodyPr wrap="square" lIns="36576" rIns="36576" tIns="18288" bIns="18288" anchor="t">
+          <a:bodyPr wrap="square" lIns="36576" tIns="18288" rIns="36576" bIns="18288" anchor="t">
             <a:spAutoFit/>
           </a:bodyPr>
           <a:lstStyle/>
@@ -14783,7 +14701,7 @@
           <a:noFill/>
         </p:spPr>
         <p:txBody>
-          <a:bodyPr wrap="square" lIns="36576" rIns="36576" tIns="18288" bIns="18288" anchor="t">
+          <a:bodyPr wrap="square" lIns="36576" tIns="18288" rIns="36576" bIns="18288" anchor="t">
             <a:spAutoFit/>
           </a:bodyPr>
           <a:lstStyle/>
@@ -14844,7 +14762,9 @@
         <p:txBody>
           <a:bodyPr rtlCol="0" anchor="ctr"/>
           <a:lstStyle/>
-          <a:p/>
+          <a:p>
+            <a:endParaRPr/>
+          </a:p>
         </p:txBody>
       </p:sp>
       <p:sp>
@@ -14864,7 +14784,7 @@
           <a:noFill/>
         </p:spPr>
         <p:txBody>
-          <a:bodyPr wrap="square" lIns="36576" rIns="36576" tIns="18288" bIns="18288" anchor="t">
+          <a:bodyPr wrap="square" lIns="36576" tIns="18288" rIns="36576" bIns="18288" anchor="t">
             <a:spAutoFit/>
           </a:bodyPr>
           <a:lstStyle/>
@@ -14899,7 +14819,7 @@
           <a:noFill/>
         </p:spPr>
         <p:txBody>
-          <a:bodyPr wrap="square" lIns="36576" rIns="36576" tIns="18288" bIns="18288" anchor="t">
+          <a:bodyPr wrap="square" lIns="36576" tIns="18288" rIns="36576" bIns="18288" anchor="t">
             <a:spAutoFit/>
           </a:bodyPr>
           <a:lstStyle/>
@@ -14934,7 +14854,7 @@
           <a:noFill/>
         </p:spPr>
         <p:txBody>
-          <a:bodyPr wrap="square" lIns="36576" rIns="36576" tIns="18288" bIns="18288" anchor="t">
+          <a:bodyPr wrap="square" lIns="36576" tIns="18288" rIns="36576" bIns="18288" anchor="t">
             <a:spAutoFit/>
           </a:bodyPr>
           <a:lstStyle/>
@@ -14969,7 +14889,7 @@
           <a:noFill/>
         </p:spPr>
         <p:txBody>
-          <a:bodyPr wrap="square" lIns="36576" rIns="36576" tIns="18288" bIns="18288" anchor="t">
+          <a:bodyPr wrap="square" lIns="36576" tIns="18288" rIns="36576" bIns="18288" anchor="t">
             <a:spAutoFit/>
           </a:bodyPr>
           <a:lstStyle/>
@@ -14996,7 +14916,7 @@
 </file>
 
 <file path=ppt/slides/slide7.xml><?xml version="1.0" encoding="utf-8"?>
-<p:sld xmlns:a="http://schemas.openxmlformats.org/drawingml/2006/main" xmlns:p="http://schemas.openxmlformats.org/presentationml/2006/main" xmlns:r="http://schemas.openxmlformats.org/officeDocument/2006/relationships">
+<p:sld xmlns:a="http://schemas.openxmlformats.org/drawingml/2006/main" xmlns:r="http://schemas.openxmlformats.org/officeDocument/2006/relationships" xmlns:p="http://schemas.openxmlformats.org/presentationml/2006/main">
   <p:cSld>
     <p:bg>
       <p:bgPr>
@@ -15012,7 +14932,14 @@
         <p:cNvGrpSpPr/>
         <p:nvPr/>
       </p:nvGrpSpPr>
-      <p:grpSpPr/>
+      <p:grpSpPr>
+        <a:xfrm>
+          <a:off x="0" y="0"/>
+          <a:ext cx="0" cy="0"/>
+          <a:chOff x="0" y="0"/>
+          <a:chExt cx="0" cy="0"/>
+        </a:xfrm>
+      </p:grpSpPr>
       <p:sp>
         <p:nvSpPr>
           <p:cNvPr id="2" name="TextBox 1"/>
@@ -15030,7 +14957,7 @@
           <a:noFill/>
         </p:spPr>
         <p:txBody>
-          <a:bodyPr wrap="square" lIns="36576" rIns="36576" tIns="18288" bIns="18288" anchor="t">
+          <a:bodyPr wrap="square" lIns="36576" tIns="18288" rIns="36576" bIns="18288" anchor="t">
             <a:spAutoFit/>
           </a:bodyPr>
           <a:lstStyle/>
@@ -15065,7 +14992,7 @@
           <a:noFill/>
         </p:spPr>
         <p:txBody>
-          <a:bodyPr wrap="square" lIns="36576" rIns="36576" tIns="18288" bIns="18288" anchor="t">
+          <a:bodyPr wrap="square" lIns="36576" tIns="18288" rIns="36576" bIns="18288" anchor="t">
             <a:spAutoFit/>
           </a:bodyPr>
           <a:lstStyle/>
@@ -15122,7 +15049,9 @@
         <p:txBody>
           <a:bodyPr rtlCol="0" anchor="ctr"/>
           <a:lstStyle/>
-          <a:p/>
+          <a:p>
+            <a:endParaRPr/>
+          </a:p>
         </p:txBody>
       </p:sp>
       <p:sp>
@@ -15168,7 +15097,9 @@
         <p:txBody>
           <a:bodyPr rtlCol="0" anchor="ctr"/>
           <a:lstStyle/>
-          <a:p/>
+          <a:p>
+            <a:endParaRPr/>
+          </a:p>
         </p:txBody>
       </p:sp>
       <p:sp>
@@ -15188,7 +15119,7 @@
           <a:noFill/>
         </p:spPr>
         <p:txBody>
-          <a:bodyPr wrap="square" lIns="36576" rIns="36576" tIns="18288" bIns="18288" anchor="t">
+          <a:bodyPr wrap="square" lIns="36576" tIns="18288" rIns="36576" bIns="18288" anchor="t">
             <a:spAutoFit/>
           </a:bodyPr>
           <a:lstStyle/>
@@ -15223,7 +15154,7 @@
           <a:noFill/>
         </p:spPr>
         <p:txBody>
-          <a:bodyPr wrap="square" lIns="36576" rIns="36576" tIns="18288" bIns="18288" anchor="t">
+          <a:bodyPr wrap="square" lIns="36576" tIns="18288" rIns="36576" bIns="18288" anchor="t">
             <a:spAutoFit/>
           </a:bodyPr>
           <a:lstStyle/>
@@ -15258,7 +15189,7 @@
           <a:noFill/>
         </p:spPr>
         <p:txBody>
-          <a:bodyPr wrap="square" lIns="36576" rIns="36576" tIns="18288" bIns="18288" anchor="t">
+          <a:bodyPr wrap="square" lIns="36576" tIns="18288" rIns="36576" bIns="18288" anchor="t">
             <a:spAutoFit/>
           </a:bodyPr>
           <a:lstStyle/>
@@ -15355,7 +15286,9 @@
         <p:txBody>
           <a:bodyPr rtlCol="0" anchor="ctr"/>
           <a:lstStyle/>
-          <a:p/>
+          <a:p>
+            <a:endParaRPr/>
+          </a:p>
         </p:txBody>
       </p:sp>
       <p:sp>
@@ -15375,7 +15308,7 @@
           <a:noFill/>
         </p:spPr>
         <p:txBody>
-          <a:bodyPr wrap="square" lIns="36576" rIns="36576" tIns="18288" bIns="18288" anchor="t">
+          <a:bodyPr wrap="square" lIns="36576" tIns="18288" rIns="36576" bIns="18288" anchor="t">
             <a:spAutoFit/>
           </a:bodyPr>
           <a:lstStyle/>
@@ -15410,7 +15343,7 @@
           <a:noFill/>
         </p:spPr>
         <p:txBody>
-          <a:bodyPr wrap="square" lIns="36576" rIns="36576" tIns="18288" bIns="18288" anchor="t">
+          <a:bodyPr wrap="square" lIns="36576" tIns="18288" rIns="36576" bIns="18288" anchor="t">
             <a:spAutoFit/>
           </a:bodyPr>
           <a:lstStyle/>
@@ -15445,7 +15378,7 @@
           <a:noFill/>
         </p:spPr>
         <p:txBody>
-          <a:bodyPr wrap="square" lIns="36576" rIns="36576" tIns="18288" bIns="18288" anchor="t">
+          <a:bodyPr wrap="square" lIns="36576" tIns="18288" rIns="36576" bIns="18288" anchor="t">
             <a:spAutoFit/>
           </a:bodyPr>
           <a:lstStyle/>
@@ -15542,7 +15475,9 @@
         <p:txBody>
           <a:bodyPr rtlCol="0" anchor="ctr"/>
           <a:lstStyle/>
-          <a:p/>
+          <a:p>
+            <a:endParaRPr/>
+          </a:p>
         </p:txBody>
       </p:sp>
       <p:sp>
@@ -15562,7 +15497,7 @@
           <a:noFill/>
         </p:spPr>
         <p:txBody>
-          <a:bodyPr wrap="square" lIns="36576" rIns="36576" tIns="18288" bIns="18288" anchor="t">
+          <a:bodyPr wrap="square" lIns="36576" tIns="18288" rIns="36576" bIns="18288" anchor="t">
             <a:spAutoFit/>
           </a:bodyPr>
           <a:lstStyle/>
@@ -15597,7 +15532,7 @@
           <a:noFill/>
         </p:spPr>
         <p:txBody>
-          <a:bodyPr wrap="square" lIns="36576" rIns="36576" tIns="18288" bIns="18288" anchor="t">
+          <a:bodyPr wrap="square" lIns="36576" tIns="18288" rIns="36576" bIns="18288" anchor="t">
             <a:spAutoFit/>
           </a:bodyPr>
           <a:lstStyle/>
@@ -15632,7 +15567,7 @@
           <a:noFill/>
         </p:spPr>
         <p:txBody>
-          <a:bodyPr wrap="square" lIns="36576" rIns="36576" tIns="18288" bIns="18288" anchor="t">
+          <a:bodyPr wrap="square" lIns="36576" tIns="18288" rIns="36576" bIns="18288" anchor="t">
             <a:spAutoFit/>
           </a:bodyPr>
           <a:lstStyle/>
@@ -15693,7 +15628,9 @@
         <p:txBody>
           <a:bodyPr rtlCol="0" anchor="ctr"/>
           <a:lstStyle/>
-          <a:p/>
+          <a:p>
+            <a:endParaRPr/>
+          </a:p>
         </p:txBody>
       </p:sp>
       <p:sp>
@@ -15713,7 +15650,7 @@
           <a:noFill/>
         </p:spPr>
         <p:txBody>
-          <a:bodyPr wrap="square" lIns="36576" rIns="36576" tIns="18288" bIns="18288" anchor="t">
+          <a:bodyPr wrap="square" lIns="36576" tIns="18288" rIns="36576" bIns="18288" anchor="t">
             <a:spAutoFit/>
           </a:bodyPr>
           <a:lstStyle/>
@@ -15774,7 +15711,9 @@
         <p:txBody>
           <a:bodyPr rtlCol="0" anchor="ctr"/>
           <a:lstStyle/>
-          <a:p/>
+          <a:p>
+            <a:endParaRPr/>
+          </a:p>
         </p:txBody>
       </p:sp>
       <p:sp>
@@ -15794,7 +15733,7 @@
           <a:noFill/>
         </p:spPr>
         <p:txBody>
-          <a:bodyPr wrap="square" lIns="36576" rIns="36576" tIns="18288" bIns="18288" anchor="ctr">
+          <a:bodyPr wrap="square" lIns="36576" tIns="18288" rIns="36576" bIns="18288" anchor="ctr">
             <a:spAutoFit/>
           </a:bodyPr>
           <a:lstStyle/>
@@ -15867,7 +15806,9 @@
         <p:txBody>
           <a:bodyPr rtlCol="0" anchor="ctr"/>
           <a:lstStyle/>
-          <a:p/>
+          <a:p>
+            <a:endParaRPr/>
+          </a:p>
         </p:txBody>
       </p:sp>
       <p:sp>
@@ -15887,7 +15828,7 @@
           <a:noFill/>
         </p:spPr>
         <p:txBody>
-          <a:bodyPr wrap="square" lIns="36576" rIns="36576" tIns="18288" bIns="18288" anchor="ctr">
+          <a:bodyPr wrap="square" lIns="36576" tIns="18288" rIns="36576" bIns="18288" anchor="ctr">
             <a:spAutoFit/>
           </a:bodyPr>
           <a:lstStyle/>
@@ -15948,7 +15889,9 @@
         <p:txBody>
           <a:bodyPr rtlCol="0" anchor="ctr"/>
           <a:lstStyle/>
-          <a:p/>
+          <a:p>
+            <a:endParaRPr/>
+          </a:p>
         </p:txBody>
       </p:sp>
       <p:sp>
@@ -15968,7 +15911,7 @@
           <a:noFill/>
         </p:spPr>
         <p:txBody>
-          <a:bodyPr wrap="square" lIns="36576" rIns="36576" tIns="18288" bIns="18288" anchor="ctr">
+          <a:bodyPr wrap="square" lIns="36576" tIns="18288" rIns="36576" bIns="18288" anchor="ctr">
             <a:spAutoFit/>
           </a:bodyPr>
           <a:lstStyle/>
@@ -16029,7 +15972,9 @@
         <p:txBody>
           <a:bodyPr rtlCol="0" anchor="ctr"/>
           <a:lstStyle/>
-          <a:p/>
+          <a:p>
+            <a:endParaRPr/>
+          </a:p>
         </p:txBody>
       </p:sp>
       <p:sp>
@@ -16049,7 +15994,7 @@
           <a:noFill/>
         </p:spPr>
         <p:txBody>
-          <a:bodyPr wrap="square" lIns="36576" rIns="36576" tIns="18288" bIns="18288" anchor="ctr">
+          <a:bodyPr wrap="square" lIns="36576" tIns="18288" rIns="36576" bIns="18288" anchor="ctr">
             <a:spAutoFit/>
           </a:bodyPr>
           <a:lstStyle/>
@@ -16110,7 +16055,9 @@
         <p:txBody>
           <a:bodyPr rtlCol="0" anchor="ctr"/>
           <a:lstStyle/>
-          <a:p/>
+          <a:p>
+            <a:endParaRPr/>
+          </a:p>
         </p:txBody>
       </p:sp>
       <p:sp>
@@ -16130,7 +16077,7 @@
           <a:noFill/>
         </p:spPr>
         <p:txBody>
-          <a:bodyPr wrap="square" lIns="36576" rIns="36576" tIns="18288" bIns="18288" anchor="ctr">
+          <a:bodyPr wrap="square" lIns="36576" tIns="18288" rIns="36576" bIns="18288" anchor="ctr">
             <a:spAutoFit/>
           </a:bodyPr>
           <a:lstStyle/>
@@ -16310,7 +16257,7 @@
           <a:noFill/>
         </p:spPr>
         <p:txBody>
-          <a:bodyPr wrap="square" lIns="36576" rIns="36576" tIns="18288" bIns="18288" anchor="t">
+          <a:bodyPr wrap="square" lIns="36576" tIns="18288" rIns="36576" bIns="18288" anchor="t">
             <a:spAutoFit/>
           </a:bodyPr>
           <a:lstStyle/>
@@ -16346,7 +16293,7 @@
           <a:noFill/>
         </p:spPr>
         <p:txBody>
-          <a:bodyPr wrap="square" lIns="36576" rIns="36576" tIns="18288" bIns="18288" anchor="t">
+          <a:bodyPr wrap="square" lIns="36576" tIns="18288" rIns="36576" bIns="18288" anchor="t">
             <a:spAutoFit/>
           </a:bodyPr>
           <a:lstStyle/>
@@ -16381,7 +16328,7 @@
           <a:noFill/>
         </p:spPr>
         <p:txBody>
-          <a:bodyPr wrap="square" lIns="36576" rIns="36576" tIns="18288" bIns="18288" anchor="t">
+          <a:bodyPr wrap="square" lIns="36576" tIns="18288" rIns="36576" bIns="18288" anchor="t">
             <a:spAutoFit/>
           </a:bodyPr>
           <a:lstStyle/>
@@ -16416,7 +16363,7 @@
           <a:noFill/>
         </p:spPr>
         <p:txBody>
-          <a:bodyPr wrap="square" lIns="36576" rIns="36576" tIns="18288" bIns="18288" anchor="t">
+          <a:bodyPr wrap="square" lIns="36576" tIns="18288" rIns="36576" bIns="18288" anchor="t">
             <a:spAutoFit/>
           </a:bodyPr>
           <a:lstStyle/>
@@ -16451,7 +16398,7 @@
           <a:noFill/>
         </p:spPr>
         <p:txBody>
-          <a:bodyPr wrap="square" lIns="36576" rIns="36576" tIns="18288" bIns="18288" anchor="t">
+          <a:bodyPr wrap="square" lIns="36576" tIns="18288" rIns="36576" bIns="18288" anchor="t">
             <a:spAutoFit/>
           </a:bodyPr>
           <a:lstStyle/>
@@ -16486,7 +16433,7 @@
           <a:noFill/>
         </p:spPr>
         <p:txBody>
-          <a:bodyPr wrap="square" lIns="36576" rIns="36576" tIns="18288" bIns="18288" anchor="t">
+          <a:bodyPr wrap="square" lIns="36576" tIns="18288" rIns="36576" bIns="18288" anchor="t">
             <a:spAutoFit/>
           </a:bodyPr>
           <a:lstStyle/>
@@ -16521,7 +16468,7 @@
           <a:noFill/>
         </p:spPr>
         <p:txBody>
-          <a:bodyPr wrap="square" lIns="36576" rIns="36576" tIns="18288" bIns="18288" anchor="t">
+          <a:bodyPr wrap="square" lIns="36576" tIns="18288" rIns="36576" bIns="18288" anchor="t">
             <a:spAutoFit/>
           </a:bodyPr>
           <a:lstStyle/>
@@ -16556,7 +16503,7 @@
           <a:noFill/>
         </p:spPr>
         <p:txBody>
-          <a:bodyPr wrap="square" lIns="36576" rIns="36576" tIns="18288" bIns="18288" anchor="t">
+          <a:bodyPr wrap="square" lIns="36576" tIns="18288" rIns="36576" bIns="18288" anchor="t">
             <a:spAutoFit/>
           </a:bodyPr>
           <a:lstStyle/>
@@ -16591,7 +16538,7 @@
           <a:noFill/>
         </p:spPr>
         <p:txBody>
-          <a:bodyPr wrap="square" lIns="36576" rIns="36576" tIns="18288" bIns="18288" anchor="t">
+          <a:bodyPr wrap="square" lIns="36576" tIns="18288" rIns="36576" bIns="18288" anchor="t">
             <a:spAutoFit/>
           </a:bodyPr>
           <a:lstStyle/>
@@ -16626,7 +16573,7 @@
           <a:noFill/>
         </p:spPr>
         <p:txBody>
-          <a:bodyPr wrap="square" lIns="36576" rIns="36576" tIns="18288" bIns="18288" anchor="t">
+          <a:bodyPr wrap="square" lIns="36576" tIns="18288" rIns="36576" bIns="18288" anchor="t">
             <a:spAutoFit/>
           </a:bodyPr>
           <a:lstStyle/>
@@ -16661,7 +16608,7 @@
           <a:noFill/>
         </p:spPr>
         <p:txBody>
-          <a:bodyPr wrap="square" lIns="36576" rIns="36576" tIns="18288" bIns="18288" anchor="t">
+          <a:bodyPr wrap="square" lIns="36576" tIns="18288" rIns="36576" bIns="18288" anchor="t">
             <a:spAutoFit/>
           </a:bodyPr>
           <a:lstStyle/>
@@ -16696,7 +16643,7 @@
           <a:noFill/>
         </p:spPr>
         <p:txBody>
-          <a:bodyPr wrap="square" lIns="36576" rIns="36576" tIns="18288" bIns="18288" anchor="t">
+          <a:bodyPr wrap="square" lIns="36576" tIns="18288" rIns="36576" bIns="18288" anchor="t">
             <a:spAutoFit/>
           </a:bodyPr>
           <a:lstStyle/>
@@ -16731,7 +16678,7 @@
           <a:noFill/>
         </p:spPr>
         <p:txBody>
-          <a:bodyPr wrap="square" lIns="36576" rIns="36576" tIns="18288" bIns="18288" anchor="t">
+          <a:bodyPr wrap="square" lIns="36576" tIns="18288" rIns="36576" bIns="18288" anchor="t">
             <a:spAutoFit/>
           </a:bodyPr>
           <a:lstStyle/>
@@ -16758,7 +16705,7 @@
 </file>
 
 <file path=ppt/slides/slide8.xml><?xml version="1.0" encoding="utf-8"?>
-<p:sld xmlns:a="http://schemas.openxmlformats.org/drawingml/2006/main" xmlns:p="http://schemas.openxmlformats.org/presentationml/2006/main" xmlns:r="http://schemas.openxmlformats.org/officeDocument/2006/relationships">
+<p:sld xmlns:a="http://schemas.openxmlformats.org/drawingml/2006/main" xmlns:r="http://schemas.openxmlformats.org/officeDocument/2006/relationships" xmlns:p="http://schemas.openxmlformats.org/presentationml/2006/main">
   <p:cSld>
     <p:bg>
       <p:bgPr>
@@ -16774,7 +16721,14 @@
         <p:cNvGrpSpPr/>
         <p:nvPr/>
       </p:nvGrpSpPr>
-      <p:grpSpPr/>
+      <p:grpSpPr>
+        <a:xfrm>
+          <a:off x="0" y="0"/>
+          <a:ext cx="0" cy="0"/>
+          <a:chOff x="0" y="0"/>
+          <a:chExt cx="0" cy="0"/>
+        </a:xfrm>
+      </p:grpSpPr>
       <p:sp>
         <p:nvSpPr>
           <p:cNvPr id="2" name="TextBox 1"/>
@@ -16792,7 +16746,7 @@
           <a:noFill/>
         </p:spPr>
         <p:txBody>
-          <a:bodyPr wrap="square" lIns="36576" rIns="36576" tIns="18288" bIns="18288" anchor="t">
+          <a:bodyPr wrap="square" lIns="36576" tIns="18288" rIns="36576" bIns="18288" anchor="t">
             <a:spAutoFit/>
           </a:bodyPr>
           <a:lstStyle/>
@@ -16827,7 +16781,7 @@
           <a:noFill/>
         </p:spPr>
         <p:txBody>
-          <a:bodyPr wrap="square" lIns="36576" rIns="36576" tIns="18288" bIns="18288" anchor="t">
+          <a:bodyPr wrap="square" lIns="36576" tIns="18288" rIns="36576" bIns="18288" anchor="t">
             <a:spAutoFit/>
           </a:bodyPr>
           <a:lstStyle/>
@@ -16884,7 +16838,9 @@
         <p:txBody>
           <a:bodyPr rtlCol="0" anchor="ctr"/>
           <a:lstStyle/>
-          <a:p/>
+          <a:p>
+            <a:endParaRPr/>
+          </a:p>
         </p:txBody>
       </p:sp>
       <p:sp>
@@ -16930,7 +16886,9 @@
         <p:txBody>
           <a:bodyPr rtlCol="0" anchor="ctr"/>
           <a:lstStyle/>
-          <a:p/>
+          <a:p>
+            <a:endParaRPr/>
+          </a:p>
         </p:txBody>
       </p:sp>
       <p:sp>
@@ -16950,7 +16908,7 @@
           <a:noFill/>
         </p:spPr>
         <p:txBody>
-          <a:bodyPr wrap="square" lIns="36576" rIns="36576" tIns="18288" bIns="18288" anchor="ctr">
+          <a:bodyPr wrap="square" lIns="36576" tIns="18288" rIns="36576" bIns="18288" anchor="ctr">
             <a:spAutoFit/>
           </a:bodyPr>
           <a:lstStyle/>
@@ -17059,7 +17017,9 @@
         <p:txBody>
           <a:bodyPr rtlCol="0" anchor="ctr"/>
           <a:lstStyle/>
-          <a:p/>
+          <a:p>
+            <a:endParaRPr/>
+          </a:p>
         </p:txBody>
       </p:sp>
       <p:sp>
@@ -17079,7 +17039,7 @@
           <a:noFill/>
         </p:spPr>
         <p:txBody>
-          <a:bodyPr wrap="square" lIns="36576" rIns="36576" tIns="18288" bIns="18288" anchor="ctr">
+          <a:bodyPr wrap="square" lIns="36576" tIns="18288" rIns="36576" bIns="18288" anchor="ctr">
             <a:spAutoFit/>
           </a:bodyPr>
           <a:lstStyle/>
@@ -17188,7 +17148,9 @@
         <p:txBody>
           <a:bodyPr rtlCol="0" anchor="ctr"/>
           <a:lstStyle/>
-          <a:p/>
+          <a:p>
+            <a:endParaRPr/>
+          </a:p>
         </p:txBody>
       </p:sp>
       <p:sp>
@@ -17208,7 +17170,7 @@
           <a:noFill/>
         </p:spPr>
         <p:txBody>
-          <a:bodyPr wrap="square" lIns="36576" rIns="36576" tIns="18288" bIns="18288" anchor="ctr">
+          <a:bodyPr wrap="square" lIns="36576" tIns="18288" rIns="36576" bIns="18288" anchor="ctr">
             <a:spAutoFit/>
           </a:bodyPr>
           <a:lstStyle/>
@@ -17317,7 +17279,9 @@
         <p:txBody>
           <a:bodyPr rtlCol="0" anchor="ctr"/>
           <a:lstStyle/>
-          <a:p/>
+          <a:p>
+            <a:endParaRPr/>
+          </a:p>
         </p:txBody>
       </p:sp>
       <p:sp>
@@ -17337,7 +17301,7 @@
           <a:noFill/>
         </p:spPr>
         <p:txBody>
-          <a:bodyPr wrap="square" lIns="36576" rIns="36576" tIns="18288" bIns="18288" anchor="ctr">
+          <a:bodyPr wrap="square" lIns="36576" tIns="18288" rIns="36576" bIns="18288" anchor="ctr">
             <a:spAutoFit/>
           </a:bodyPr>
           <a:lstStyle/>
@@ -17410,7 +17374,9 @@
         <p:txBody>
           <a:bodyPr rtlCol="0" anchor="ctr"/>
           <a:lstStyle/>
-          <a:p/>
+          <a:p>
+            <a:endParaRPr/>
+          </a:p>
         </p:txBody>
       </p:sp>
       <p:sp>
@@ -17430,7 +17396,7 @@
           <a:noFill/>
         </p:spPr>
         <p:txBody>
-          <a:bodyPr wrap="square" lIns="36576" rIns="36576" tIns="18288" bIns="18288" anchor="t">
+          <a:bodyPr wrap="square" lIns="36576" tIns="18288" rIns="36576" bIns="18288" anchor="t">
             <a:spAutoFit/>
           </a:bodyPr>
           <a:lstStyle/>
@@ -17489,7 +17455,9 @@
         <p:txBody>
           <a:bodyPr rtlCol="0" anchor="ctr"/>
           <a:lstStyle/>
-          <a:p/>
+          <a:p>
+            <a:endParaRPr/>
+          </a:p>
         </p:txBody>
       </p:sp>
       <p:sp>
@@ -17509,7 +17477,7 @@
           <a:noFill/>
         </p:spPr>
         <p:txBody>
-          <a:bodyPr wrap="square" lIns="36576" rIns="36576" tIns="18288" bIns="18288" anchor="ctr">
+          <a:bodyPr wrap="square" lIns="36576" tIns="18288" rIns="36576" bIns="18288" anchor="ctr">
             <a:spAutoFit/>
           </a:bodyPr>
           <a:lstStyle/>
@@ -17568,7 +17536,9 @@
         <p:txBody>
           <a:bodyPr rtlCol="0" anchor="ctr"/>
           <a:lstStyle/>
-          <a:p/>
+          <a:p>
+            <a:endParaRPr/>
+          </a:p>
         </p:txBody>
       </p:sp>
       <p:sp>
@@ -17588,7 +17558,7 @@
           <a:noFill/>
         </p:spPr>
         <p:txBody>
-          <a:bodyPr wrap="square" lIns="36576" rIns="36576" tIns="18288" bIns="18288" anchor="ctr">
+          <a:bodyPr wrap="square" lIns="36576" tIns="18288" rIns="36576" bIns="18288" anchor="ctr">
             <a:spAutoFit/>
           </a:bodyPr>
           <a:lstStyle/>
@@ -17647,7 +17617,9 @@
         <p:txBody>
           <a:bodyPr rtlCol="0" anchor="ctr"/>
           <a:lstStyle/>
-          <a:p/>
+          <a:p>
+            <a:endParaRPr/>
+          </a:p>
         </p:txBody>
       </p:sp>
       <p:sp>
@@ -17667,7 +17639,7 @@
           <a:noFill/>
         </p:spPr>
         <p:txBody>
-          <a:bodyPr wrap="square" lIns="36576" rIns="36576" tIns="18288" bIns="18288" anchor="ctr">
+          <a:bodyPr wrap="square" lIns="36576" tIns="18288" rIns="36576" bIns="18288" anchor="ctr">
             <a:spAutoFit/>
           </a:bodyPr>
           <a:lstStyle/>
@@ -17726,7 +17698,9 @@
         <p:txBody>
           <a:bodyPr rtlCol="0" anchor="ctr"/>
           <a:lstStyle/>
-          <a:p/>
+          <a:p>
+            <a:endParaRPr/>
+          </a:p>
         </p:txBody>
       </p:sp>
       <p:sp>
@@ -17746,7 +17720,7 @@
           <a:noFill/>
         </p:spPr>
         <p:txBody>
-          <a:bodyPr wrap="square" lIns="36576" rIns="36576" tIns="18288" bIns="18288" anchor="ctr">
+          <a:bodyPr wrap="square" lIns="36576" tIns="18288" rIns="36576" bIns="18288" anchor="ctr">
             <a:spAutoFit/>
           </a:bodyPr>
           <a:lstStyle/>
@@ -17781,7 +17755,7 @@
           <a:noFill/>
         </p:spPr>
         <p:txBody>
-          <a:bodyPr wrap="square" lIns="36576" rIns="36576" tIns="18288" bIns="18288" anchor="t">
+          <a:bodyPr wrap="square" lIns="36576" tIns="18288" rIns="36576" bIns="18288" anchor="t">
             <a:spAutoFit/>
           </a:bodyPr>
           <a:lstStyle/>
@@ -17838,7 +17812,9 @@
         <p:txBody>
           <a:bodyPr rtlCol="0" anchor="ctr"/>
           <a:lstStyle/>
-          <a:p/>
+          <a:p>
+            <a:endParaRPr/>
+          </a:p>
         </p:txBody>
       </p:sp>
       <p:sp>
@@ -17858,7 +17834,7 @@
           <a:noFill/>
         </p:spPr>
         <p:txBody>
-          <a:bodyPr wrap="square" lIns="36576" rIns="36576" tIns="18288" bIns="18288" anchor="t">
+          <a:bodyPr wrap="square" lIns="36576" tIns="18288" rIns="36576" bIns="18288" anchor="t">
             <a:spAutoFit/>
           </a:bodyPr>
           <a:lstStyle/>
@@ -17915,7 +17891,9 @@
         <p:txBody>
           <a:bodyPr rtlCol="0" anchor="ctr"/>
           <a:lstStyle/>
-          <a:p/>
+          <a:p>
+            <a:endParaRPr/>
+          </a:p>
         </p:txBody>
       </p:sp>
       <p:sp>
@@ -17935,7 +17913,7 @@
           <a:noFill/>
         </p:spPr>
         <p:txBody>
-          <a:bodyPr wrap="square" lIns="36576" rIns="36576" tIns="18288" bIns="18288" anchor="t">
+          <a:bodyPr wrap="square" lIns="36576" tIns="18288" rIns="36576" bIns="18288" anchor="t">
             <a:spAutoFit/>
           </a:bodyPr>
           <a:lstStyle/>
@@ -17992,7 +17970,9 @@
         <p:txBody>
           <a:bodyPr rtlCol="0" anchor="ctr"/>
           <a:lstStyle/>
-          <a:p/>
+          <a:p>
+            <a:endParaRPr/>
+          </a:p>
         </p:txBody>
       </p:sp>
       <p:sp>
@@ -18012,7 +17992,7 @@
           <a:noFill/>
         </p:spPr>
         <p:txBody>
-          <a:bodyPr wrap="square" lIns="36576" rIns="36576" tIns="18288" bIns="18288" anchor="t">
+          <a:bodyPr wrap="square" lIns="36576" tIns="18288" rIns="36576" bIns="18288" anchor="t">
             <a:spAutoFit/>
           </a:bodyPr>
           <a:lstStyle/>
@@ -18069,7 +18049,9 @@
         <p:txBody>
           <a:bodyPr rtlCol="0" anchor="ctr"/>
           <a:lstStyle/>
-          <a:p/>
+          <a:p>
+            <a:endParaRPr/>
+          </a:p>
         </p:txBody>
       </p:sp>
       <p:sp>
@@ -18089,7 +18071,7 @@
           <a:noFill/>
         </p:spPr>
         <p:txBody>
-          <a:bodyPr wrap="square" lIns="36576" rIns="36576" tIns="18288" bIns="18288" anchor="t">
+          <a:bodyPr wrap="square" lIns="36576" tIns="18288" rIns="36576" bIns="18288" anchor="t">
             <a:spAutoFit/>
           </a:bodyPr>
           <a:lstStyle/>
@@ -18124,7 +18106,7 @@
           <a:noFill/>
         </p:spPr>
         <p:txBody>
-          <a:bodyPr wrap="square" lIns="36576" rIns="36576" tIns="18288" bIns="18288" anchor="t">
+          <a:bodyPr wrap="square" lIns="36576" tIns="18288" rIns="36576" bIns="18288" anchor="t">
             <a:spAutoFit/>
           </a:bodyPr>
           <a:lstStyle/>
@@ -18159,7 +18141,7 @@
           <a:noFill/>
         </p:spPr>
         <p:txBody>
-          <a:bodyPr wrap="square" lIns="36576" rIns="36576" tIns="18288" bIns="18288" anchor="t">
+          <a:bodyPr wrap="square" lIns="36576" tIns="18288" rIns="36576" bIns="18288" anchor="t">
             <a:spAutoFit/>
           </a:bodyPr>
           <a:lstStyle/>
@@ -18186,7 +18168,7 @@
 </file>
 
 <file path=ppt/slides/slide9.xml><?xml version="1.0" encoding="utf-8"?>
-<p:sld xmlns:a="http://schemas.openxmlformats.org/drawingml/2006/main" xmlns:p="http://schemas.openxmlformats.org/presentationml/2006/main" xmlns:r="http://schemas.openxmlformats.org/officeDocument/2006/relationships">
+<p:sld xmlns:a="http://schemas.openxmlformats.org/drawingml/2006/main" xmlns:r="http://schemas.openxmlformats.org/officeDocument/2006/relationships" xmlns:p="http://schemas.openxmlformats.org/presentationml/2006/main">
   <p:cSld>
     <p:bg>
       <p:bgPr>
@@ -18202,7 +18184,14 @@
         <p:cNvGrpSpPr/>
         <p:nvPr/>
       </p:nvGrpSpPr>
-      <p:grpSpPr/>
+      <p:grpSpPr>
+        <a:xfrm>
+          <a:off x="0" y="0"/>
+          <a:ext cx="0" cy="0"/>
+          <a:chOff x="0" y="0"/>
+          <a:chExt cx="0" cy="0"/>
+        </a:xfrm>
+      </p:grpSpPr>
       <p:sp>
         <p:nvSpPr>
           <p:cNvPr id="2" name="TextBox 1"/>
@@ -18220,7 +18209,7 @@
           <a:noFill/>
         </p:spPr>
         <p:txBody>
-          <a:bodyPr wrap="square" lIns="36576" rIns="36576" tIns="18288" bIns="18288" anchor="t">
+          <a:bodyPr wrap="square" lIns="36576" tIns="18288" rIns="36576" bIns="18288" anchor="t">
             <a:spAutoFit/>
           </a:bodyPr>
           <a:lstStyle/>
@@ -18255,7 +18244,7 @@
           <a:noFill/>
         </p:spPr>
         <p:txBody>
-          <a:bodyPr wrap="square" lIns="36576" rIns="36576" tIns="18288" bIns="18288" anchor="t">
+          <a:bodyPr wrap="square" lIns="36576" tIns="18288" rIns="36576" bIns="18288" anchor="t">
             <a:spAutoFit/>
           </a:bodyPr>
           <a:lstStyle/>
@@ -18312,7 +18301,9 @@
         <p:txBody>
           <a:bodyPr rtlCol="0" anchor="ctr"/>
           <a:lstStyle/>
-          <a:p/>
+          <a:p>
+            <a:endParaRPr/>
+          </a:p>
         </p:txBody>
       </p:sp>
       <p:sp>
@@ -18358,7 +18349,9 @@
         <p:txBody>
           <a:bodyPr rtlCol="0" anchor="ctr"/>
           <a:lstStyle/>
-          <a:p/>
+          <a:p>
+            <a:endParaRPr/>
+          </a:p>
         </p:txBody>
       </p:sp>
       <p:sp>
@@ -18378,7 +18371,7 @@
           <a:noFill/>
         </p:spPr>
         <p:txBody>
-          <a:bodyPr wrap="square" lIns="36576" rIns="36576" tIns="18288" bIns="18288" anchor="t">
+          <a:bodyPr wrap="square" lIns="36576" tIns="18288" rIns="36576" bIns="18288" anchor="t">
             <a:spAutoFit/>
           </a:bodyPr>
           <a:lstStyle/>
@@ -18413,7 +18406,7 @@
           <a:noFill/>
         </p:spPr>
         <p:txBody>
-          <a:bodyPr wrap="square" lIns="36576" rIns="36576" tIns="18288" bIns="18288" anchor="t">
+          <a:bodyPr wrap="square" lIns="36576" tIns="18288" rIns="36576" bIns="18288" anchor="t">
             <a:spAutoFit/>
           </a:bodyPr>
           <a:lstStyle/>
@@ -18449,7 +18442,7 @@
           <a:noFill/>
         </p:spPr>
         <p:txBody>
-          <a:bodyPr wrap="square" lIns="36576" rIns="36576" tIns="18288" bIns="18288" anchor="t">
+          <a:bodyPr wrap="square" lIns="36576" tIns="18288" rIns="36576" bIns="18288" anchor="t">
             <a:spAutoFit/>
           </a:bodyPr>
           <a:lstStyle/>
@@ -18544,7 +18537,9 @@
         <p:txBody>
           <a:bodyPr rtlCol="0" anchor="ctr"/>
           <a:lstStyle/>
-          <a:p/>
+          <a:p>
+            <a:endParaRPr/>
+          </a:p>
         </p:txBody>
       </p:sp>
       <p:sp>
@@ -18564,7 +18559,7 @@
           <a:noFill/>
         </p:spPr>
         <p:txBody>
-          <a:bodyPr wrap="square" lIns="36576" rIns="36576" tIns="18288" bIns="18288" anchor="ctr">
+          <a:bodyPr wrap="square" lIns="36576" tIns="18288" rIns="36576" bIns="18288" anchor="ctr">
             <a:spAutoFit/>
           </a:bodyPr>
           <a:lstStyle/>
@@ -18625,7 +18620,9 @@
         <p:txBody>
           <a:bodyPr rtlCol="0" anchor="ctr"/>
           <a:lstStyle/>
-          <a:p/>
+          <a:p>
+            <a:endParaRPr/>
+          </a:p>
         </p:txBody>
       </p:sp>
       <p:sp>
@@ -18645,7 +18642,7 @@
           <a:noFill/>
         </p:spPr>
         <p:txBody>
-          <a:bodyPr wrap="square" lIns="36576" rIns="36576" tIns="18288" bIns="18288" anchor="t">
+          <a:bodyPr wrap="square" lIns="36576" tIns="18288" rIns="36576" bIns="18288" anchor="t">
             <a:spAutoFit/>
           </a:bodyPr>
           <a:lstStyle/>
@@ -18680,7 +18677,7 @@
           <a:noFill/>
         </p:spPr>
         <p:txBody>
-          <a:bodyPr wrap="square" lIns="36576" rIns="36576" tIns="18288" bIns="18288" anchor="t">
+          <a:bodyPr wrap="square" lIns="36576" tIns="18288" rIns="36576" bIns="18288" anchor="t">
             <a:spAutoFit/>
           </a:bodyPr>
           <a:lstStyle/>
@@ -18716,7 +18713,7 @@
           <a:noFill/>
         </p:spPr>
         <p:txBody>
-          <a:bodyPr wrap="square" lIns="36576" rIns="36576" tIns="18288" bIns="18288" anchor="t">
+          <a:bodyPr wrap="square" lIns="36576" tIns="18288" rIns="36576" bIns="18288" anchor="t">
             <a:spAutoFit/>
           </a:bodyPr>
           <a:lstStyle/>
@@ -18811,7 +18808,9 @@
         <p:txBody>
           <a:bodyPr rtlCol="0" anchor="ctr"/>
           <a:lstStyle/>
-          <a:p/>
+          <a:p>
+            <a:endParaRPr/>
+          </a:p>
         </p:txBody>
       </p:sp>
       <p:sp>
@@ -18831,7 +18830,7 @@
           <a:noFill/>
         </p:spPr>
         <p:txBody>
-          <a:bodyPr wrap="square" lIns="36576" rIns="36576" tIns="18288" bIns="18288" anchor="ctr">
+          <a:bodyPr wrap="square" lIns="36576" tIns="18288" rIns="36576" bIns="18288" anchor="ctr">
             <a:spAutoFit/>
           </a:bodyPr>
           <a:lstStyle/>
@@ -18892,7 +18891,9 @@
         <p:txBody>
           <a:bodyPr rtlCol="0" anchor="ctr"/>
           <a:lstStyle/>
-          <a:p/>
+          <a:p>
+            <a:endParaRPr/>
+          </a:p>
         </p:txBody>
       </p:sp>
       <p:sp>
@@ -18912,7 +18913,7 @@
           <a:noFill/>
         </p:spPr>
         <p:txBody>
-          <a:bodyPr wrap="square" lIns="36576" rIns="36576" tIns="18288" bIns="18288" anchor="t">
+          <a:bodyPr wrap="square" lIns="36576" tIns="18288" rIns="36576" bIns="18288" anchor="t">
             <a:spAutoFit/>
           </a:bodyPr>
           <a:lstStyle/>
@@ -18947,7 +18948,7 @@
           <a:noFill/>
         </p:spPr>
         <p:txBody>
-          <a:bodyPr wrap="square" lIns="36576" rIns="36576" tIns="18288" bIns="18288" anchor="t">
+          <a:bodyPr wrap="square" lIns="36576" tIns="18288" rIns="36576" bIns="18288" anchor="t">
             <a:spAutoFit/>
           </a:bodyPr>
           <a:lstStyle/>
@@ -18983,7 +18984,7 @@
           <a:noFill/>
         </p:spPr>
         <p:txBody>
-          <a:bodyPr wrap="square" lIns="36576" rIns="36576" tIns="18288" bIns="18288" anchor="t">
+          <a:bodyPr wrap="square" lIns="36576" tIns="18288" rIns="36576" bIns="18288" anchor="t">
             <a:spAutoFit/>
           </a:bodyPr>
           <a:lstStyle/>
@@ -19078,7 +19079,9 @@
         <p:txBody>
           <a:bodyPr rtlCol="0" anchor="ctr"/>
           <a:lstStyle/>
-          <a:p/>
+          <a:p>
+            <a:endParaRPr/>
+          </a:p>
         </p:txBody>
       </p:sp>
       <p:sp>
@@ -19098,7 +19101,7 @@
           <a:noFill/>
         </p:spPr>
         <p:txBody>
-          <a:bodyPr wrap="square" lIns="36576" rIns="36576" tIns="18288" bIns="18288" anchor="ctr">
+          <a:bodyPr wrap="square" lIns="36576" tIns="18288" rIns="36576" bIns="18288" anchor="ctr">
             <a:spAutoFit/>
           </a:bodyPr>
           <a:lstStyle/>
@@ -19159,7 +19162,9 @@
         <p:txBody>
           <a:bodyPr rtlCol="0" anchor="ctr"/>
           <a:lstStyle/>
-          <a:p/>
+          <a:p>
+            <a:endParaRPr/>
+          </a:p>
         </p:txBody>
       </p:sp>
       <p:sp>
@@ -19179,7 +19184,7 @@
           <a:noFill/>
         </p:spPr>
         <p:txBody>
-          <a:bodyPr wrap="square" lIns="36576" rIns="36576" tIns="18288" bIns="18288" anchor="t">
+          <a:bodyPr wrap="square" lIns="36576" tIns="18288" rIns="36576" bIns="18288" anchor="t">
             <a:spAutoFit/>
           </a:bodyPr>
           <a:lstStyle/>
@@ -19214,7 +19219,7 @@
           <a:noFill/>
         </p:spPr>
         <p:txBody>
-          <a:bodyPr wrap="square" lIns="36576" rIns="36576" tIns="18288" bIns="18288" anchor="t">
+          <a:bodyPr wrap="square" lIns="36576" tIns="18288" rIns="36576" bIns="18288" anchor="t">
             <a:spAutoFit/>
           </a:bodyPr>
           <a:lstStyle/>
@@ -19250,7 +19255,7 @@
           <a:noFill/>
         </p:spPr>
         <p:txBody>
-          <a:bodyPr wrap="square" lIns="36576" rIns="36576" tIns="18288" bIns="18288" anchor="t">
+          <a:bodyPr wrap="square" lIns="36576" tIns="18288" rIns="36576" bIns="18288" anchor="t">
             <a:spAutoFit/>
           </a:bodyPr>
           <a:lstStyle/>
@@ -19345,7 +19350,9 @@
         <p:txBody>
           <a:bodyPr rtlCol="0" anchor="ctr"/>
           <a:lstStyle/>
-          <a:p/>
+          <a:p>
+            <a:endParaRPr/>
+          </a:p>
         </p:txBody>
       </p:sp>
       <p:sp>
@@ -19365,7 +19372,7 @@
           <a:noFill/>
         </p:spPr>
         <p:txBody>
-          <a:bodyPr wrap="square" lIns="36576" rIns="36576" tIns="18288" bIns="18288" anchor="ctr">
+          <a:bodyPr wrap="square" lIns="36576" tIns="18288" rIns="36576" bIns="18288" anchor="ctr">
             <a:spAutoFit/>
           </a:bodyPr>
           <a:lstStyle/>
@@ -19400,7 +19407,7 @@
           <a:noFill/>
         </p:spPr>
         <p:txBody>
-          <a:bodyPr wrap="square" lIns="36576" rIns="36576" tIns="18288" bIns="18288" anchor="t">
+          <a:bodyPr wrap="square" lIns="36576" tIns="18288" rIns="36576" bIns="18288" anchor="t">
             <a:spAutoFit/>
           </a:bodyPr>
           <a:lstStyle/>
@@ -19461,7 +19468,9 @@
         <p:txBody>
           <a:bodyPr rtlCol="0" anchor="ctr"/>
           <a:lstStyle/>
-          <a:p/>
+          <a:p>
+            <a:endParaRPr/>
+          </a:p>
         </p:txBody>
       </p:sp>
       <p:sp>
@@ -19481,7 +19490,7 @@
           <a:noFill/>
         </p:spPr>
         <p:txBody>
-          <a:bodyPr wrap="square" lIns="36576" rIns="36576" tIns="18288" bIns="18288" anchor="t">
+          <a:bodyPr wrap="square" lIns="36576" tIns="18288" rIns="36576" bIns="18288" anchor="t">
             <a:spAutoFit/>
           </a:bodyPr>
           <a:lstStyle/>
@@ -19516,7 +19525,7 @@
           <a:noFill/>
         </p:spPr>
         <p:txBody>
-          <a:bodyPr wrap="square" lIns="36576" rIns="36576" tIns="18288" bIns="18288" anchor="t">
+          <a:bodyPr wrap="square" lIns="36576" tIns="18288" rIns="36576" bIns="18288" anchor="t">
             <a:spAutoFit/>
           </a:bodyPr>
           <a:lstStyle/>
@@ -19577,7 +19586,9 @@
         <p:txBody>
           <a:bodyPr rtlCol="0" anchor="ctr"/>
           <a:lstStyle/>
-          <a:p/>
+          <a:p>
+            <a:endParaRPr/>
+          </a:p>
         </p:txBody>
       </p:sp>
       <p:sp>
@@ -19597,7 +19608,7 @@
           <a:noFill/>
         </p:spPr>
         <p:txBody>
-          <a:bodyPr wrap="square" lIns="36576" rIns="36576" tIns="18288" bIns="18288" anchor="t">
+          <a:bodyPr wrap="square" lIns="36576" tIns="18288" rIns="36576" bIns="18288" anchor="t">
             <a:spAutoFit/>
           </a:bodyPr>
           <a:lstStyle/>
@@ -19632,7 +19643,7 @@
           <a:noFill/>
         </p:spPr>
         <p:txBody>
-          <a:bodyPr wrap="square" lIns="36576" rIns="36576" tIns="18288" bIns="18288" anchor="t">
+          <a:bodyPr wrap="square" lIns="36576" tIns="18288" rIns="36576" bIns="18288" anchor="t">
             <a:spAutoFit/>
           </a:bodyPr>
           <a:lstStyle/>
@@ -19693,7 +19704,9 @@
         <p:txBody>
           <a:bodyPr rtlCol="0" anchor="ctr"/>
           <a:lstStyle/>
-          <a:p/>
+          <a:p>
+            <a:endParaRPr/>
+          </a:p>
         </p:txBody>
       </p:sp>
       <p:sp>
@@ -19713,7 +19726,7 @@
           <a:noFill/>
         </p:spPr>
         <p:txBody>
-          <a:bodyPr wrap="square" lIns="36576" rIns="36576" tIns="18288" bIns="18288" anchor="t">
+          <a:bodyPr wrap="square" lIns="36576" tIns="18288" rIns="36576" bIns="18288" anchor="t">
             <a:spAutoFit/>
           </a:bodyPr>
           <a:lstStyle/>
@@ -19748,7 +19761,7 @@
           <a:noFill/>
         </p:spPr>
         <p:txBody>
-          <a:bodyPr wrap="square" lIns="36576" rIns="36576" tIns="18288" bIns="18288" anchor="t">
+          <a:bodyPr wrap="square" lIns="36576" tIns="18288" rIns="36576" bIns="18288" anchor="t">
             <a:spAutoFit/>
           </a:bodyPr>
           <a:lstStyle/>
@@ -19809,7 +19822,9 @@
         <p:txBody>
           <a:bodyPr rtlCol="0" anchor="ctr"/>
           <a:lstStyle/>
-          <a:p/>
+          <a:p>
+            <a:endParaRPr/>
+          </a:p>
         </p:txBody>
       </p:sp>
       <p:sp>
@@ -19829,7 +19844,7 @@
           <a:noFill/>
         </p:spPr>
         <p:txBody>
-          <a:bodyPr wrap="square" lIns="36576" rIns="36576" tIns="18288" bIns="18288" anchor="t">
+          <a:bodyPr wrap="square" lIns="36576" tIns="18288" rIns="36576" bIns="18288" anchor="t">
             <a:spAutoFit/>
           </a:bodyPr>
           <a:lstStyle/>
@@ -19864,7 +19879,7 @@
           <a:noFill/>
         </p:spPr>
         <p:txBody>
-          <a:bodyPr wrap="square" lIns="36576" rIns="36576" tIns="18288" bIns="18288" anchor="t">
+          <a:bodyPr wrap="square" lIns="36576" tIns="18288" rIns="36576" bIns="18288" anchor="t">
             <a:spAutoFit/>
           </a:bodyPr>
           <a:lstStyle/>
@@ -19899,7 +19914,7 @@
           <a:noFill/>
         </p:spPr>
         <p:txBody>
-          <a:bodyPr wrap="square" lIns="36576" rIns="36576" tIns="18288" bIns="18288" anchor="t">
+          <a:bodyPr wrap="square" lIns="36576" tIns="18288" rIns="36576" bIns="18288" anchor="t">
             <a:spAutoFit/>
           </a:bodyPr>
           <a:lstStyle/>
@@ -19934,7 +19949,7 @@
           <a:noFill/>
         </p:spPr>
         <p:txBody>
-          <a:bodyPr wrap="square" lIns="36576" rIns="36576" tIns="18288" bIns="18288" anchor="t">
+          <a:bodyPr wrap="square" lIns="36576" tIns="18288" rIns="36576" bIns="18288" anchor="t">
             <a:spAutoFit/>
           </a:bodyPr>
           <a:lstStyle/>
@@ -20291,44 +20306,44 @@
         <a:sysClr val="window" lastClr="FFFFFF"/>
       </a:lt1>
       <a:dk2>
-        <a:srgbClr val="1F497D"/>
+        <a:srgbClr val="0E2841"/>
       </a:dk2>
       <a:lt2>
-        <a:srgbClr val="EEECE1"/>
+        <a:srgbClr val="E8E8E8"/>
       </a:lt2>
       <a:accent1>
-        <a:srgbClr val="4F81BD"/>
+        <a:srgbClr val="156082"/>
       </a:accent1>
       <a:accent2>
-        <a:srgbClr val="C0504D"/>
+        <a:srgbClr val="E97132"/>
       </a:accent2>
       <a:accent3>
-        <a:srgbClr val="9BBB59"/>
+        <a:srgbClr val="196B24"/>
       </a:accent3>
       <a:accent4>
-        <a:srgbClr val="8064A2"/>
+        <a:srgbClr val="0F9ED5"/>
       </a:accent4>
       <a:accent5>
-        <a:srgbClr val="4BACC6"/>
+        <a:srgbClr val="A02B93"/>
       </a:accent5>
       <a:accent6>
-        <a:srgbClr val="F79646"/>
+        <a:srgbClr val="4EA72E"/>
       </a:accent6>
       <a:hlink>
-        <a:srgbClr val="0000FF"/>
+        <a:srgbClr val="467886"/>
       </a:hlink>
       <a:folHlink>
-        <a:srgbClr val="800080"/>
+        <a:srgbClr val="96607D"/>
       </a:folHlink>
     </a:clrScheme>
     <a:fontScheme name="Office">
       <a:majorFont>
-        <a:latin typeface="Calibri"/>
+        <a:latin typeface="Aptos Display" panose="02110004020202020204"/>
         <a:ea typeface=""/>
         <a:cs typeface=""/>
-        <a:font script="Jpan" typeface="ＭＳ Ｐゴシック"/>
+        <a:font script="Jpan" typeface="游ゴシック Light"/>
         <a:font script="Hang" typeface="맑은 고딕"/>
-        <a:font script="Hans" typeface="宋体"/>
+        <a:font script="Hans" typeface="等线 Light"/>
         <a:font script="Hant" typeface="新細明體"/>
         <a:font script="Arab" typeface="Times New Roman"/>
         <a:font script="Hebr" typeface="Times New Roman"/>
@@ -20356,14 +20371,31 @@
         <a:font script="Viet" typeface="Times New Roman"/>
         <a:font script="Uigh" typeface="Microsoft Uighur"/>
         <a:font script="Geor" typeface="Sylfaen"/>
+        <a:font script="Armn" typeface="Arial"/>
+        <a:font script="Bugi" typeface="Leelawadee UI"/>
+        <a:font script="Bopo" typeface="Microsoft JhengHei"/>
+        <a:font script="Java" typeface="Javanese Text"/>
+        <a:font script="Lisu" typeface="Segoe UI"/>
+        <a:font script="Mymr" typeface="Myanmar Text"/>
+        <a:font script="Nkoo" typeface="Ebrima"/>
+        <a:font script="Olck" typeface="Nirmala UI"/>
+        <a:font script="Osma" typeface="Ebrima"/>
+        <a:font script="Phag" typeface="Phagspa"/>
+        <a:font script="Syrn" typeface="Estrangelo Edessa"/>
+        <a:font script="Syrj" typeface="Estrangelo Edessa"/>
+        <a:font script="Syre" typeface="Estrangelo Edessa"/>
+        <a:font script="Sora" typeface="Nirmala UI"/>
+        <a:font script="Tale" typeface="Microsoft Tai Le"/>
+        <a:font script="Talu" typeface="Microsoft New Tai Lue"/>
+        <a:font script="Tfng" typeface="Ebrima"/>
       </a:majorFont>
       <a:minorFont>
-        <a:latin typeface="Calibri"/>
+        <a:latin typeface="Aptos" panose="02110004020202020204"/>
         <a:ea typeface=""/>
         <a:cs typeface=""/>
-        <a:font script="Jpan" typeface="ＭＳ Ｐゴシック"/>
+        <a:font script="Jpan" typeface="游ゴシック"/>
         <a:font script="Hang" typeface="맑은 고딕"/>
-        <a:font script="Hans" typeface="宋体"/>
+        <a:font script="Hans" typeface="等线"/>
         <a:font script="Hant" typeface="新細明體"/>
         <a:font script="Arab" typeface="Arial"/>
         <a:font script="Hebr" typeface="Arial"/>
@@ -20391,6 +20423,23 @@
         <a:font script="Viet" typeface="Arial"/>
         <a:font script="Uigh" typeface="Microsoft Uighur"/>
         <a:font script="Geor" typeface="Sylfaen"/>
+        <a:font script="Armn" typeface="Arial"/>
+        <a:font script="Bugi" typeface="Leelawadee UI"/>
+        <a:font script="Bopo" typeface="Microsoft JhengHei"/>
+        <a:font script="Java" typeface="Javanese Text"/>
+        <a:font script="Lisu" typeface="Segoe UI"/>
+        <a:font script="Mymr" typeface="Myanmar Text"/>
+        <a:font script="Nkoo" typeface="Ebrima"/>
+        <a:font script="Olck" typeface="Nirmala UI"/>
+        <a:font script="Osma" typeface="Ebrima"/>
+        <a:font script="Phag" typeface="Phagspa"/>
+        <a:font script="Syrn" typeface="Estrangelo Edessa"/>
+        <a:font script="Syrj" typeface="Estrangelo Edessa"/>
+        <a:font script="Syre" typeface="Estrangelo Edessa"/>
+        <a:font script="Sora" typeface="Nirmala UI"/>
+        <a:font script="Tale" typeface="Microsoft Tai Le"/>
+        <a:font script="Talu" typeface="Microsoft New Tai Lue"/>
+        <a:font script="Tfng" typeface="Ebrima"/>
       </a:minorFont>
     </a:fontScheme>
     <a:fmtScheme name="Office">
@@ -20402,180 +20451,136 @@
           <a:gsLst>
             <a:gs pos="0">
               <a:schemeClr val="phClr">
-                <a:tint val="50000"/>
-                <a:satMod val="300000"/>
+                <a:lumMod val="110000"/>
+                <a:satMod val="105000"/>
+                <a:tint val="67000"/>
               </a:schemeClr>
             </a:gs>
-            <a:gs pos="35000">
+            <a:gs pos="50000">
               <a:schemeClr val="phClr">
-                <a:tint val="37000"/>
-                <a:satMod val="300000"/>
+                <a:lumMod val="105000"/>
+                <a:satMod val="103000"/>
+                <a:tint val="73000"/>
               </a:schemeClr>
             </a:gs>
             <a:gs pos="100000">
               <a:schemeClr val="phClr">
-                <a:tint val="15000"/>
-                <a:satMod val="350000"/>
+                <a:lumMod val="105000"/>
+                <a:satMod val="109000"/>
+                <a:tint val="81000"/>
               </a:schemeClr>
             </a:gs>
           </a:gsLst>
-          <a:lin ang="16200000" scaled="1"/>
+          <a:lin ang="5400000" scaled="0"/>
         </a:gradFill>
         <a:gradFill rotWithShape="1">
           <a:gsLst>
             <a:gs pos="0">
               <a:schemeClr val="phClr">
-                <a:tint val="100000"/>
+                <a:satMod val="103000"/>
+                <a:lumMod val="102000"/>
+                <a:tint val="94000"/>
+              </a:schemeClr>
+            </a:gs>
+            <a:gs pos="50000">
+              <a:schemeClr val="phClr">
+                <a:satMod val="110000"/>
+                <a:lumMod val="100000"/>
                 <a:shade val="100000"/>
-                <a:satMod val="130000"/>
               </a:schemeClr>
             </a:gs>
             <a:gs pos="100000">
               <a:schemeClr val="phClr">
-                <a:tint val="50000"/>
-                <a:shade val="100000"/>
-                <a:satMod val="350000"/>
+                <a:lumMod val="99000"/>
+                <a:satMod val="120000"/>
+                <a:shade val="78000"/>
               </a:schemeClr>
             </a:gs>
           </a:gsLst>
-          <a:lin ang="16200000" scaled="0"/>
+          <a:lin ang="5400000" scaled="0"/>
         </a:gradFill>
       </a:fillStyleLst>
       <a:lnStyleLst>
-        <a:ln w="9525" cap="flat" cmpd="sng" algn="ctr">
+        <a:ln w="12700" cap="flat" cmpd="sng" algn="ctr">
           <a:solidFill>
-            <a:schemeClr val="phClr">
-              <a:shade val="95000"/>
-              <a:satMod val="105000"/>
-            </a:schemeClr>
+            <a:schemeClr val="phClr"/>
           </a:solidFill>
           <a:prstDash val="solid"/>
+          <a:miter lim="800000"/>
+        </a:ln>
+        <a:ln w="19050" cap="flat" cmpd="sng" algn="ctr">
+          <a:solidFill>
+            <a:schemeClr val="phClr"/>
+          </a:solidFill>
+          <a:prstDash val="solid"/>
+          <a:miter lim="800000"/>
         </a:ln>
         <a:ln w="25400" cap="flat" cmpd="sng" algn="ctr">
           <a:solidFill>
             <a:schemeClr val="phClr"/>
           </a:solidFill>
           <a:prstDash val="solid"/>
-        </a:ln>
-        <a:ln w="38100" cap="flat" cmpd="sng" algn="ctr">
-          <a:solidFill>
-            <a:schemeClr val="phClr"/>
-          </a:solidFill>
-          <a:prstDash val="solid"/>
+          <a:miter lim="800000"/>
         </a:ln>
       </a:lnStyleLst>
       <a:effectStyleLst>
         <a:effectStyle>
+          <a:effectLst/>
+        </a:effectStyle>
+        <a:effectStyle>
+          <a:effectLst/>
+        </a:effectStyle>
+        <a:effectStyle>
           <a:effectLst>
-            <a:outerShdw blurRad="40000" dist="20000" dir="5400000" rotWithShape="0">
+            <a:outerShdw blurRad="57150" dist="19050" dir="5400000" algn="ctr" rotWithShape="0">
               <a:srgbClr val="000000">
-                <a:alpha val="38000"/>
+                <a:alpha val="63000"/>
               </a:srgbClr>
             </a:outerShdw>
           </a:effectLst>
-        </a:effectStyle>
-        <a:effectStyle>
-          <a:effectLst>
-            <a:outerShdw blurRad="40000" dist="23000" dir="5400000" rotWithShape="0">
-              <a:srgbClr val="000000">
-                <a:alpha val="35000"/>
-              </a:srgbClr>
-            </a:outerShdw>
-          </a:effectLst>
-        </a:effectStyle>
-        <a:effectStyle>
-          <a:effectLst>
-            <a:outerShdw blurRad="40000" dist="23000" dir="5400000" rotWithShape="0">
-              <a:srgbClr val="000000">
-                <a:alpha val="35000"/>
-              </a:srgbClr>
-            </a:outerShdw>
-          </a:effectLst>
-          <a:scene3d>
-            <a:camera prst="orthographicFront">
-              <a:rot lat="0" lon="0" rev="0"/>
-            </a:camera>
-            <a:lightRig rig="threePt" dir="t">
-              <a:rot lat="0" lon="0" rev="1200000"/>
-            </a:lightRig>
-          </a:scene3d>
-          <a:sp3d>
-            <a:bevelT w="63500" h="25400"/>
-          </a:sp3d>
         </a:effectStyle>
       </a:effectStyleLst>
       <a:bgFillStyleLst>
         <a:solidFill>
           <a:schemeClr val="phClr"/>
         </a:solidFill>
+        <a:solidFill>
+          <a:schemeClr val="phClr">
+            <a:tint val="95000"/>
+            <a:satMod val="170000"/>
+          </a:schemeClr>
+        </a:solidFill>
         <a:gradFill rotWithShape="1">
           <a:gsLst>
             <a:gs pos="0">
               <a:schemeClr val="phClr">
-                <a:tint val="40000"/>
-                <a:satMod val="350000"/>
+                <a:tint val="93000"/>
+                <a:satMod val="150000"/>
+                <a:shade val="98000"/>
+                <a:lumMod val="102000"/>
               </a:schemeClr>
             </a:gs>
-            <a:gs pos="40000">
+            <a:gs pos="50000">
               <a:schemeClr val="phClr">
-                <a:tint val="45000"/>
-                <a:shade val="99000"/>
-                <a:satMod val="350000"/>
+                <a:tint val="98000"/>
+                <a:satMod val="130000"/>
+                <a:shade val="90000"/>
+                <a:lumMod val="103000"/>
               </a:schemeClr>
             </a:gs>
             <a:gs pos="100000">
               <a:schemeClr val="phClr">
-                <a:shade val="20000"/>
-                <a:satMod val="255000"/>
+                <a:shade val="63000"/>
+                <a:satMod val="120000"/>
               </a:schemeClr>
             </a:gs>
           </a:gsLst>
-          <a:path path="circle">
-            <a:fillToRect l="50000" t="-80000" r="50000" b="180000"/>
-          </a:path>
-        </a:gradFill>
-        <a:gradFill rotWithShape="1">
-          <a:gsLst>
-            <a:gs pos="0">
-              <a:schemeClr val="phClr">
-                <a:tint val="80000"/>
-                <a:satMod val="300000"/>
-              </a:schemeClr>
-            </a:gs>
-            <a:gs pos="100000">
-              <a:schemeClr val="phClr">
-                <a:shade val="30000"/>
-                <a:satMod val="200000"/>
-              </a:schemeClr>
-            </a:gs>
-          </a:gsLst>
-          <a:path path="circle">
-            <a:fillToRect l="50000" t="50000" r="50000" b="50000"/>
-          </a:path>
+          <a:lin ang="5400000" scaled="0"/>
         </a:gradFill>
       </a:bgFillStyleLst>
     </a:fmtScheme>
   </a:themeElements>
   <a:objectDefaults>
-    <a:spDef>
-      <a:spPr/>
-      <a:bodyPr/>
-      <a:lstStyle/>
-      <a:style>
-        <a:lnRef idx="1">
-          <a:schemeClr val="accent1"/>
-        </a:lnRef>
-        <a:fillRef idx="3">
-          <a:schemeClr val="accent1"/>
-        </a:fillRef>
-        <a:effectRef idx="2">
-          <a:schemeClr val="accent1"/>
-        </a:effectRef>
-        <a:fontRef idx="minor">
-          <a:schemeClr val="lt1"/>
-        </a:fontRef>
-      </a:style>
-    </a:spDef>
     <a:lnDef>
       <a:spPr/>
       <a:bodyPr/>
@@ -20597,5 +20602,16 @@
     </a:lnDef>
   </a:objectDefaults>
   <a:extraClrSchemeLst/>
+  <a:extLst>
+    <a:ext uri="{05A4C25C-085E-4340-85A3-A5531E510DB2}">
+      <thm15:themeFamily xmlns:thm15="http://schemas.microsoft.com/office/thememl/2012/main" name="Office Theme" id="{2E142A2C-CD16-42D6-873A-C26D2A0506FA}" vid="{1BDDFF52-6CD6-40A5-AB3C-68EB2F1E4D0A}"/>
+    </a:ext>
+  </a:extLst>
 </a:theme>
+</file>
+
+<file path=docMetadata/LabelInfo.xml><?xml version="1.0" encoding="utf-8"?>
+<clbl:labelList xmlns:clbl="http://schemas.microsoft.com/office/2020/mipLabelMetadata">
+  <clbl:label id="{f38ae155-f7b4-4cd1-b894-873640b59936}" enabled="1" method="Standard" siteId="{aac81192-f6f6-4e8a-9f5e-a663e2d41612}" contentBits="0" removed="0"/>
+</clbl:labelList>
 </file>